--- a/docs/Apresentacao_Requisicoes_App.pptx
+++ b/docs/Apresentacao_Requisicoes_App.pptx
@@ -17,6 +17,7 @@
     <p:sldId id="265" r:id="rId16"/>
     <p:sldId id="266" r:id="rId17"/>
     <p:sldId id="267" r:id="rId18"/>
+    <p:sldId id="268" r:id="rId19"/>
   </p:sldIdLst>
   <p:sldSz cx="12188952" cy="6858000" type="screen4x3"/>
   <p:notesSz cx="6858000" cy="9144000"/>
@@ -3109,14 +3110,57 @@
       <p:grpSpPr/>
       <p:sp>
         <p:nvSpPr>
-          <p:cNvPr id="2" name="TextBox 1"/>
+          <p:cNvPr id="2" name="Rectangle 1"/>
+          <p:cNvSpPr/>
+          <p:nvPr/>
+        </p:nvSpPr>
+        <p:spPr>
+          <a:xfrm>
+            <a:off x="0" y="5577840"/>
+            <a:ext cx="12188952" cy="1280160"/>
+          </a:xfrm>
+          <a:prstGeom prst="rect">
+            <a:avLst/>
+          </a:prstGeom>
+          <a:solidFill>
+            <a:srgbClr val="162D4F"/>
+          </a:solidFill>
+          <a:ln>
+            <a:noFill/>
+          </a:ln>
+        </p:spPr>
+        <p:style>
+          <a:lnRef idx="1">
+            <a:schemeClr val="accent1"/>
+          </a:lnRef>
+          <a:fillRef idx="3">
+            <a:schemeClr val="accent1"/>
+          </a:fillRef>
+          <a:effectRef idx="2">
+            <a:schemeClr val="accent1"/>
+          </a:effectRef>
+          <a:fontRef idx="minor">
+            <a:schemeClr val="lt1"/>
+          </a:fontRef>
+        </p:style>
+        <p:txBody>
+          <a:bodyPr rtlCol="0" anchor="ctr"/>
+          <a:lstStyle/>
+          <a:p>
+            <a:pPr algn="ctr"/>
+          </a:p>
+        </p:txBody>
+      </p:sp>
+      <p:sp>
+        <p:nvSpPr>
+          <p:cNvPr id="3" name="TextBox 2"/>
           <p:cNvSpPr txBox="1"/>
           <p:nvPr/>
         </p:nvSpPr>
         <p:spPr>
           <a:xfrm>
-            <a:off x="914400" y="2011680"/>
-            <a:ext cx="10332720" cy="1371600"/>
+            <a:off x="914400" y="1737360"/>
+            <a:ext cx="10332720" cy="1280160"/>
           </a:xfrm>
           <a:prstGeom prst="rect">
             <a:avLst/>
@@ -3131,7 +3175,7 @@
           <a:p>
             <a:pPr algn="ctr"/>
             <a:r>
-              <a:rPr sz="4400" b="1">
+              <a:rPr sz="5200" b="1">
                 <a:solidFill>
                   <a:srgbClr val="FFFFFF"/>
                 </a:solidFill>
@@ -3144,13 +3188,13 @@
       </p:sp>
       <p:sp>
         <p:nvSpPr>
-          <p:cNvPr id="3" name="TextBox 2"/>
+          <p:cNvPr id="4" name="TextBox 3"/>
           <p:cNvSpPr txBox="1"/>
           <p:nvPr/>
         </p:nvSpPr>
         <p:spPr>
           <a:xfrm>
-            <a:off x="914400" y="3474720"/>
+            <a:off x="914400" y="3200400"/>
             <a:ext cx="10332720" cy="731520"/>
           </a:xfrm>
           <a:prstGeom prst="rect">
@@ -3166,20 +3210,20 @@
           <a:p>
             <a:pPr algn="ctr"/>
             <a:r>
-              <a:rPr sz="2200" b="0">
+              <a:rPr sz="2600" b="0">
                 <a:solidFill>
                   <a:srgbClr val="D6E4F0"/>
                 </a:solidFill>
                 <a:latin typeface="Calibri"/>
               </a:rPr>
-              <a:t>Sistema de Gestão de Requisições</a:t>
-            </a:r>
-          </a:p>
-        </p:txBody>
-      </p:sp>
-      <p:sp>
-        <p:nvSpPr>
-          <p:cNvPr id="4" name="TextBox 3"/>
+              <a:t>Ferragens Pinheiro</a:t>
+            </a:r>
+          </a:p>
+        </p:txBody>
+      </p:sp>
+      <p:sp>
+        <p:nvSpPr>
+          <p:cNvPr id="5" name="TextBox 4"/>
           <p:cNvSpPr txBox="1"/>
           <p:nvPr/>
         </p:nvSpPr>
@@ -3207,7 +3251,7 @@
                 </a:solidFill>
                 <a:latin typeface="Calibri"/>
               </a:rPr>
-              <a:t>Ferragens Pinheiro  |  v1.1.0  |  Maio de 2026</a:t>
+              <a:t>Maio de 2026  |  v1.1.0</a:t>
             </a:r>
           </a:p>
         </p:txBody>
@@ -3268,7 +3312,7 @@
                 </a:solidFill>
                 <a:latin typeface="Calibri"/>
               </a:rPr>
-              <a:t>Resultados</a:t>
+              <a:t>Mais Recursos do Sistema</a:t>
             </a:r>
           </a:p>
         </p:txBody>
@@ -3318,59 +3362,14 @@
       </p:sp>
       <p:sp>
         <p:nvSpPr>
-          <p:cNvPr id="4" name="Rectangle 3"/>
-          <p:cNvSpPr/>
-          <p:nvPr/>
-        </p:nvSpPr>
-        <p:spPr>
-          <a:xfrm>
-            <a:off x="365760" y="1188720"/>
-            <a:ext cx="2651760" cy="1828800"/>
-          </a:xfrm>
-          <a:prstGeom prst="rect">
-            <a:avLst/>
-          </a:prstGeom>
-          <a:solidFill>
-            <a:srgbClr val="1E3A5F"/>
-          </a:solidFill>
-          <a:ln w="12700">
-            <a:solidFill>
-              <a:srgbClr val="2E6DA4"/>
-            </a:solidFill>
-          </a:ln>
-        </p:spPr>
-        <p:style>
-          <a:lnRef idx="1">
-            <a:schemeClr val="accent1"/>
-          </a:lnRef>
-          <a:fillRef idx="3">
-            <a:schemeClr val="accent1"/>
-          </a:fillRef>
-          <a:effectRef idx="2">
-            <a:schemeClr val="accent1"/>
-          </a:effectRef>
-          <a:fontRef idx="minor">
-            <a:schemeClr val="lt1"/>
-          </a:fontRef>
-        </p:style>
-        <p:txBody>
-          <a:bodyPr rtlCol="0" anchor="ctr"/>
-          <a:lstStyle/>
-          <a:p>
-            <a:pPr algn="ctr"/>
-          </a:p>
-        </p:txBody>
-      </p:sp>
-      <p:sp>
-        <p:nvSpPr>
-          <p:cNvPr id="5" name="TextBox 4"/>
+          <p:cNvPr id="4" name="TextBox 3"/>
           <p:cNvSpPr txBox="1"/>
           <p:nvPr/>
         </p:nvSpPr>
         <p:spPr>
           <a:xfrm>
-            <a:off x="365760" y="1188720"/>
-            <a:ext cx="2651760" cy="1097280"/>
+            <a:off x="548640" y="1280160"/>
+            <a:ext cx="11064240" cy="5029200"/>
           </a:xfrm>
           <a:prstGeom prst="rect">
             <a:avLst/>
@@ -3383,514 +3382,99 @@
           </a:bodyPr>
           <a:lstStyle/>
           <a:p>
-            <a:pPr algn="ctr"/>
-            <a:r>
-              <a:rPr sz="4000" b="1">
-                <a:solidFill>
-                  <a:srgbClr val="FFFFFF"/>
-                </a:solidFill>
-                <a:latin typeface="Calibri"/>
-              </a:rPr>
-              <a:t>6</a:t>
-            </a:r>
-          </a:p>
-        </p:txBody>
-      </p:sp>
-      <p:sp>
-        <p:nvSpPr>
-          <p:cNvPr id="6" name="TextBox 5"/>
-          <p:cNvSpPr txBox="1"/>
-          <p:nvPr/>
-        </p:nvSpPr>
-        <p:spPr>
-          <a:xfrm>
-            <a:off x="365760" y="2286000"/>
-            <a:ext cx="2651760" cy="640080"/>
-          </a:xfrm>
-          <a:prstGeom prst="rect">
-            <a:avLst/>
-          </a:prstGeom>
-          <a:noFill/>
-        </p:spPr>
-        <p:txBody>
-          <a:bodyPr wrap="square">
-            <a:spAutoFit/>
-          </a:bodyPr>
-          <a:lstStyle/>
-          <a:p>
-            <a:pPr algn="ctr"/>
-            <a:r>
-              <a:rPr sz="1200" b="0">
-                <a:solidFill>
-                  <a:srgbClr val="D6E4F0"/>
-                </a:solidFill>
-                <a:latin typeface="Calibri"/>
-              </a:rPr>
-              <a:t>Perfis de acesso</a:t>
-            </a:r>
-          </a:p>
-        </p:txBody>
-      </p:sp>
-      <p:sp>
-        <p:nvSpPr>
-          <p:cNvPr id="7" name="Rectangle 6"/>
-          <p:cNvSpPr/>
-          <p:nvPr/>
-        </p:nvSpPr>
-        <p:spPr>
-          <a:xfrm>
-            <a:off x="3291840" y="1188720"/>
-            <a:ext cx="2651760" cy="1828800"/>
-          </a:xfrm>
-          <a:prstGeom prst="rect">
-            <a:avLst/>
-          </a:prstGeom>
-          <a:solidFill>
-            <a:srgbClr val="1E3A5F"/>
-          </a:solidFill>
-          <a:ln w="12700">
-            <a:solidFill>
-              <a:srgbClr val="2E6DA4"/>
-            </a:solidFill>
-          </a:ln>
-        </p:spPr>
-        <p:style>
-          <a:lnRef idx="1">
-            <a:schemeClr val="accent1"/>
-          </a:lnRef>
-          <a:fillRef idx="3">
-            <a:schemeClr val="accent1"/>
-          </a:fillRef>
-          <a:effectRef idx="2">
-            <a:schemeClr val="accent1"/>
-          </a:effectRef>
-          <a:fontRef idx="minor">
-            <a:schemeClr val="lt1"/>
-          </a:fontRef>
-        </p:style>
-        <p:txBody>
-          <a:bodyPr rtlCol="0" anchor="ctr"/>
-          <a:lstStyle/>
-          <a:p>
-            <a:pPr algn="ctr"/>
-          </a:p>
-        </p:txBody>
-      </p:sp>
-      <p:sp>
-        <p:nvSpPr>
-          <p:cNvPr id="8" name="TextBox 7"/>
-          <p:cNvSpPr txBox="1"/>
-          <p:nvPr/>
-        </p:nvSpPr>
-        <p:spPr>
-          <a:xfrm>
-            <a:off x="3291840" y="1188720"/>
-            <a:ext cx="2651760" cy="1097280"/>
-          </a:xfrm>
-          <a:prstGeom prst="rect">
-            <a:avLst/>
-          </a:prstGeom>
-          <a:noFill/>
-        </p:spPr>
-        <p:txBody>
-          <a:bodyPr wrap="square">
-            <a:spAutoFit/>
-          </a:bodyPr>
-          <a:lstStyle/>
-          <a:p>
-            <a:pPr algn="ctr"/>
-            <a:r>
-              <a:rPr sz="4000" b="1">
-                <a:solidFill>
-                  <a:srgbClr val="FFFFFF"/>
-                </a:solidFill>
-                <a:latin typeface="Calibri"/>
-              </a:rPr>
-              <a:t>12</a:t>
-            </a:r>
-          </a:p>
-        </p:txBody>
-      </p:sp>
-      <p:sp>
-        <p:nvSpPr>
-          <p:cNvPr id="9" name="TextBox 8"/>
-          <p:cNvSpPr txBox="1"/>
-          <p:nvPr/>
-        </p:nvSpPr>
-        <p:spPr>
-          <a:xfrm>
-            <a:off x="3291840" y="2286000"/>
-            <a:ext cx="2651760" cy="640080"/>
-          </a:xfrm>
-          <a:prstGeom prst="rect">
-            <a:avLst/>
-          </a:prstGeom>
-          <a:noFill/>
-        </p:spPr>
-        <p:txBody>
-          <a:bodyPr wrap="square">
-            <a:spAutoFit/>
-          </a:bodyPr>
-          <a:lstStyle/>
-          <a:p>
-            <a:pPr algn="ctr"/>
-            <a:r>
-              <a:rPr sz="1200" b="0">
-                <a:solidFill>
-                  <a:srgbClr val="D6E4F0"/>
-                </a:solidFill>
-                <a:latin typeface="Calibri"/>
-              </a:rPr>
-              <a:t>Tabelas no banco</a:t>
-            </a:r>
-          </a:p>
-        </p:txBody>
-      </p:sp>
-      <p:sp>
-        <p:nvSpPr>
-          <p:cNvPr id="10" name="Rectangle 9"/>
-          <p:cNvSpPr/>
-          <p:nvPr/>
-        </p:nvSpPr>
-        <p:spPr>
-          <a:xfrm>
-            <a:off x="6217920" y="1188720"/>
-            <a:ext cx="2651760" cy="1828800"/>
-          </a:xfrm>
-          <a:prstGeom prst="rect">
-            <a:avLst/>
-          </a:prstGeom>
-          <a:solidFill>
-            <a:srgbClr val="1E3A5F"/>
-          </a:solidFill>
-          <a:ln w="12700">
-            <a:solidFill>
-              <a:srgbClr val="2E6DA4"/>
-            </a:solidFill>
-          </a:ln>
-        </p:spPr>
-        <p:style>
-          <a:lnRef idx="1">
-            <a:schemeClr val="accent1"/>
-          </a:lnRef>
-          <a:fillRef idx="3">
-            <a:schemeClr val="accent1"/>
-          </a:fillRef>
-          <a:effectRef idx="2">
-            <a:schemeClr val="accent1"/>
-          </a:effectRef>
-          <a:fontRef idx="minor">
-            <a:schemeClr val="lt1"/>
-          </a:fontRef>
-        </p:style>
-        <p:txBody>
-          <a:bodyPr rtlCol="0" anchor="ctr"/>
-          <a:lstStyle/>
-          <a:p>
-            <a:pPr algn="ctr"/>
-          </a:p>
-        </p:txBody>
-      </p:sp>
-      <p:sp>
-        <p:nvSpPr>
-          <p:cNvPr id="11" name="TextBox 10"/>
-          <p:cNvSpPr txBox="1"/>
-          <p:nvPr/>
-        </p:nvSpPr>
-        <p:spPr>
-          <a:xfrm>
-            <a:off x="6217920" y="1188720"/>
-            <a:ext cx="2651760" cy="1097280"/>
-          </a:xfrm>
-          <a:prstGeom prst="rect">
-            <a:avLst/>
-          </a:prstGeom>
-          <a:noFill/>
-        </p:spPr>
-        <p:txBody>
-          <a:bodyPr wrap="square">
-            <a:spAutoFit/>
-          </a:bodyPr>
-          <a:lstStyle/>
-          <a:p>
-            <a:pPr algn="ctr"/>
-            <a:r>
-              <a:rPr sz="4000" b="1">
-                <a:solidFill>
-                  <a:srgbClr val="FFFFFF"/>
-                </a:solidFill>
-                <a:latin typeface="Calibri"/>
-              </a:rPr>
-              <a:t>11</a:t>
-            </a:r>
-          </a:p>
-        </p:txBody>
-      </p:sp>
-      <p:sp>
-        <p:nvSpPr>
-          <p:cNvPr id="12" name="TextBox 11"/>
-          <p:cNvSpPr txBox="1"/>
-          <p:nvPr/>
-        </p:nvSpPr>
-        <p:spPr>
-          <a:xfrm>
-            <a:off x="6217920" y="2286000"/>
-            <a:ext cx="2651760" cy="640080"/>
-          </a:xfrm>
-          <a:prstGeom prst="rect">
-            <a:avLst/>
-          </a:prstGeom>
-          <a:noFill/>
-        </p:spPr>
-        <p:txBody>
-          <a:bodyPr wrap="square">
-            <a:spAutoFit/>
-          </a:bodyPr>
-          <a:lstStyle/>
-          <a:p>
-            <a:pPr algn="ctr"/>
-            <a:r>
-              <a:rPr sz="1200" b="0">
-                <a:solidFill>
-                  <a:srgbClr val="D6E4F0"/>
-                </a:solidFill>
-                <a:latin typeface="Calibri"/>
-              </a:rPr>
-              <a:t>Telas</a:t>
-            </a:r>
-          </a:p>
-        </p:txBody>
-      </p:sp>
-      <p:sp>
-        <p:nvSpPr>
-          <p:cNvPr id="13" name="Rectangle 12"/>
-          <p:cNvSpPr/>
-          <p:nvPr/>
-        </p:nvSpPr>
-        <p:spPr>
-          <a:xfrm>
-            <a:off x="9144000" y="1188720"/>
-            <a:ext cx="2651760" cy="1828800"/>
-          </a:xfrm>
-          <a:prstGeom prst="rect">
-            <a:avLst/>
-          </a:prstGeom>
-          <a:solidFill>
-            <a:srgbClr val="1E3A5F"/>
-          </a:solidFill>
-          <a:ln w="12700">
-            <a:solidFill>
-              <a:srgbClr val="2E6DA4"/>
-            </a:solidFill>
-          </a:ln>
-        </p:spPr>
-        <p:style>
-          <a:lnRef idx="1">
-            <a:schemeClr val="accent1"/>
-          </a:lnRef>
-          <a:fillRef idx="3">
-            <a:schemeClr val="accent1"/>
-          </a:fillRef>
-          <a:effectRef idx="2">
-            <a:schemeClr val="accent1"/>
-          </a:effectRef>
-          <a:fontRef idx="minor">
-            <a:schemeClr val="lt1"/>
-          </a:fontRef>
-        </p:style>
-        <p:txBody>
-          <a:bodyPr rtlCol="0" anchor="ctr"/>
-          <a:lstStyle/>
-          <a:p>
-            <a:pPr algn="ctr"/>
-          </a:p>
-        </p:txBody>
-      </p:sp>
-      <p:sp>
-        <p:nvSpPr>
-          <p:cNvPr id="14" name="TextBox 13"/>
-          <p:cNvSpPr txBox="1"/>
-          <p:nvPr/>
-        </p:nvSpPr>
-        <p:spPr>
-          <a:xfrm>
-            <a:off x="9144000" y="1188720"/>
-            <a:ext cx="2651760" cy="1097280"/>
-          </a:xfrm>
-          <a:prstGeom prst="rect">
-            <a:avLst/>
-          </a:prstGeom>
-          <a:noFill/>
-        </p:spPr>
-        <p:txBody>
-          <a:bodyPr wrap="square">
-            <a:spAutoFit/>
-          </a:bodyPr>
-          <a:lstStyle/>
-          <a:p>
-            <a:pPr algn="ctr"/>
-            <a:r>
-              <a:rPr sz="4000" b="1">
-                <a:solidFill>
-                  <a:srgbClr val="FFFFFF"/>
-                </a:solidFill>
-                <a:latin typeface="Calibri"/>
-              </a:rPr>
-              <a:t>100%</a:t>
-            </a:r>
-          </a:p>
-        </p:txBody>
-      </p:sp>
-      <p:sp>
-        <p:nvSpPr>
-          <p:cNvPr id="15" name="TextBox 14"/>
-          <p:cNvSpPr txBox="1"/>
-          <p:nvPr/>
-        </p:nvSpPr>
-        <p:spPr>
-          <a:xfrm>
-            <a:off x="9144000" y="2286000"/>
-            <a:ext cx="2651760" cy="640080"/>
-          </a:xfrm>
-          <a:prstGeom prst="rect">
-            <a:avLst/>
-          </a:prstGeom>
-          <a:noFill/>
-        </p:spPr>
-        <p:txBody>
-          <a:bodyPr wrap="square">
-            <a:spAutoFit/>
-          </a:bodyPr>
-          <a:lstStyle/>
-          <a:p>
-            <a:pPr algn="ctr"/>
-            <a:r>
-              <a:rPr sz="1200" b="0">
-                <a:solidFill>
-                  <a:srgbClr val="D6E4F0"/>
-                </a:solidFill>
-                <a:latin typeface="Calibri"/>
-              </a:rPr>
-              <a:t>Interno</a:t>
-            </a:r>
-          </a:p>
-        </p:txBody>
-      </p:sp>
-      <p:sp>
-        <p:nvSpPr>
-          <p:cNvPr id="16" name="TextBox 15"/>
-          <p:cNvSpPr txBox="1"/>
-          <p:nvPr/>
-        </p:nvSpPr>
-        <p:spPr>
-          <a:xfrm>
-            <a:off x="457200" y="3246120"/>
-            <a:ext cx="11247120" cy="3291840"/>
-          </a:xfrm>
-          <a:prstGeom prst="rect">
-            <a:avLst/>
-          </a:prstGeom>
-          <a:noFill/>
-        </p:spPr>
-        <p:txBody>
-          <a:bodyPr wrap="square">
-            <a:spAutoFit/>
-          </a:bodyPr>
-          <a:lstStyle/>
-          <a:p>
             <a:pPr>
               <a:spcAft>
-                <a:spcPts val="400"/>
+                <a:spcPts val="1400"/>
               </a:spcAft>
-              <a:defRPr sz="1300">
-                <a:solidFill>
-                  <a:srgbClr val="27AE60"/>
+              <a:defRPr sz="1600">
+                <a:solidFill>
+                  <a:srgbClr val="222222"/>
                 </a:solidFill>
                 <a:latin typeface="Calibri"/>
               </a:defRPr>
             </a:pPr>
             <a:r>
-              <a:t>✅  Rastreabilidade completa de todas as requisições</a:t>
+              <a:t>📅  Histórico — filtre e exporte todas as requisições por data, status ou vendedor</a:t>
             </a:r>
           </a:p>
           <a:p>
             <a:pPr>
               <a:spcAft>
-                <a:spcPts val="400"/>
+                <a:spcPts val="1400"/>
               </a:spcAft>
-              <a:defRPr sz="1300">
-                <a:solidFill>
-                  <a:srgbClr val="27AE60"/>
+              <a:defRPr sz="1600">
+                <a:solidFill>
+                  <a:srgbClr val="222222"/>
                 </a:solidFill>
                 <a:latin typeface="Calibri"/>
               </a:defRPr>
             </a:pPr>
             <a:r>
-              <a:t>✅  PDFs padronizados e organizados por vendedor automaticamente</a:t>
+              <a:t>⚖️  Calculadora de Peso — calcule a massa de perfis metálicos por dimensão</a:t>
             </a:r>
           </a:p>
           <a:p>
             <a:pPr>
               <a:spcAft>
-                <a:spcPts val="400"/>
+                <a:spcPts val="1400"/>
               </a:spcAft>
-              <a:defRPr sz="1300">
-                <a:solidFill>
-                  <a:srgbClr val="27AE60"/>
+              <a:defRPr sz="1600">
+                <a:solidFill>
+                  <a:srgbClr val="222222"/>
                 </a:solidFill>
                 <a:latin typeface="Calibri"/>
               </a:defRPr>
             </a:pPr>
             <a:r>
-              <a:t>✅  Equipes de produção com acesso em tempo real</a:t>
+              <a:t>🔒  Perfis de Acesso — 6 perfis, cada usuário vê e faz apenas o da sua função</a:t>
             </a:r>
           </a:p>
           <a:p>
             <a:pPr>
               <a:spcAft>
-                <a:spcPts val="400"/>
+                <a:spcPts val="1400"/>
               </a:spcAft>
-              <a:defRPr sz="1300">
-                <a:solidFill>
-                  <a:srgbClr val="27AE60"/>
+              <a:defRPr sz="1600">
+                <a:solidFill>
+                  <a:srgbClr val="222222"/>
                 </a:solidFill>
                 <a:latin typeface="Calibri"/>
               </a:defRPr>
             </a:pPr>
             <a:r>
-              <a:t>✅  Backup automático do banco de dados sem intervenção</a:t>
+              <a:t>🔄  Atualização Automática — nova versão detectada no startup, instala com um clique</a:t>
             </a:r>
           </a:p>
           <a:p>
             <a:pPr>
               <a:spcAft>
-                <a:spcPts val="400"/>
+                <a:spcPts val="1400"/>
               </a:spcAft>
-              <a:defRPr sz="1300">
-                <a:solidFill>
-                  <a:srgbClr val="27AE60"/>
+              <a:defRPr sz="1600">
+                <a:solidFill>
+                  <a:srgbClr val="222222"/>
                 </a:solidFill>
                 <a:latin typeface="Calibri"/>
               </a:defRPr>
             </a:pPr>
             <a:r>
-              <a:t>✅  Atualização automática — usuário instala com um clique</a:t>
+              <a:t>🌙  Personalização — tema claro/escuro e tamanho de fonte por usuário</a:t>
             </a:r>
           </a:p>
           <a:p>
             <a:pPr>
               <a:spcAft>
-                <a:spcPts val="400"/>
+                <a:spcPts val="1400"/>
               </a:spcAft>
-              <a:defRPr sz="1300">
-                <a:solidFill>
-                  <a:srgbClr val="27AE60"/>
+              <a:defRPr sz="1600">
+                <a:solidFill>
+                  <a:srgbClr val="222222"/>
                 </a:solidFill>
                 <a:latin typeface="Calibri"/>
               </a:defRPr>
             </a:pPr>
             <a:r>
-              <a:t>✅  Interface adaptável a qualquer resolução de tela</a:t>
+              <a:t>💾  Backup Automático — banco de dados salvo diariamente em pasta de rede</a:t>
             </a:r>
           </a:p>
         </p:txBody>
@@ -3951,7 +3535,7 @@
                 </a:solidFill>
                 <a:latin typeface="Calibri"/>
               </a:rPr>
-              <a:t>Próximos Passos</a:t>
+              <a:t>O que mudou na prática</a:t>
             </a:r>
           </a:p>
         </p:txBody>
@@ -4001,100 +3585,14 @@
       </p:sp>
       <p:sp>
         <p:nvSpPr>
-          <p:cNvPr id="4" name="Rectangle 3"/>
-          <p:cNvSpPr/>
-          <p:nvPr/>
-        </p:nvSpPr>
-        <p:spPr>
-          <a:xfrm>
-            <a:off x="365760" y="1280160"/>
-            <a:ext cx="201168" cy="1554480"/>
-          </a:xfrm>
-          <a:prstGeom prst="rect">
-            <a:avLst/>
-          </a:prstGeom>
-          <a:solidFill>
-            <a:srgbClr val="27AE60"/>
-          </a:solidFill>
-          <a:ln>
-            <a:noFill/>
-          </a:ln>
-        </p:spPr>
-        <p:style>
-          <a:lnRef idx="1">
-            <a:schemeClr val="accent1"/>
-          </a:lnRef>
-          <a:fillRef idx="3">
-            <a:schemeClr val="accent1"/>
-          </a:fillRef>
-          <a:effectRef idx="2">
-            <a:schemeClr val="accent1"/>
-          </a:effectRef>
-          <a:fontRef idx="minor">
-            <a:schemeClr val="lt1"/>
-          </a:fontRef>
-        </p:style>
-        <p:txBody>
-          <a:bodyPr rtlCol="0" anchor="ctr"/>
-          <a:lstStyle/>
-          <a:p>
-            <a:pPr algn="ctr"/>
-          </a:p>
-        </p:txBody>
-      </p:sp>
-      <p:sp>
-        <p:nvSpPr>
-          <p:cNvPr id="5" name="Rectangle 4"/>
-          <p:cNvSpPr/>
-          <p:nvPr/>
-        </p:nvSpPr>
-        <p:spPr>
-          <a:xfrm>
-            <a:off x="594360" y="1280160"/>
-            <a:ext cx="11064240" cy="1554480"/>
-          </a:xfrm>
-          <a:prstGeom prst="rect">
-            <a:avLst/>
-          </a:prstGeom>
-          <a:solidFill>
-            <a:srgbClr val="F8F9FA"/>
-          </a:solidFill>
-          <a:ln>
-            <a:noFill/>
-          </a:ln>
-        </p:spPr>
-        <p:style>
-          <a:lnRef idx="1">
-            <a:schemeClr val="accent1"/>
-          </a:lnRef>
-          <a:fillRef idx="3">
-            <a:schemeClr val="accent1"/>
-          </a:fillRef>
-          <a:effectRef idx="2">
-            <a:schemeClr val="accent1"/>
-          </a:effectRef>
-          <a:fontRef idx="minor">
-            <a:schemeClr val="lt1"/>
-          </a:fontRef>
-        </p:style>
-        <p:txBody>
-          <a:bodyPr rtlCol="0" anchor="ctr"/>
-          <a:lstStyle/>
-          <a:p>
-            <a:pPr algn="ctr"/>
-          </a:p>
-        </p:txBody>
-      </p:sp>
-      <p:sp>
-        <p:nvSpPr>
-          <p:cNvPr id="6" name="TextBox 5"/>
+          <p:cNvPr id="4" name="TextBox 3"/>
           <p:cNvSpPr txBox="1"/>
           <p:nvPr/>
         </p:nvSpPr>
         <p:spPr>
           <a:xfrm>
-            <a:off x="731520" y="1371600"/>
-            <a:ext cx="10789920" cy="457200"/>
+            <a:off x="548640" y="1280160"/>
+            <a:ext cx="11064240" cy="5029200"/>
           </a:xfrm>
           <a:prstGeom prst="rect">
             <a:avLst/>
@@ -4107,362 +3605,99 @@
           </a:bodyPr>
           <a:lstStyle/>
           <a:p>
-            <a:pPr algn="l"/>
-            <a:r>
-              <a:rPr sz="1400" b="1">
-                <a:solidFill>
-                  <a:srgbClr val="27AE60"/>
-                </a:solidFill>
-                <a:latin typeface="Calibri"/>
-              </a:rPr>
-              <a:t>✅  v1.1.0 — Atual</a:t>
-            </a:r>
-          </a:p>
-        </p:txBody>
-      </p:sp>
-      <p:sp>
-        <p:nvSpPr>
-          <p:cNvPr id="7" name="TextBox 6"/>
-          <p:cNvSpPr txBox="1"/>
-          <p:nvPr/>
-        </p:nvSpPr>
-        <p:spPr>
-          <a:xfrm>
-            <a:off x="731520" y="1874520"/>
-            <a:ext cx="10789920" cy="822960"/>
-          </a:xfrm>
-          <a:prstGeom prst="rect">
-            <a:avLst/>
-          </a:prstGeom>
-          <a:noFill/>
-        </p:spPr>
-        <p:txBody>
-          <a:bodyPr wrap="square">
-            <a:spAutoFit/>
-          </a:bodyPr>
-          <a:lstStyle/>
-          <a:p>
-            <a:pPr algn="l"/>
-            <a:r>
-              <a:rPr sz="1100" b="0">
-                <a:solidFill>
-                  <a:srgbClr val="444444"/>
-                </a:solidFill>
-                <a:latin typeface="Calibri"/>
-              </a:rPr>
-              <a:t>Guia Rápido por perfil • Backup automático • Editor de desenho aprimorado • Atualização automática • Notificações em tempo real</a:t>
-            </a:r>
-          </a:p>
-        </p:txBody>
-      </p:sp>
-      <p:sp>
-        <p:nvSpPr>
-          <p:cNvPr id="8" name="Rectangle 7"/>
-          <p:cNvSpPr/>
-          <p:nvPr/>
-        </p:nvSpPr>
-        <p:spPr>
-          <a:xfrm>
-            <a:off x="365760" y="3063239"/>
-            <a:ext cx="201168" cy="1554480"/>
-          </a:xfrm>
-          <a:prstGeom prst="rect">
-            <a:avLst/>
-          </a:prstGeom>
-          <a:solidFill>
-            <a:srgbClr val="F39C12"/>
-          </a:solidFill>
-          <a:ln>
-            <a:noFill/>
-          </a:ln>
-        </p:spPr>
-        <p:style>
-          <a:lnRef idx="1">
-            <a:schemeClr val="accent1"/>
-          </a:lnRef>
-          <a:fillRef idx="3">
-            <a:schemeClr val="accent1"/>
-          </a:fillRef>
-          <a:effectRef idx="2">
-            <a:schemeClr val="accent1"/>
-          </a:effectRef>
-          <a:fontRef idx="minor">
-            <a:schemeClr val="lt1"/>
-          </a:fontRef>
-        </p:style>
-        <p:txBody>
-          <a:bodyPr rtlCol="0" anchor="ctr"/>
-          <a:lstStyle/>
-          <a:p>
-            <a:pPr algn="ctr"/>
-          </a:p>
-        </p:txBody>
-      </p:sp>
-      <p:sp>
-        <p:nvSpPr>
-          <p:cNvPr id="9" name="Rectangle 8"/>
-          <p:cNvSpPr/>
-          <p:nvPr/>
-        </p:nvSpPr>
-        <p:spPr>
-          <a:xfrm>
-            <a:off x="594360" y="3063239"/>
-            <a:ext cx="11064240" cy="1554480"/>
-          </a:xfrm>
-          <a:prstGeom prst="rect">
-            <a:avLst/>
-          </a:prstGeom>
-          <a:solidFill>
-            <a:srgbClr val="FFFFFF"/>
-          </a:solidFill>
-          <a:ln>
-            <a:noFill/>
-          </a:ln>
-        </p:spPr>
-        <p:style>
-          <a:lnRef idx="1">
-            <a:schemeClr val="accent1"/>
-          </a:lnRef>
-          <a:fillRef idx="3">
-            <a:schemeClr val="accent1"/>
-          </a:fillRef>
-          <a:effectRef idx="2">
-            <a:schemeClr val="accent1"/>
-          </a:effectRef>
-          <a:fontRef idx="minor">
-            <a:schemeClr val="lt1"/>
-          </a:fontRef>
-        </p:style>
-        <p:txBody>
-          <a:bodyPr rtlCol="0" anchor="ctr"/>
-          <a:lstStyle/>
-          <a:p>
-            <a:pPr algn="ctr"/>
-          </a:p>
-        </p:txBody>
-      </p:sp>
-      <p:sp>
-        <p:nvSpPr>
-          <p:cNvPr id="10" name="TextBox 9"/>
-          <p:cNvSpPr txBox="1"/>
-          <p:nvPr/>
-        </p:nvSpPr>
-        <p:spPr>
-          <a:xfrm>
-            <a:off x="731520" y="3154679"/>
-            <a:ext cx="10789920" cy="457200"/>
-          </a:xfrm>
-          <a:prstGeom prst="rect">
-            <a:avLst/>
-          </a:prstGeom>
-          <a:noFill/>
-        </p:spPr>
-        <p:txBody>
-          <a:bodyPr wrap="square">
-            <a:spAutoFit/>
-          </a:bodyPr>
-          <a:lstStyle/>
-          <a:p>
-            <a:pPr algn="l"/>
-            <a:r>
-              <a:rPr sz="1400" b="1">
-                <a:solidFill>
-                  <a:srgbClr val="F39C12"/>
-                </a:solidFill>
-                <a:latin typeface="Calibri"/>
-              </a:rPr>
-              <a:t>🚧  v1.2.x — Próximo</a:t>
-            </a:r>
-          </a:p>
-        </p:txBody>
-      </p:sp>
-      <p:sp>
-        <p:nvSpPr>
-          <p:cNvPr id="11" name="TextBox 10"/>
-          <p:cNvSpPr txBox="1"/>
-          <p:nvPr/>
-        </p:nvSpPr>
-        <p:spPr>
-          <a:xfrm>
-            <a:off x="731520" y="3657599"/>
-            <a:ext cx="10789920" cy="822960"/>
-          </a:xfrm>
-          <a:prstGeom prst="rect">
-            <a:avLst/>
-          </a:prstGeom>
-          <a:noFill/>
-        </p:spPr>
-        <p:txBody>
-          <a:bodyPr wrap="square">
-            <a:spAutoFit/>
-          </a:bodyPr>
-          <a:lstStyle/>
-          <a:p>
-            <a:pPr algn="l"/>
-            <a:r>
-              <a:rPr sz="1100" b="0">
-                <a:solidFill>
-                  <a:srgbClr val="444444"/>
-                </a:solidFill>
-                <a:latin typeface="Calibri"/>
-              </a:rPr>
-              <a:t>Melhorias no dashboard gerencial • Integração WhatsApp • Relatórios exportáveis em Excel • Filtros avançados no histórico</a:t>
-            </a:r>
-          </a:p>
-        </p:txBody>
-      </p:sp>
-      <p:sp>
-        <p:nvSpPr>
-          <p:cNvPr id="12" name="Rectangle 11"/>
-          <p:cNvSpPr/>
-          <p:nvPr/>
-        </p:nvSpPr>
-        <p:spPr>
-          <a:xfrm>
-            <a:off x="365760" y="4846320"/>
-            <a:ext cx="201168" cy="1554480"/>
-          </a:xfrm>
-          <a:prstGeom prst="rect">
-            <a:avLst/>
-          </a:prstGeom>
-          <a:solidFill>
-            <a:srgbClr val="95A5A6"/>
-          </a:solidFill>
-          <a:ln>
-            <a:noFill/>
-          </a:ln>
-        </p:spPr>
-        <p:style>
-          <a:lnRef idx="1">
-            <a:schemeClr val="accent1"/>
-          </a:lnRef>
-          <a:fillRef idx="3">
-            <a:schemeClr val="accent1"/>
-          </a:fillRef>
-          <a:effectRef idx="2">
-            <a:schemeClr val="accent1"/>
-          </a:effectRef>
-          <a:fontRef idx="minor">
-            <a:schemeClr val="lt1"/>
-          </a:fontRef>
-        </p:style>
-        <p:txBody>
-          <a:bodyPr rtlCol="0" anchor="ctr"/>
-          <a:lstStyle/>
-          <a:p>
-            <a:pPr algn="ctr"/>
-          </a:p>
-        </p:txBody>
-      </p:sp>
-      <p:sp>
-        <p:nvSpPr>
-          <p:cNvPr id="13" name="Rectangle 12"/>
-          <p:cNvSpPr/>
-          <p:nvPr/>
-        </p:nvSpPr>
-        <p:spPr>
-          <a:xfrm>
-            <a:off x="594360" y="4846320"/>
-            <a:ext cx="11064240" cy="1554480"/>
-          </a:xfrm>
-          <a:prstGeom prst="rect">
-            <a:avLst/>
-          </a:prstGeom>
-          <a:solidFill>
-            <a:srgbClr val="F8F9FA"/>
-          </a:solidFill>
-          <a:ln>
-            <a:noFill/>
-          </a:ln>
-        </p:spPr>
-        <p:style>
-          <a:lnRef idx="1">
-            <a:schemeClr val="accent1"/>
-          </a:lnRef>
-          <a:fillRef idx="3">
-            <a:schemeClr val="accent1"/>
-          </a:fillRef>
-          <a:effectRef idx="2">
-            <a:schemeClr val="accent1"/>
-          </a:effectRef>
-          <a:fontRef idx="minor">
-            <a:schemeClr val="lt1"/>
-          </a:fontRef>
-        </p:style>
-        <p:txBody>
-          <a:bodyPr rtlCol="0" anchor="ctr"/>
-          <a:lstStyle/>
-          <a:p>
-            <a:pPr algn="ctr"/>
-          </a:p>
-        </p:txBody>
-      </p:sp>
-      <p:sp>
-        <p:nvSpPr>
-          <p:cNvPr id="14" name="TextBox 13"/>
-          <p:cNvSpPr txBox="1"/>
-          <p:nvPr/>
-        </p:nvSpPr>
-        <p:spPr>
-          <a:xfrm>
-            <a:off x="731520" y="4937760"/>
-            <a:ext cx="10789920" cy="457200"/>
-          </a:xfrm>
-          <a:prstGeom prst="rect">
-            <a:avLst/>
-          </a:prstGeom>
-          <a:noFill/>
-        </p:spPr>
-        <p:txBody>
-          <a:bodyPr wrap="square">
-            <a:spAutoFit/>
-          </a:bodyPr>
-          <a:lstStyle/>
-          <a:p>
-            <a:pPr algn="l"/>
-            <a:r>
-              <a:rPr sz="1400" b="1">
-                <a:solidFill>
-                  <a:srgbClr val="95A5A6"/>
-                </a:solidFill>
-                <a:latin typeface="Calibri"/>
-              </a:rPr>
-              <a:t>🔮  Futuro</a:t>
-            </a:r>
-          </a:p>
-        </p:txBody>
-      </p:sp>
-      <p:sp>
-        <p:nvSpPr>
-          <p:cNvPr id="15" name="TextBox 14"/>
-          <p:cNvSpPr txBox="1"/>
-          <p:nvPr/>
-        </p:nvSpPr>
-        <p:spPr>
-          <a:xfrm>
-            <a:off x="731520" y="5440680"/>
-            <a:ext cx="10789920" cy="822960"/>
-          </a:xfrm>
-          <a:prstGeom prst="rect">
-            <a:avLst/>
-          </a:prstGeom>
-          <a:noFill/>
-        </p:spPr>
-        <p:txBody>
-          <a:bodyPr wrap="square">
-            <a:spAutoFit/>
-          </a:bodyPr>
-          <a:lstStyle/>
-          <a:p>
-            <a:pPr algn="l"/>
-            <a:r>
-              <a:rPr sz="1100" b="0">
-                <a:solidFill>
-                  <a:srgbClr val="444444"/>
-                </a:solidFill>
-                <a:latin typeface="Calibri"/>
-              </a:rPr>
-              <a:t>App mobile para visualização • Portal web para clientes • Integração com sistema ERP • Módulo de aprovação de pedidos</a:t>
+            <a:pPr>
+              <a:spcAft>
+                <a:spcPts val="1600"/>
+              </a:spcAft>
+              <a:defRPr sz="1700">
+                <a:solidFill>
+                  <a:srgbClr val="222222"/>
+                </a:solidFill>
+                <a:latin typeface="Calibri"/>
+              </a:defRPr>
+            </a:pPr>
+            <a:r>
+              <a:t>✅  Rastreabilidade total de cada requisição, do pedido ao faturamento</a:t>
+            </a:r>
+          </a:p>
+          <a:p>
+            <a:pPr>
+              <a:spcAft>
+                <a:spcPts val="1600"/>
+              </a:spcAft>
+              <a:defRPr sz="1700">
+                <a:solidFill>
+                  <a:srgbClr val="222222"/>
+                </a:solidFill>
+                <a:latin typeface="Calibri"/>
+              </a:defRPr>
+            </a:pPr>
+            <a:r>
+              <a:t>✅  Produção e indústria com acesso em tempo real, sem depender de ninguém</a:t>
+            </a:r>
+          </a:p>
+          <a:p>
+            <a:pPr>
+              <a:spcAft>
+                <a:spcPts val="1600"/>
+              </a:spcAft>
+              <a:defRPr sz="1700">
+                <a:solidFill>
+                  <a:srgbClr val="222222"/>
+                </a:solidFill>
+                <a:latin typeface="Calibri"/>
+              </a:defRPr>
+            </a:pPr>
+            <a:r>
+              <a:t>✅  PDFs padronizados, gerados automaticamente e organizados por vendedor</a:t>
+            </a:r>
+          </a:p>
+          <a:p>
+            <a:pPr>
+              <a:spcAft>
+                <a:spcPts val="1600"/>
+              </a:spcAft>
+              <a:defRPr sz="1700">
+                <a:solidFill>
+                  <a:srgbClr val="222222"/>
+                </a:solidFill>
+                <a:latin typeface="Calibri"/>
+              </a:defRPr>
+            </a:pPr>
+            <a:r>
+              <a:t>✅  Histórico completo e pesquisável — anos de pedidos a um clique</a:t>
+            </a:r>
+          </a:p>
+          <a:p>
+            <a:pPr>
+              <a:spcAft>
+                <a:spcPts val="1600"/>
+              </a:spcAft>
+              <a:defRPr sz="1700">
+                <a:solidFill>
+                  <a:srgbClr val="222222"/>
+                </a:solidFill>
+                <a:latin typeface="Calibri"/>
+              </a:defRPr>
+            </a:pPr>
+            <a:r>
+              <a:t>✅  Menos retrabalho, menos erros, menos tempo perdido</a:t>
+            </a:r>
+          </a:p>
+          <a:p>
+            <a:pPr>
+              <a:spcAft>
+                <a:spcPts val="1600"/>
+              </a:spcAft>
+              <a:defRPr sz="1700">
+                <a:solidFill>
+                  <a:srgbClr val="222222"/>
+                </a:solidFill>
+                <a:latin typeface="Calibri"/>
+              </a:defRPr>
+            </a:pPr>
+            <a:r>
+              <a:t>✅  Sistema atualizado automaticamente, sem precisar chamar a TI</a:t>
             </a:r>
           </a:p>
         </p:txBody>
@@ -4476,6 +3711,613 @@
 </file>
 
 <file path=ppt/slides/slide12.xml><?xml version="1.0" encoding="utf-8"?>
+<p:sld xmlns:a="http://schemas.openxmlformats.org/drawingml/2006/main" xmlns:p="http://schemas.openxmlformats.org/presentationml/2006/main" xmlns:r="http://schemas.openxmlformats.org/officeDocument/2006/relationships">
+  <p:cSld>
+    <p:bg>
+      <p:bgPr>
+        <a:solidFill>
+          <a:srgbClr val="FFFFFF"/>
+        </a:solidFill>
+        <a:effectLst/>
+      </p:bgPr>
+    </p:bg>
+    <p:spTree>
+      <p:nvGrpSpPr>
+        <p:cNvPr id="1" name=""/>
+        <p:cNvGrpSpPr/>
+        <p:nvPr/>
+      </p:nvGrpSpPr>
+      <p:grpSpPr/>
+      <p:sp>
+        <p:nvSpPr>
+          <p:cNvPr id="2" name="TextBox 1"/>
+          <p:cNvSpPr txBox="1"/>
+          <p:nvPr/>
+        </p:nvSpPr>
+        <p:spPr>
+          <a:xfrm>
+            <a:off x="457200" y="228600"/>
+            <a:ext cx="11247120" cy="640080"/>
+          </a:xfrm>
+          <a:prstGeom prst="rect">
+            <a:avLst/>
+          </a:prstGeom>
+          <a:noFill/>
+        </p:spPr>
+        <p:txBody>
+          <a:bodyPr wrap="square">
+            <a:spAutoFit/>
+          </a:bodyPr>
+          <a:lstStyle/>
+          <a:p>
+            <a:pPr algn="l"/>
+            <a:r>
+              <a:rPr sz="2800" b="1">
+                <a:solidFill>
+                  <a:srgbClr val="1E3A5F"/>
+                </a:solidFill>
+                <a:latin typeface="Calibri"/>
+              </a:rPr>
+              <a:t>Próximos Passos</a:t>
+            </a:r>
+          </a:p>
+        </p:txBody>
+      </p:sp>
+      <p:sp>
+        <p:nvSpPr>
+          <p:cNvPr id="3" name="Rectangle 2"/>
+          <p:cNvSpPr/>
+          <p:nvPr/>
+        </p:nvSpPr>
+        <p:spPr>
+          <a:xfrm>
+            <a:off x="457200" y="914400"/>
+            <a:ext cx="11247120" cy="36576"/>
+          </a:xfrm>
+          <a:prstGeom prst="rect">
+            <a:avLst/>
+          </a:prstGeom>
+          <a:solidFill>
+            <a:srgbClr val="2E6DA4"/>
+          </a:solidFill>
+          <a:ln>
+            <a:noFill/>
+          </a:ln>
+        </p:spPr>
+        <p:style>
+          <a:lnRef idx="1">
+            <a:schemeClr val="accent1"/>
+          </a:lnRef>
+          <a:fillRef idx="3">
+            <a:schemeClr val="accent1"/>
+          </a:fillRef>
+          <a:effectRef idx="2">
+            <a:schemeClr val="accent1"/>
+          </a:effectRef>
+          <a:fontRef idx="minor">
+            <a:schemeClr val="lt1"/>
+          </a:fontRef>
+        </p:style>
+        <p:txBody>
+          <a:bodyPr rtlCol="0" anchor="ctr"/>
+          <a:lstStyle/>
+          <a:p>
+            <a:pPr algn="ctr"/>
+          </a:p>
+        </p:txBody>
+      </p:sp>
+      <p:sp>
+        <p:nvSpPr>
+          <p:cNvPr id="4" name="Rectangle 3"/>
+          <p:cNvSpPr/>
+          <p:nvPr/>
+        </p:nvSpPr>
+        <p:spPr>
+          <a:xfrm>
+            <a:off x="365760" y="1280160"/>
+            <a:ext cx="182880" cy="1280160"/>
+          </a:xfrm>
+          <a:prstGeom prst="rect">
+            <a:avLst/>
+          </a:prstGeom>
+          <a:solidFill>
+            <a:srgbClr val="27AE60"/>
+          </a:solidFill>
+          <a:ln>
+            <a:noFill/>
+          </a:ln>
+        </p:spPr>
+        <p:style>
+          <a:lnRef idx="1">
+            <a:schemeClr val="accent1"/>
+          </a:lnRef>
+          <a:fillRef idx="3">
+            <a:schemeClr val="accent1"/>
+          </a:fillRef>
+          <a:effectRef idx="2">
+            <a:schemeClr val="accent1"/>
+          </a:effectRef>
+          <a:fontRef idx="minor">
+            <a:schemeClr val="lt1"/>
+          </a:fontRef>
+        </p:style>
+        <p:txBody>
+          <a:bodyPr rtlCol="0" anchor="ctr"/>
+          <a:lstStyle/>
+          <a:p>
+            <a:pPr algn="ctr"/>
+          </a:p>
+        </p:txBody>
+      </p:sp>
+      <p:sp>
+        <p:nvSpPr>
+          <p:cNvPr id="5" name="Rectangle 4"/>
+          <p:cNvSpPr/>
+          <p:nvPr/>
+        </p:nvSpPr>
+        <p:spPr>
+          <a:xfrm>
+            <a:off x="594360" y="1280160"/>
+            <a:ext cx="11064240" cy="1280160"/>
+          </a:xfrm>
+          <a:prstGeom prst="rect">
+            <a:avLst/>
+          </a:prstGeom>
+          <a:solidFill>
+            <a:srgbClr val="F8F9FA"/>
+          </a:solidFill>
+          <a:ln>
+            <a:noFill/>
+          </a:ln>
+        </p:spPr>
+        <p:style>
+          <a:lnRef idx="1">
+            <a:schemeClr val="accent1"/>
+          </a:lnRef>
+          <a:fillRef idx="3">
+            <a:schemeClr val="accent1"/>
+          </a:fillRef>
+          <a:effectRef idx="2">
+            <a:schemeClr val="accent1"/>
+          </a:effectRef>
+          <a:fontRef idx="minor">
+            <a:schemeClr val="lt1"/>
+          </a:fontRef>
+        </p:style>
+        <p:txBody>
+          <a:bodyPr rtlCol="0" anchor="ctr"/>
+          <a:lstStyle/>
+          <a:p>
+            <a:pPr algn="ctr"/>
+          </a:p>
+        </p:txBody>
+      </p:sp>
+      <p:sp>
+        <p:nvSpPr>
+          <p:cNvPr id="6" name="TextBox 5"/>
+          <p:cNvSpPr txBox="1"/>
+          <p:nvPr/>
+        </p:nvSpPr>
+        <p:spPr>
+          <a:xfrm>
+            <a:off x="777240" y="1371600"/>
+            <a:ext cx="10698480" cy="438912"/>
+          </a:xfrm>
+          <a:prstGeom prst="rect">
+            <a:avLst/>
+          </a:prstGeom>
+          <a:noFill/>
+        </p:spPr>
+        <p:txBody>
+          <a:bodyPr wrap="square">
+            <a:spAutoFit/>
+          </a:bodyPr>
+          <a:lstStyle/>
+          <a:p>
+            <a:pPr algn="l"/>
+            <a:r>
+              <a:rPr sz="1400" b="1">
+                <a:solidFill>
+                  <a:srgbClr val="27AE60"/>
+                </a:solidFill>
+                <a:latin typeface="Calibri"/>
+              </a:rPr>
+              <a:t>✅  Atual  —  v1.1.0</a:t>
+            </a:r>
+          </a:p>
+        </p:txBody>
+      </p:sp>
+      <p:sp>
+        <p:nvSpPr>
+          <p:cNvPr id="7" name="TextBox 6"/>
+          <p:cNvSpPr txBox="1"/>
+          <p:nvPr/>
+        </p:nvSpPr>
+        <p:spPr>
+          <a:xfrm>
+            <a:off x="777240" y="1828800"/>
+            <a:ext cx="10698480" cy="640080"/>
+          </a:xfrm>
+          <a:prstGeom prst="rect">
+            <a:avLst/>
+          </a:prstGeom>
+          <a:noFill/>
+        </p:spPr>
+        <p:txBody>
+          <a:bodyPr wrap="square">
+            <a:spAutoFit/>
+          </a:bodyPr>
+          <a:lstStyle/>
+          <a:p>
+            <a:pPr algn="l"/>
+            <a:r>
+              <a:rPr sz="1200" b="0">
+                <a:solidFill>
+                  <a:srgbClr val="444444"/>
+                </a:solidFill>
+                <a:latin typeface="Calibri"/>
+              </a:rPr>
+              <a:t>Guia Rápido · Backup automático · Editor de desenho aprimorado · Atualização automática · Notificações em tempo real</a:t>
+            </a:r>
+          </a:p>
+        </p:txBody>
+      </p:sp>
+      <p:sp>
+        <p:nvSpPr>
+          <p:cNvPr id="8" name="Rectangle 7"/>
+          <p:cNvSpPr/>
+          <p:nvPr/>
+        </p:nvSpPr>
+        <p:spPr>
+          <a:xfrm>
+            <a:off x="365760" y="2743200"/>
+            <a:ext cx="182880" cy="1280160"/>
+          </a:xfrm>
+          <a:prstGeom prst="rect">
+            <a:avLst/>
+          </a:prstGeom>
+          <a:solidFill>
+            <a:srgbClr val="F39C12"/>
+          </a:solidFill>
+          <a:ln>
+            <a:noFill/>
+          </a:ln>
+        </p:spPr>
+        <p:style>
+          <a:lnRef idx="1">
+            <a:schemeClr val="accent1"/>
+          </a:lnRef>
+          <a:fillRef idx="3">
+            <a:schemeClr val="accent1"/>
+          </a:fillRef>
+          <a:effectRef idx="2">
+            <a:schemeClr val="accent1"/>
+          </a:effectRef>
+          <a:fontRef idx="minor">
+            <a:schemeClr val="lt1"/>
+          </a:fontRef>
+        </p:style>
+        <p:txBody>
+          <a:bodyPr rtlCol="0" anchor="ctr"/>
+          <a:lstStyle/>
+          <a:p>
+            <a:pPr algn="ctr"/>
+          </a:p>
+        </p:txBody>
+      </p:sp>
+      <p:sp>
+        <p:nvSpPr>
+          <p:cNvPr id="9" name="Rectangle 8"/>
+          <p:cNvSpPr/>
+          <p:nvPr/>
+        </p:nvSpPr>
+        <p:spPr>
+          <a:xfrm>
+            <a:off x="594360" y="2743200"/>
+            <a:ext cx="11064240" cy="1280160"/>
+          </a:xfrm>
+          <a:prstGeom prst="rect">
+            <a:avLst/>
+          </a:prstGeom>
+          <a:solidFill>
+            <a:srgbClr val="FFFFFF"/>
+          </a:solidFill>
+          <a:ln>
+            <a:noFill/>
+          </a:ln>
+        </p:spPr>
+        <p:style>
+          <a:lnRef idx="1">
+            <a:schemeClr val="accent1"/>
+          </a:lnRef>
+          <a:fillRef idx="3">
+            <a:schemeClr val="accent1"/>
+          </a:fillRef>
+          <a:effectRef idx="2">
+            <a:schemeClr val="accent1"/>
+          </a:effectRef>
+          <a:fontRef idx="minor">
+            <a:schemeClr val="lt1"/>
+          </a:fontRef>
+        </p:style>
+        <p:txBody>
+          <a:bodyPr rtlCol="0" anchor="ctr"/>
+          <a:lstStyle/>
+          <a:p>
+            <a:pPr algn="ctr"/>
+          </a:p>
+        </p:txBody>
+      </p:sp>
+      <p:sp>
+        <p:nvSpPr>
+          <p:cNvPr id="10" name="TextBox 9"/>
+          <p:cNvSpPr txBox="1"/>
+          <p:nvPr/>
+        </p:nvSpPr>
+        <p:spPr>
+          <a:xfrm>
+            <a:off x="777240" y="2834640"/>
+            <a:ext cx="10698480" cy="438912"/>
+          </a:xfrm>
+          <a:prstGeom prst="rect">
+            <a:avLst/>
+          </a:prstGeom>
+          <a:noFill/>
+        </p:spPr>
+        <p:txBody>
+          <a:bodyPr wrap="square">
+            <a:spAutoFit/>
+          </a:bodyPr>
+          <a:lstStyle/>
+          <a:p>
+            <a:pPr algn="l"/>
+            <a:r>
+              <a:rPr sz="1400" b="1">
+                <a:solidFill>
+                  <a:srgbClr val="F39C12"/>
+                </a:solidFill>
+                <a:latin typeface="Calibri"/>
+              </a:rPr>
+              <a:t>🔜  Próxima versão</a:t>
+            </a:r>
+          </a:p>
+        </p:txBody>
+      </p:sp>
+      <p:sp>
+        <p:nvSpPr>
+          <p:cNvPr id="11" name="TextBox 10"/>
+          <p:cNvSpPr txBox="1"/>
+          <p:nvPr/>
+        </p:nvSpPr>
+        <p:spPr>
+          <a:xfrm>
+            <a:off x="777240" y="3291840"/>
+            <a:ext cx="10698480" cy="640080"/>
+          </a:xfrm>
+          <a:prstGeom prst="rect">
+            <a:avLst/>
+          </a:prstGeom>
+          <a:noFill/>
+        </p:spPr>
+        <p:txBody>
+          <a:bodyPr wrap="square">
+            <a:spAutoFit/>
+          </a:bodyPr>
+          <a:lstStyle/>
+          <a:p>
+            <a:pPr algn="l"/>
+            <a:r>
+              <a:rPr sz="1200" b="0">
+                <a:solidFill>
+                  <a:srgbClr val="444444"/>
+                </a:solidFill>
+                <a:latin typeface="Calibri"/>
+              </a:rPr>
+              <a:t>Melhorias no dashboard · Integração com WhatsApp · Relatórios exportáveis · Filtros avançados no histórico</a:t>
+            </a:r>
+          </a:p>
+        </p:txBody>
+      </p:sp>
+      <p:sp>
+        <p:nvSpPr>
+          <p:cNvPr id="12" name="Rectangle 11"/>
+          <p:cNvSpPr/>
+          <p:nvPr/>
+        </p:nvSpPr>
+        <p:spPr>
+          <a:xfrm>
+            <a:off x="365760" y="4206240"/>
+            <a:ext cx="182880" cy="1280160"/>
+          </a:xfrm>
+          <a:prstGeom prst="rect">
+            <a:avLst/>
+          </a:prstGeom>
+          <a:solidFill>
+            <a:srgbClr val="95A5A6"/>
+          </a:solidFill>
+          <a:ln>
+            <a:noFill/>
+          </a:ln>
+        </p:spPr>
+        <p:style>
+          <a:lnRef idx="1">
+            <a:schemeClr val="accent1"/>
+          </a:lnRef>
+          <a:fillRef idx="3">
+            <a:schemeClr val="accent1"/>
+          </a:fillRef>
+          <a:effectRef idx="2">
+            <a:schemeClr val="accent1"/>
+          </a:effectRef>
+          <a:fontRef idx="minor">
+            <a:schemeClr val="lt1"/>
+          </a:fontRef>
+        </p:style>
+        <p:txBody>
+          <a:bodyPr rtlCol="0" anchor="ctr"/>
+          <a:lstStyle/>
+          <a:p>
+            <a:pPr algn="ctr"/>
+          </a:p>
+        </p:txBody>
+      </p:sp>
+      <p:sp>
+        <p:nvSpPr>
+          <p:cNvPr id="13" name="Rectangle 12"/>
+          <p:cNvSpPr/>
+          <p:nvPr/>
+        </p:nvSpPr>
+        <p:spPr>
+          <a:xfrm>
+            <a:off x="594360" y="4206240"/>
+            <a:ext cx="11064240" cy="1280160"/>
+          </a:xfrm>
+          <a:prstGeom prst="rect">
+            <a:avLst/>
+          </a:prstGeom>
+          <a:solidFill>
+            <a:srgbClr val="F8F9FA"/>
+          </a:solidFill>
+          <a:ln>
+            <a:noFill/>
+          </a:ln>
+        </p:spPr>
+        <p:style>
+          <a:lnRef idx="1">
+            <a:schemeClr val="accent1"/>
+          </a:lnRef>
+          <a:fillRef idx="3">
+            <a:schemeClr val="accent1"/>
+          </a:fillRef>
+          <a:effectRef idx="2">
+            <a:schemeClr val="accent1"/>
+          </a:effectRef>
+          <a:fontRef idx="minor">
+            <a:schemeClr val="lt1"/>
+          </a:fontRef>
+        </p:style>
+        <p:txBody>
+          <a:bodyPr rtlCol="0" anchor="ctr"/>
+          <a:lstStyle/>
+          <a:p>
+            <a:pPr algn="ctr"/>
+          </a:p>
+        </p:txBody>
+      </p:sp>
+      <p:sp>
+        <p:nvSpPr>
+          <p:cNvPr id="14" name="TextBox 13"/>
+          <p:cNvSpPr txBox="1"/>
+          <p:nvPr/>
+        </p:nvSpPr>
+        <p:spPr>
+          <a:xfrm>
+            <a:off x="777240" y="4297680"/>
+            <a:ext cx="10698480" cy="438912"/>
+          </a:xfrm>
+          <a:prstGeom prst="rect">
+            <a:avLst/>
+          </a:prstGeom>
+          <a:noFill/>
+        </p:spPr>
+        <p:txBody>
+          <a:bodyPr wrap="square">
+            <a:spAutoFit/>
+          </a:bodyPr>
+          <a:lstStyle/>
+          <a:p>
+            <a:pPr algn="l"/>
+            <a:r>
+              <a:rPr sz="1400" b="1">
+                <a:solidFill>
+                  <a:srgbClr val="95A5A6"/>
+                </a:solidFill>
+                <a:latin typeface="Calibri"/>
+              </a:rPr>
+              <a:t>🔮  Futuro</a:t>
+            </a:r>
+          </a:p>
+        </p:txBody>
+      </p:sp>
+      <p:sp>
+        <p:nvSpPr>
+          <p:cNvPr id="15" name="TextBox 14"/>
+          <p:cNvSpPr txBox="1"/>
+          <p:nvPr/>
+        </p:nvSpPr>
+        <p:spPr>
+          <a:xfrm>
+            <a:off x="777240" y="4754880"/>
+            <a:ext cx="10698480" cy="640080"/>
+          </a:xfrm>
+          <a:prstGeom prst="rect">
+            <a:avLst/>
+          </a:prstGeom>
+          <a:noFill/>
+        </p:spPr>
+        <p:txBody>
+          <a:bodyPr wrap="square">
+            <a:spAutoFit/>
+          </a:bodyPr>
+          <a:lstStyle/>
+          <a:p>
+            <a:pPr algn="l"/>
+            <a:r>
+              <a:rPr sz="1200" b="0">
+                <a:solidFill>
+                  <a:srgbClr val="444444"/>
+                </a:solidFill>
+                <a:latin typeface="Calibri"/>
+              </a:rPr>
+              <a:t>App mobile para visualização · Portal web para clientes · Integração com ERP</a:t>
+            </a:r>
+          </a:p>
+        </p:txBody>
+      </p:sp>
+      <p:sp>
+        <p:nvSpPr>
+          <p:cNvPr id="16" name="TextBox 15"/>
+          <p:cNvSpPr txBox="1"/>
+          <p:nvPr/>
+        </p:nvSpPr>
+        <p:spPr>
+          <a:xfrm>
+            <a:off x="365760" y="5806440"/>
+            <a:ext cx="11430000" cy="640080"/>
+          </a:xfrm>
+          <a:prstGeom prst="rect">
+            <a:avLst/>
+          </a:prstGeom>
+          <a:noFill/>
+        </p:spPr>
+        <p:txBody>
+          <a:bodyPr wrap="square">
+            <a:spAutoFit/>
+          </a:bodyPr>
+          <a:lstStyle/>
+          <a:p>
+            <a:pPr algn="l"/>
+            <a:r>
+              <a:rPr sz="1300" b="0">
+                <a:solidFill>
+                  <a:srgbClr val="2E6DA4"/>
+                </a:solidFill>
+                <a:latin typeface="Calibri"/>
+              </a:rPr>
+              <a:t>💬  As próximas melhorias serão guiadas pelo feedback dos usuários — suas sugestões são bem-vindas!</a:t>
+            </a:r>
+          </a:p>
+        </p:txBody>
+      </p:sp>
+    </p:spTree>
+  </p:cSld>
+  <p:clrMapOvr>
+    <a:masterClrMapping/>
+  </p:clrMapOvr>
+</p:sld>
+</file>
+
+<file path=ppt/slides/slide13.xml><?xml version="1.0" encoding="utf-8"?>
 <p:sld xmlns:a="http://schemas.openxmlformats.org/drawingml/2006/main" xmlns:p="http://schemas.openxmlformats.org/presentationml/2006/main" xmlns:r="http://schemas.openxmlformats.org/officeDocument/2006/relationships">
   <p:cSld>
     <p:bg>
@@ -4495,14 +4337,57 @@
       <p:grpSpPr/>
       <p:sp>
         <p:nvSpPr>
-          <p:cNvPr id="2" name="TextBox 1"/>
+          <p:cNvPr id="2" name="Rectangle 1"/>
+          <p:cNvSpPr/>
+          <p:nvPr/>
+        </p:nvSpPr>
+        <p:spPr>
+          <a:xfrm>
+            <a:off x="0" y="5577840"/>
+            <a:ext cx="12188952" cy="1280160"/>
+          </a:xfrm>
+          <a:prstGeom prst="rect">
+            <a:avLst/>
+          </a:prstGeom>
+          <a:solidFill>
+            <a:srgbClr val="162D4F"/>
+          </a:solidFill>
+          <a:ln>
+            <a:noFill/>
+          </a:ln>
+        </p:spPr>
+        <p:style>
+          <a:lnRef idx="1">
+            <a:schemeClr val="accent1"/>
+          </a:lnRef>
+          <a:fillRef idx="3">
+            <a:schemeClr val="accent1"/>
+          </a:fillRef>
+          <a:effectRef idx="2">
+            <a:schemeClr val="accent1"/>
+          </a:effectRef>
+          <a:fontRef idx="minor">
+            <a:schemeClr val="lt1"/>
+          </a:fontRef>
+        </p:style>
+        <p:txBody>
+          <a:bodyPr rtlCol="0" anchor="ctr"/>
+          <a:lstStyle/>
+          <a:p>
+            <a:pPr algn="ctr"/>
+          </a:p>
+        </p:txBody>
+      </p:sp>
+      <p:sp>
+        <p:nvSpPr>
+          <p:cNvPr id="3" name="TextBox 2"/>
           <p:cNvSpPr txBox="1"/>
           <p:nvPr/>
         </p:nvSpPr>
         <p:spPr>
           <a:xfrm>
             <a:off x="914400" y="2011680"/>
-            <a:ext cx="10332720" cy="1371600"/>
+            <a:ext cx="10332720" cy="1280160"/>
           </a:xfrm>
           <a:prstGeom prst="rect">
             <a:avLst/>
@@ -4517,7 +4402,7 @@
           <a:p>
             <a:pPr algn="ctr"/>
             <a:r>
-              <a:rPr sz="4400" b="1">
+              <a:rPr sz="5600" b="1">
                 <a:solidFill>
                   <a:srgbClr val="FFFFFF"/>
                 </a:solidFill>
@@ -4530,14 +4415,14 @@
       </p:sp>
       <p:sp>
         <p:nvSpPr>
-          <p:cNvPr id="3" name="TextBox 2"/>
+          <p:cNvPr id="4" name="TextBox 3"/>
           <p:cNvSpPr txBox="1"/>
           <p:nvPr/>
         </p:nvSpPr>
         <p:spPr>
           <a:xfrm>
             <a:off x="914400" y="3474720"/>
-            <a:ext cx="10332720" cy="731520"/>
+            <a:ext cx="10332720" cy="640080"/>
           </a:xfrm>
           <a:prstGeom prst="rect">
             <a:avLst/>
@@ -4552,20 +4437,20 @@
           <a:p>
             <a:pPr algn="ctr"/>
             <a:r>
-              <a:rPr sz="2200" b="0">
+              <a:rPr sz="2000" b="0">
                 <a:solidFill>
                   <a:srgbClr val="D6E4F0"/>
                 </a:solidFill>
                 <a:latin typeface="Calibri"/>
               </a:rPr>
-              <a:t>Requisições App — desenvolvido para a Ferragens Pinheiro</a:t>
-            </a:r>
-          </a:p>
-        </p:txBody>
-      </p:sp>
-      <p:sp>
-        <p:nvSpPr>
-          <p:cNvPr id="4" name="TextBox 3"/>
+              <a:t>Requisições App — Ferragens Pinheiro</a:t>
+            </a:r>
+          </a:p>
+        </p:txBody>
+      </p:sp>
+      <p:sp>
+        <p:nvSpPr>
+          <p:cNvPr id="5" name="TextBox 4"/>
           <p:cNvSpPr txBox="1"/>
           <p:nvPr/>
         </p:nvSpPr>
@@ -4654,7 +4539,7 @@
                 </a:solidFill>
                 <a:latin typeface="Calibri"/>
               </a:rPr>
-              <a:t>O Desafio</a:t>
+              <a:t>Como era antes: o papel</a:t>
             </a:r>
           </a:p>
         </p:txBody>
@@ -4704,59 +4589,14 @@
       </p:sp>
       <p:sp>
         <p:nvSpPr>
-          <p:cNvPr id="4" name="Rectangle 3"/>
-          <p:cNvSpPr/>
-          <p:nvPr/>
-        </p:nvSpPr>
-        <p:spPr>
-          <a:xfrm>
-            <a:off x="365760" y="1371600"/>
-            <a:ext cx="3657600" cy="2011680"/>
-          </a:xfrm>
-          <a:prstGeom prst="rect">
-            <a:avLst/>
-          </a:prstGeom>
-          <a:solidFill>
-            <a:srgbClr val="D6E4F0"/>
-          </a:solidFill>
-          <a:ln w="12700">
-            <a:solidFill>
-              <a:srgbClr val="2E6DA4"/>
-            </a:solidFill>
-          </a:ln>
-        </p:spPr>
-        <p:style>
-          <a:lnRef idx="1">
-            <a:schemeClr val="accent1"/>
-          </a:lnRef>
-          <a:fillRef idx="3">
-            <a:schemeClr val="accent1"/>
-          </a:fillRef>
-          <a:effectRef idx="2">
-            <a:schemeClr val="accent1"/>
-          </a:effectRef>
-          <a:fontRef idx="minor">
-            <a:schemeClr val="lt1"/>
-          </a:fontRef>
-        </p:style>
-        <p:txBody>
-          <a:bodyPr rtlCol="0" anchor="ctr"/>
-          <a:lstStyle/>
-          <a:p>
-            <a:pPr algn="ctr"/>
-          </a:p>
-        </p:txBody>
-      </p:sp>
-      <p:sp>
-        <p:nvSpPr>
-          <p:cNvPr id="5" name="TextBox 4"/>
+          <p:cNvPr id="4" name="TextBox 3"/>
           <p:cNvSpPr txBox="1"/>
           <p:nvPr/>
         </p:nvSpPr>
         <p:spPr>
           <a:xfrm>
-            <a:off x="502920" y="1463040"/>
-            <a:ext cx="3383280" cy="457200"/>
+            <a:off x="9418320" y="1645920"/>
+            <a:ext cx="2286000" cy="2286000"/>
           </a:xfrm>
           <a:prstGeom prst="rect">
             <a:avLst/>
@@ -4769,29 +4609,29 @@
           </a:bodyPr>
           <a:lstStyle/>
           <a:p>
-            <a:pPr algn="l"/>
-            <a:r>
-              <a:rPr sz="1300" b="1">
-                <a:solidFill>
-                  <a:srgbClr val="1E3A5F"/>
+            <a:pPr algn="ctr"/>
+            <a:r>
+              <a:rPr sz="9000" b="0">
+                <a:solidFill>
+                  <a:srgbClr val="CCCCCC"/>
                 </a:solidFill>
                 <a:latin typeface="Calibri"/>
               </a:rPr>
-              <a:t>📄  Processos manuais</a:t>
-            </a:r>
-          </a:p>
-        </p:txBody>
-      </p:sp>
-      <p:sp>
-        <p:nvSpPr>
-          <p:cNvPr id="6" name="TextBox 5"/>
+              <a:t>📄</a:t>
+            </a:r>
+          </a:p>
+        </p:txBody>
+      </p:sp>
+      <p:sp>
+        <p:nvSpPr>
+          <p:cNvPr id="5" name="TextBox 4"/>
           <p:cNvSpPr txBox="1"/>
           <p:nvPr/>
         </p:nvSpPr>
         <p:spPr>
           <a:xfrm>
-            <a:off x="502920" y="1965960"/>
-            <a:ext cx="3383280" cy="1280160"/>
+            <a:off x="548640" y="1280160"/>
+            <a:ext cx="8595360" cy="5029200"/>
           </a:xfrm>
           <a:prstGeom prst="rect">
             <a:avLst/>
@@ -4804,475 +4644,83 @@
           </a:bodyPr>
           <a:lstStyle/>
           <a:p>
-            <a:pPr algn="l"/>
-            <a:r>
-              <a:rPr sz="1100" b="0">
-                <a:solidFill>
-                  <a:srgbClr val="1E3A5F"/>
-                </a:solidFill>
-                <a:latin typeface="Calibri"/>
-              </a:rPr>
-              <a:t>Requisições feitas em papel ou planilhas descentralizadas</a:t>
-            </a:r>
-          </a:p>
-        </p:txBody>
-      </p:sp>
-      <p:sp>
-        <p:nvSpPr>
-          <p:cNvPr id="7" name="Rectangle 6"/>
-          <p:cNvSpPr/>
-          <p:nvPr/>
-        </p:nvSpPr>
-        <p:spPr>
-          <a:xfrm>
-            <a:off x="4297680" y="1371600"/>
-            <a:ext cx="3657600" cy="2011680"/>
-          </a:xfrm>
-          <a:prstGeom prst="rect">
-            <a:avLst/>
-          </a:prstGeom>
-          <a:solidFill>
-            <a:srgbClr val="D6E4F0"/>
-          </a:solidFill>
-          <a:ln w="12700">
-            <a:solidFill>
-              <a:srgbClr val="2E6DA4"/>
-            </a:solidFill>
-          </a:ln>
-        </p:spPr>
-        <p:style>
-          <a:lnRef idx="1">
-            <a:schemeClr val="accent1"/>
-          </a:lnRef>
-          <a:fillRef idx="3">
-            <a:schemeClr val="accent1"/>
-          </a:fillRef>
-          <a:effectRef idx="2">
-            <a:schemeClr val="accent1"/>
-          </a:effectRef>
-          <a:fontRef idx="minor">
-            <a:schemeClr val="lt1"/>
-          </a:fontRef>
-        </p:style>
-        <p:txBody>
-          <a:bodyPr rtlCol="0" anchor="ctr"/>
-          <a:lstStyle/>
-          <a:p>
-            <a:pPr algn="ctr"/>
-          </a:p>
-        </p:txBody>
-      </p:sp>
-      <p:sp>
-        <p:nvSpPr>
-          <p:cNvPr id="8" name="TextBox 7"/>
-          <p:cNvSpPr txBox="1"/>
-          <p:nvPr/>
-        </p:nvSpPr>
-        <p:spPr>
-          <a:xfrm>
-            <a:off x="4434840" y="1463040"/>
-            <a:ext cx="3383280" cy="457200"/>
-          </a:xfrm>
-          <a:prstGeom prst="rect">
-            <a:avLst/>
-          </a:prstGeom>
-          <a:noFill/>
-        </p:spPr>
-        <p:txBody>
-          <a:bodyPr wrap="square">
-            <a:spAutoFit/>
-          </a:bodyPr>
-          <a:lstStyle/>
-          <a:p>
-            <a:pPr algn="l"/>
-            <a:r>
-              <a:rPr sz="1300" b="1">
-                <a:solidFill>
-                  <a:srgbClr val="1E3A5F"/>
-                </a:solidFill>
-                <a:latin typeface="Calibri"/>
-              </a:rPr>
-              <a:t>🔍  Sem rastreabilidade</a:t>
-            </a:r>
-          </a:p>
-        </p:txBody>
-      </p:sp>
-      <p:sp>
-        <p:nvSpPr>
-          <p:cNvPr id="9" name="TextBox 8"/>
-          <p:cNvSpPr txBox="1"/>
-          <p:nvPr/>
-        </p:nvSpPr>
-        <p:spPr>
-          <a:xfrm>
-            <a:off x="4434840" y="1965960"/>
-            <a:ext cx="3383280" cy="1280160"/>
-          </a:xfrm>
-          <a:prstGeom prst="rect">
-            <a:avLst/>
-          </a:prstGeom>
-          <a:noFill/>
-        </p:spPr>
-        <p:txBody>
-          <a:bodyPr wrap="square">
-            <a:spAutoFit/>
-          </a:bodyPr>
-          <a:lstStyle/>
-          <a:p>
-            <a:pPr algn="l"/>
-            <a:r>
-              <a:rPr sz="1100" b="0">
-                <a:solidFill>
-                  <a:srgbClr val="1E3A5F"/>
-                </a:solidFill>
-                <a:latin typeface="Calibri"/>
-              </a:rPr>
-              <a:t>Nenhum controle de status dos pedidos em tempo real</a:t>
-            </a:r>
-          </a:p>
-        </p:txBody>
-      </p:sp>
-      <p:sp>
-        <p:nvSpPr>
-          <p:cNvPr id="10" name="Rectangle 9"/>
-          <p:cNvSpPr/>
-          <p:nvPr/>
-        </p:nvSpPr>
-        <p:spPr>
-          <a:xfrm>
-            <a:off x="8229600" y="1371600"/>
-            <a:ext cx="3657600" cy="2011680"/>
-          </a:xfrm>
-          <a:prstGeom prst="rect">
-            <a:avLst/>
-          </a:prstGeom>
-          <a:solidFill>
-            <a:srgbClr val="D6E4F0"/>
-          </a:solidFill>
-          <a:ln w="12700">
-            <a:solidFill>
-              <a:srgbClr val="2E6DA4"/>
-            </a:solidFill>
-          </a:ln>
-        </p:spPr>
-        <p:style>
-          <a:lnRef idx="1">
-            <a:schemeClr val="accent1"/>
-          </a:lnRef>
-          <a:fillRef idx="3">
-            <a:schemeClr val="accent1"/>
-          </a:fillRef>
-          <a:effectRef idx="2">
-            <a:schemeClr val="accent1"/>
-          </a:effectRef>
-          <a:fontRef idx="minor">
-            <a:schemeClr val="lt1"/>
-          </a:fontRef>
-        </p:style>
-        <p:txBody>
-          <a:bodyPr rtlCol="0" anchor="ctr"/>
-          <a:lstStyle/>
-          <a:p>
-            <a:pPr algn="ctr"/>
-          </a:p>
-        </p:txBody>
-      </p:sp>
-      <p:sp>
-        <p:nvSpPr>
-          <p:cNvPr id="11" name="TextBox 10"/>
-          <p:cNvSpPr txBox="1"/>
-          <p:nvPr/>
-        </p:nvSpPr>
-        <p:spPr>
-          <a:xfrm>
-            <a:off x="8366760" y="1463040"/>
-            <a:ext cx="3383280" cy="457200"/>
-          </a:xfrm>
-          <a:prstGeom prst="rect">
-            <a:avLst/>
-          </a:prstGeom>
-          <a:noFill/>
-        </p:spPr>
-        <p:txBody>
-          <a:bodyPr wrap="square">
-            <a:spAutoFit/>
-          </a:bodyPr>
-          <a:lstStyle/>
-          <a:p>
-            <a:pPr algn="l"/>
-            <a:r>
-              <a:rPr sz="1300" b="1">
-                <a:solidFill>
-                  <a:srgbClr val="1E3A5F"/>
-                </a:solidFill>
-                <a:latin typeface="Calibri"/>
-              </a:rPr>
-              <a:t>⚠️  Erros humanos</a:t>
-            </a:r>
-          </a:p>
-        </p:txBody>
-      </p:sp>
-      <p:sp>
-        <p:nvSpPr>
-          <p:cNvPr id="12" name="TextBox 11"/>
-          <p:cNvSpPr txBox="1"/>
-          <p:nvPr/>
-        </p:nvSpPr>
-        <p:spPr>
-          <a:xfrm>
-            <a:off x="8366760" y="1965960"/>
-            <a:ext cx="3383280" cy="1280160"/>
-          </a:xfrm>
-          <a:prstGeom prst="rect">
-            <a:avLst/>
-          </a:prstGeom>
-          <a:noFill/>
-        </p:spPr>
-        <p:txBody>
-          <a:bodyPr wrap="square">
-            <a:spAutoFit/>
-          </a:bodyPr>
-          <a:lstStyle/>
-          <a:p>
-            <a:pPr algn="l"/>
-            <a:r>
-              <a:rPr sz="1100" b="0">
-                <a:solidFill>
-                  <a:srgbClr val="1E3A5F"/>
-                </a:solidFill>
-                <a:latin typeface="Calibri"/>
-              </a:rPr>
-              <a:t>PDFs gerados manualmente, sujeitos a inconsistências</a:t>
-            </a:r>
-          </a:p>
-        </p:txBody>
-      </p:sp>
-      <p:sp>
-        <p:nvSpPr>
-          <p:cNvPr id="13" name="Rectangle 12"/>
-          <p:cNvSpPr/>
-          <p:nvPr/>
-        </p:nvSpPr>
-        <p:spPr>
-          <a:xfrm>
-            <a:off x="2331720" y="3749039"/>
-            <a:ext cx="3657600" cy="2011680"/>
-          </a:xfrm>
-          <a:prstGeom prst="rect">
-            <a:avLst/>
-          </a:prstGeom>
-          <a:solidFill>
-            <a:srgbClr val="D6E4F0"/>
-          </a:solidFill>
-          <a:ln w="12700">
-            <a:solidFill>
-              <a:srgbClr val="2E6DA4"/>
-            </a:solidFill>
-          </a:ln>
-        </p:spPr>
-        <p:style>
-          <a:lnRef idx="1">
-            <a:schemeClr val="accent1"/>
-          </a:lnRef>
-          <a:fillRef idx="3">
-            <a:schemeClr val="accent1"/>
-          </a:fillRef>
-          <a:effectRef idx="2">
-            <a:schemeClr val="accent1"/>
-          </a:effectRef>
-          <a:fontRef idx="minor">
-            <a:schemeClr val="lt1"/>
-          </a:fontRef>
-        </p:style>
-        <p:txBody>
-          <a:bodyPr rtlCol="0" anchor="ctr"/>
-          <a:lstStyle/>
-          <a:p>
-            <a:pPr algn="ctr"/>
-          </a:p>
-        </p:txBody>
-      </p:sp>
-      <p:sp>
-        <p:nvSpPr>
-          <p:cNvPr id="14" name="TextBox 13"/>
-          <p:cNvSpPr txBox="1"/>
-          <p:nvPr/>
-        </p:nvSpPr>
-        <p:spPr>
-          <a:xfrm>
-            <a:off x="2468880" y="3840479"/>
-            <a:ext cx="3383280" cy="457200"/>
-          </a:xfrm>
-          <a:prstGeom prst="rect">
-            <a:avLst/>
-          </a:prstGeom>
-          <a:noFill/>
-        </p:spPr>
-        <p:txBody>
-          <a:bodyPr wrap="square">
-            <a:spAutoFit/>
-          </a:bodyPr>
-          <a:lstStyle/>
-          <a:p>
-            <a:pPr algn="l"/>
-            <a:r>
-              <a:rPr sz="1300" b="1">
-                <a:solidFill>
-                  <a:srgbClr val="1E3A5F"/>
-                </a:solidFill>
-                <a:latin typeface="Calibri"/>
-              </a:rPr>
-              <a:t>🔌  Equipes desconectadas</a:t>
-            </a:r>
-          </a:p>
-        </p:txBody>
-      </p:sp>
-      <p:sp>
-        <p:nvSpPr>
-          <p:cNvPr id="15" name="TextBox 14"/>
-          <p:cNvSpPr txBox="1"/>
-          <p:nvPr/>
-        </p:nvSpPr>
-        <p:spPr>
-          <a:xfrm>
-            <a:off x="2468880" y="4343399"/>
-            <a:ext cx="3383280" cy="1280160"/>
-          </a:xfrm>
-          <a:prstGeom prst="rect">
-            <a:avLst/>
-          </a:prstGeom>
-          <a:noFill/>
-        </p:spPr>
-        <p:txBody>
-          <a:bodyPr wrap="square">
-            <a:spAutoFit/>
-          </a:bodyPr>
-          <a:lstStyle/>
-          <a:p>
-            <a:pPr algn="l"/>
-            <a:r>
-              <a:rPr sz="1100" b="0">
-                <a:solidFill>
-                  <a:srgbClr val="1E3A5F"/>
-                </a:solidFill>
-                <a:latin typeface="Calibri"/>
-              </a:rPr>
-              <a:t>Produção e indústria sem acesso às informações</a:t>
-            </a:r>
-          </a:p>
-        </p:txBody>
-      </p:sp>
-      <p:sp>
-        <p:nvSpPr>
-          <p:cNvPr id="16" name="Rectangle 15"/>
-          <p:cNvSpPr/>
-          <p:nvPr/>
-        </p:nvSpPr>
-        <p:spPr>
-          <a:xfrm>
-            <a:off x="6263640" y="3749039"/>
-            <a:ext cx="3657600" cy="2011680"/>
-          </a:xfrm>
-          <a:prstGeom prst="rect">
-            <a:avLst/>
-          </a:prstGeom>
-          <a:solidFill>
-            <a:srgbClr val="D6E4F0"/>
-          </a:solidFill>
-          <a:ln w="12700">
-            <a:solidFill>
-              <a:srgbClr val="2E6DA4"/>
-            </a:solidFill>
-          </a:ln>
-        </p:spPr>
-        <p:style>
-          <a:lnRef idx="1">
-            <a:schemeClr val="accent1"/>
-          </a:lnRef>
-          <a:fillRef idx="3">
-            <a:schemeClr val="accent1"/>
-          </a:fillRef>
-          <a:effectRef idx="2">
-            <a:schemeClr val="accent1"/>
-          </a:effectRef>
-          <a:fontRef idx="minor">
-            <a:schemeClr val="lt1"/>
-          </a:fontRef>
-        </p:style>
-        <p:txBody>
-          <a:bodyPr rtlCol="0" anchor="ctr"/>
-          <a:lstStyle/>
-          <a:p>
-            <a:pPr algn="ctr"/>
-          </a:p>
-        </p:txBody>
-      </p:sp>
-      <p:sp>
-        <p:nvSpPr>
-          <p:cNvPr id="17" name="TextBox 16"/>
-          <p:cNvSpPr txBox="1"/>
-          <p:nvPr/>
-        </p:nvSpPr>
-        <p:spPr>
-          <a:xfrm>
-            <a:off x="6400800" y="3840479"/>
-            <a:ext cx="3383280" cy="457200"/>
-          </a:xfrm>
-          <a:prstGeom prst="rect">
-            <a:avLst/>
-          </a:prstGeom>
-          <a:noFill/>
-        </p:spPr>
-        <p:txBody>
-          <a:bodyPr wrap="square">
-            <a:spAutoFit/>
-          </a:bodyPr>
-          <a:lstStyle/>
-          <a:p>
-            <a:pPr algn="l"/>
-            <a:r>
-              <a:rPr sz="1300" b="1">
-                <a:solidFill>
-                  <a:srgbClr val="1E3A5F"/>
-                </a:solidFill>
-                <a:latin typeface="Calibri"/>
-              </a:rPr>
-              <a:t>📁  Histórico disperso</a:t>
-            </a:r>
-          </a:p>
-        </p:txBody>
-      </p:sp>
-      <p:sp>
-        <p:nvSpPr>
-          <p:cNvPr id="18" name="TextBox 17"/>
-          <p:cNvSpPr txBox="1"/>
-          <p:nvPr/>
-        </p:nvSpPr>
-        <p:spPr>
-          <a:xfrm>
-            <a:off x="6400800" y="4343399"/>
-            <a:ext cx="3383280" cy="1280160"/>
-          </a:xfrm>
-          <a:prstGeom prst="rect">
-            <a:avLst/>
-          </a:prstGeom>
-          <a:noFill/>
-        </p:spPr>
-        <p:txBody>
-          <a:bodyPr wrap="square">
-            <a:spAutoFit/>
-          </a:bodyPr>
-          <a:lstStyle/>
-          <a:p>
-            <a:pPr algn="l"/>
-            <a:r>
-              <a:rPr sz="1100" b="0">
-                <a:solidFill>
-                  <a:srgbClr val="1E3A5F"/>
-                </a:solidFill>
-                <a:latin typeface="Calibri"/>
-              </a:rPr>
-              <a:t>Consultas difíceis, dados espalhados sem padronização</a:t>
+            <a:pPr>
+              <a:spcAft>
+                <a:spcPts val="1400"/>
+              </a:spcAft>
+              <a:defRPr sz="1600">
+                <a:solidFill>
+                  <a:srgbClr val="222222"/>
+                </a:solidFill>
+                <a:latin typeface="Calibri"/>
+              </a:defRPr>
+            </a:pPr>
+            <a:r>
+              <a:t>→  Requisições escritas à mão, sem padronização</a:t>
+            </a:r>
+          </a:p>
+          <a:p>
+            <a:pPr>
+              <a:spcAft>
+                <a:spcPts val="1400"/>
+              </a:spcAft>
+              <a:defRPr sz="1600">
+                <a:solidFill>
+                  <a:srgbClr val="222222"/>
+                </a:solidFill>
+                <a:latin typeface="Calibri"/>
+              </a:defRPr>
+            </a:pPr>
+            <a:r>
+              <a:t>→  Nenhum registro centralizado — cada um guardava o seu</a:t>
+            </a:r>
+          </a:p>
+          <a:p>
+            <a:pPr>
+              <a:spcAft>
+                <a:spcPts val="1400"/>
+              </a:spcAft>
+              <a:defRPr sz="1600">
+                <a:solidFill>
+                  <a:srgbClr val="222222"/>
+                </a:solidFill>
+                <a:latin typeface="Calibri"/>
+              </a:defRPr>
+            </a:pPr>
+            <a:r>
+              <a:t>→  Impossível consultar o histórico de forma rápida</a:t>
+            </a:r>
+          </a:p>
+          <a:p>
+            <a:pPr>
+              <a:spcAft>
+                <a:spcPts val="1400"/>
+              </a:spcAft>
+              <a:defRPr sz="1600">
+                <a:solidFill>
+                  <a:srgbClr val="222222"/>
+                </a:solidFill>
+                <a:latin typeface="Calibri"/>
+              </a:defRPr>
+            </a:pPr>
+            <a:r>
+              <a:t>→  Informações chegavam incompletas ou com atraso às equipes</a:t>
+            </a:r>
+          </a:p>
+          <a:p>
+            <a:pPr>
+              <a:spcAft>
+                <a:spcPts val="1400"/>
+              </a:spcAft>
+              <a:defRPr sz="1600">
+                <a:solidFill>
+                  <a:srgbClr val="222222"/>
+                </a:solidFill>
+                <a:latin typeface="Calibri"/>
+              </a:defRPr>
+            </a:pPr>
+            <a:r>
+              <a:t>→  Erros de transcrição e muito retrabalho</a:t>
             </a:r>
           </a:p>
         </p:txBody>
@@ -5333,7 +4781,7 @@
                 </a:solidFill>
                 <a:latin typeface="Calibri"/>
               </a:rPr>
-              <a:t>A Solução Desenvolvida</a:t>
+              <a:t>A evolução: a planilha Excel</a:t>
             </a:r>
           </a:p>
         </p:txBody>
@@ -5383,59 +4831,14 @@
       </p:sp>
       <p:sp>
         <p:nvSpPr>
-          <p:cNvPr id="4" name="Rectangle 3"/>
-          <p:cNvSpPr/>
-          <p:nvPr/>
-        </p:nvSpPr>
-        <p:spPr>
-          <a:xfrm>
-            <a:off x="457200" y="1188720"/>
-            <a:ext cx="3657600" cy="4389120"/>
-          </a:xfrm>
-          <a:prstGeom prst="rect">
-            <a:avLst/>
-          </a:prstGeom>
-          <a:solidFill>
-            <a:srgbClr val="D6E4F0"/>
-          </a:solidFill>
-          <a:ln w="12700">
-            <a:solidFill>
-              <a:srgbClr val="2E6DA4"/>
-            </a:solidFill>
-          </a:ln>
-        </p:spPr>
-        <p:style>
-          <a:lnRef idx="1">
-            <a:schemeClr val="accent1"/>
-          </a:lnRef>
-          <a:fillRef idx="3">
-            <a:schemeClr val="accent1"/>
-          </a:fillRef>
-          <a:effectRef idx="2">
-            <a:schemeClr val="accent1"/>
-          </a:effectRef>
-          <a:fontRef idx="minor">
-            <a:schemeClr val="lt1"/>
-          </a:fontRef>
-        </p:style>
-        <p:txBody>
-          <a:bodyPr rtlCol="0" anchor="ctr"/>
-          <a:lstStyle/>
-          <a:p>
-            <a:pPr algn="ctr"/>
-          </a:p>
-        </p:txBody>
-      </p:sp>
-      <p:sp>
-        <p:nvSpPr>
-          <p:cNvPr id="5" name="TextBox 4"/>
+          <p:cNvPr id="4" name="TextBox 3"/>
           <p:cNvSpPr txBox="1"/>
           <p:nvPr/>
         </p:nvSpPr>
         <p:spPr>
           <a:xfrm>
-            <a:off x="594360" y="1280160"/>
-            <a:ext cx="3383280" cy="502920"/>
+            <a:off x="9418320" y="1645920"/>
+            <a:ext cx="2286000" cy="2286000"/>
           </a:xfrm>
           <a:prstGeom prst="rect">
             <a:avLst/>
@@ -5448,29 +4851,29 @@
           </a:bodyPr>
           <a:lstStyle/>
           <a:p>
-            <a:pPr algn="l"/>
-            <a:r>
-              <a:rPr sz="1400" b="1">
-                <a:solidFill>
-                  <a:srgbClr val="1E3A5F"/>
+            <a:pPr algn="ctr"/>
+            <a:r>
+              <a:rPr sz="9000" b="0">
+                <a:solidFill>
+                  <a:srgbClr val="CCCCCC"/>
                 </a:solidFill>
                 <a:latin typeface="Calibri"/>
               </a:rPr>
-              <a:t>🖥️  Desktop App</a:t>
-            </a:r>
-          </a:p>
-        </p:txBody>
-      </p:sp>
-      <p:sp>
-        <p:nvSpPr>
-          <p:cNvPr id="6" name="TextBox 5"/>
+              <a:t>📊</a:t>
+            </a:r>
+          </a:p>
+        </p:txBody>
+      </p:sp>
+      <p:sp>
+        <p:nvSpPr>
+          <p:cNvPr id="5" name="TextBox 4"/>
           <p:cNvSpPr txBox="1"/>
           <p:nvPr/>
         </p:nvSpPr>
         <p:spPr>
           <a:xfrm>
-            <a:off x="594360" y="1783080"/>
-            <a:ext cx="3383280" cy="3703320"/>
+            <a:off x="548640" y="1234440"/>
+            <a:ext cx="8595360" cy="457200"/>
           </a:xfrm>
           <a:prstGeom prst="rect">
             <a:avLst/>
@@ -5483,114 +4886,29 @@
           </a:bodyPr>
           <a:lstStyle/>
           <a:p>
-            <a:pPr>
-              <a:defRPr sz="1100">
-                <a:solidFill>
-                  <a:srgbClr val="1E3A5F"/>
-                </a:solidFill>
-                <a:latin typeface="Calibri"/>
-              </a:defRPr>
-            </a:pPr>
-            <a:r>
-              <a:t>• PySide6 / Qt6</a:t>
-            </a:r>
-          </a:p>
-          <a:p>
-            <a:pPr>
-              <a:defRPr sz="1100">
-                <a:solidFill>
-                  <a:srgbClr val="1E3A5F"/>
-                </a:solidFill>
-                <a:latin typeface="Calibri"/>
-              </a:defRPr>
-            </a:pPr>
-            <a:r>
-              <a:t>• Interface nativa Windows</a:t>
-            </a:r>
-          </a:p>
-          <a:p>
-            <a:pPr>
-              <a:defRPr sz="1100">
-                <a:solidFill>
-                  <a:srgbClr val="1E3A5F"/>
-                </a:solidFill>
-                <a:latin typeface="Calibri"/>
-              </a:defRPr>
-            </a:pPr>
-            <a:r>
-              <a:t>• Escala adaptativa</a:t>
-            </a:r>
-          </a:p>
-          <a:p>
-            <a:pPr>
-              <a:defRPr sz="1100">
-                <a:solidFill>
-                  <a:srgbClr val="1E3A5F"/>
-                </a:solidFill>
-                <a:latin typeface="Calibri"/>
-              </a:defRPr>
-            </a:pPr>
-            <a:r>
-              <a:t>• Atualização automática</a:t>
-            </a:r>
-          </a:p>
-        </p:txBody>
-      </p:sp>
-      <p:sp>
-        <p:nvSpPr>
-          <p:cNvPr id="7" name="Rectangle 6"/>
-          <p:cNvSpPr/>
-          <p:nvPr/>
-        </p:nvSpPr>
-        <p:spPr>
-          <a:xfrm>
-            <a:off x="4361688" y="1188720"/>
-            <a:ext cx="3657600" cy="4389120"/>
-          </a:xfrm>
-          <a:prstGeom prst="rect">
-            <a:avLst/>
-          </a:prstGeom>
-          <a:solidFill>
-            <a:srgbClr val="D6E4F0"/>
-          </a:solidFill>
-          <a:ln w="12700">
-            <a:solidFill>
-              <a:srgbClr val="2E6DA4"/>
-            </a:solidFill>
-          </a:ln>
-        </p:spPr>
-        <p:style>
-          <a:lnRef idx="1">
-            <a:schemeClr val="accent1"/>
-          </a:lnRef>
-          <a:fillRef idx="3">
-            <a:schemeClr val="accent1"/>
-          </a:fillRef>
-          <a:effectRef idx="2">
-            <a:schemeClr val="accent1"/>
-          </a:effectRef>
-          <a:fontRef idx="minor">
-            <a:schemeClr val="lt1"/>
-          </a:fontRef>
-        </p:style>
-        <p:txBody>
-          <a:bodyPr rtlCol="0" anchor="ctr"/>
-          <a:lstStyle/>
-          <a:p>
-            <a:pPr algn="ctr"/>
-          </a:p>
-        </p:txBody>
-      </p:sp>
-      <p:sp>
-        <p:nvSpPr>
-          <p:cNvPr id="8" name="TextBox 7"/>
+            <a:pPr algn="l"/>
+            <a:r>
+              <a:rPr sz="1500" b="1">
+                <a:solidFill>
+                  <a:srgbClr val="27AE60"/>
+                </a:solidFill>
+                <a:latin typeface="Calibri"/>
+              </a:rPr>
+              <a:t>O que melhorou:</a:t>
+            </a:r>
+          </a:p>
+        </p:txBody>
+      </p:sp>
+      <p:sp>
+        <p:nvSpPr>
+          <p:cNvPr id="6" name="TextBox 5"/>
           <p:cNvSpPr txBox="1"/>
           <p:nvPr/>
         </p:nvSpPr>
         <p:spPr>
           <a:xfrm>
-            <a:off x="4498848" y="1280160"/>
-            <a:ext cx="3383280" cy="502920"/>
+            <a:off x="548640" y="1691640"/>
+            <a:ext cx="8595360" cy="1645920"/>
           </a:xfrm>
           <a:prstGeom prst="rect">
             <a:avLst/>
@@ -5603,29 +4921,65 @@
           </a:bodyPr>
           <a:lstStyle/>
           <a:p>
-            <a:pPr algn="l"/>
-            <a:r>
-              <a:rPr sz="1400" b="1">
-                <a:solidFill>
-                  <a:srgbClr val="1E3A5F"/>
-                </a:solidFill>
-                <a:latin typeface="Calibri"/>
-              </a:rPr>
-              <a:t>🌐  API Central</a:t>
-            </a:r>
-          </a:p>
-        </p:txBody>
-      </p:sp>
-      <p:sp>
-        <p:nvSpPr>
-          <p:cNvPr id="9" name="TextBox 8"/>
+            <a:pPr>
+              <a:spcAft>
+                <a:spcPts val="800"/>
+              </a:spcAft>
+              <a:defRPr sz="1500">
+                <a:solidFill>
+                  <a:srgbClr val="222222"/>
+                </a:solidFill>
+                <a:latin typeface="Calibri"/>
+              </a:defRPr>
+            </a:pPr>
+            <a:r>
+              <a:t>✅  Requisições digitadas e editáveis</a:t>
+            </a:r>
+          </a:p>
+          <a:p>
+            <a:pPr>
+              <a:spcAft>
+                <a:spcPts val="800"/>
+              </a:spcAft>
+              <a:defRPr sz="1500">
+                <a:solidFill>
+                  <a:srgbClr val="222222"/>
+                </a:solidFill>
+                <a:latin typeface="Calibri"/>
+              </a:defRPr>
+            </a:pPr>
+            <a:r>
+              <a:t>✅  Fácil duplicar pedidos semelhantes</a:t>
+            </a:r>
+          </a:p>
+          <a:p>
+            <a:pPr>
+              <a:spcAft>
+                <a:spcPts val="800"/>
+              </a:spcAft>
+              <a:defRPr sz="1500">
+                <a:solidFill>
+                  <a:srgbClr val="222222"/>
+                </a:solidFill>
+                <a:latin typeface="Calibri"/>
+              </a:defRPr>
+            </a:pPr>
+            <a:r>
+              <a:t>✅  Mais fácil corrigir erros</a:t>
+            </a:r>
+          </a:p>
+        </p:txBody>
+      </p:sp>
+      <p:sp>
+        <p:nvSpPr>
+          <p:cNvPr id="7" name="TextBox 6"/>
           <p:cNvSpPr txBox="1"/>
           <p:nvPr/>
         </p:nvSpPr>
         <p:spPr>
           <a:xfrm>
-            <a:off x="4498848" y="1783080"/>
-            <a:ext cx="3383280" cy="3703320"/>
+            <a:off x="548640" y="3429000"/>
+            <a:ext cx="8595360" cy="457200"/>
           </a:xfrm>
           <a:prstGeom prst="rect">
             <a:avLst/>
@@ -5638,114 +4992,29 @@
           </a:bodyPr>
           <a:lstStyle/>
           <a:p>
-            <a:pPr>
-              <a:defRPr sz="1100">
-                <a:solidFill>
-                  <a:srgbClr val="1E3A5F"/>
-                </a:solidFill>
-                <a:latin typeface="Calibri"/>
-              </a:defRPr>
-            </a:pPr>
-            <a:r>
-              <a:t>• FastAPI + Uvicorn</a:t>
-            </a:r>
-          </a:p>
-          <a:p>
-            <a:pPr>
-              <a:defRPr sz="1100">
-                <a:solidFill>
-                  <a:srgbClr val="1E3A5F"/>
-                </a:solidFill>
-                <a:latin typeface="Calibri"/>
-              </a:defRPr>
-            </a:pPr>
-            <a:r>
-              <a:t>• REST + SSE em tempo real</a:t>
-            </a:r>
-          </a:p>
-          <a:p>
-            <a:pPr>
-              <a:defRPr sz="1100">
-                <a:solidFill>
-                  <a:srgbClr val="1E3A5F"/>
-                </a:solidFill>
-                <a:latin typeface="Calibri"/>
-              </a:defRPr>
-            </a:pPr>
-            <a:r>
-              <a:t>• Autenticação JWT</a:t>
-            </a:r>
-          </a:p>
-          <a:p>
-            <a:pPr>
-              <a:defRPr sz="1100">
-                <a:solidFill>
-                  <a:srgbClr val="1E3A5F"/>
-                </a:solidFill>
-                <a:latin typeface="Calibri"/>
-              </a:defRPr>
-            </a:pPr>
-            <a:r>
-              <a:t>• Documentação interativa</a:t>
-            </a:r>
-          </a:p>
-        </p:txBody>
-      </p:sp>
-      <p:sp>
-        <p:nvSpPr>
-          <p:cNvPr id="10" name="Rectangle 9"/>
-          <p:cNvSpPr/>
-          <p:nvPr/>
-        </p:nvSpPr>
-        <p:spPr>
-          <a:xfrm>
-            <a:off x="8266175" y="1188720"/>
-            <a:ext cx="3657600" cy="4389120"/>
-          </a:xfrm>
-          <a:prstGeom prst="rect">
-            <a:avLst/>
-          </a:prstGeom>
-          <a:solidFill>
-            <a:srgbClr val="D6E4F0"/>
-          </a:solidFill>
-          <a:ln w="12700">
-            <a:solidFill>
-              <a:srgbClr val="2E6DA4"/>
-            </a:solidFill>
-          </a:ln>
-        </p:spPr>
-        <p:style>
-          <a:lnRef idx="1">
-            <a:schemeClr val="accent1"/>
-          </a:lnRef>
-          <a:fillRef idx="3">
-            <a:schemeClr val="accent1"/>
-          </a:fillRef>
-          <a:effectRef idx="2">
-            <a:schemeClr val="accent1"/>
-          </a:effectRef>
-          <a:fontRef idx="minor">
-            <a:schemeClr val="lt1"/>
-          </a:fontRef>
-        </p:style>
-        <p:txBody>
-          <a:bodyPr rtlCol="0" anchor="ctr"/>
-          <a:lstStyle/>
-          <a:p>
-            <a:pPr algn="ctr"/>
-          </a:p>
-        </p:txBody>
-      </p:sp>
-      <p:sp>
-        <p:nvSpPr>
-          <p:cNvPr id="11" name="TextBox 10"/>
+            <a:pPr algn="l"/>
+            <a:r>
+              <a:rPr sz="1500" b="1">
+                <a:solidFill>
+                  <a:srgbClr val="C0392B"/>
+                </a:solidFill>
+                <a:latin typeface="Calibri"/>
+              </a:rPr>
+              <a:t>O que ainda faltava:</a:t>
+            </a:r>
+          </a:p>
+        </p:txBody>
+      </p:sp>
+      <p:sp>
+        <p:nvSpPr>
+          <p:cNvPr id="8" name="TextBox 7"/>
           <p:cNvSpPr txBox="1"/>
           <p:nvPr/>
         </p:nvSpPr>
         <p:spPr>
           <a:xfrm>
-            <a:off x="8403335" y="1280160"/>
-            <a:ext cx="3383280" cy="502920"/>
+            <a:off x="548640" y="3886200"/>
+            <a:ext cx="8595360" cy="2560320"/>
           </a:xfrm>
           <a:prstGeom prst="rect">
             <a:avLst/>
@@ -5758,125 +5027,67 @@
           </a:bodyPr>
           <a:lstStyle/>
           <a:p>
-            <a:pPr algn="l"/>
-            <a:r>
-              <a:rPr sz="1400" b="1">
-                <a:solidFill>
-                  <a:srgbClr val="1E3A5F"/>
-                </a:solidFill>
-                <a:latin typeface="Calibri"/>
-              </a:rPr>
-              <a:t>🗄️  Banco de Dados</a:t>
-            </a:r>
-          </a:p>
-        </p:txBody>
-      </p:sp>
-      <p:sp>
-        <p:nvSpPr>
-          <p:cNvPr id="12" name="TextBox 11"/>
-          <p:cNvSpPr txBox="1"/>
-          <p:nvPr/>
-        </p:nvSpPr>
-        <p:spPr>
-          <a:xfrm>
-            <a:off x="8403335" y="1783080"/>
-            <a:ext cx="3383280" cy="3703320"/>
-          </a:xfrm>
-          <a:prstGeom prst="rect">
-            <a:avLst/>
-          </a:prstGeom>
-          <a:noFill/>
-        </p:spPr>
-        <p:txBody>
-          <a:bodyPr wrap="square">
-            <a:spAutoFit/>
-          </a:bodyPr>
-          <a:lstStyle/>
-          <a:p>
             <a:pPr>
-              <a:defRPr sz="1100">
-                <a:solidFill>
-                  <a:srgbClr val="1E3A5F"/>
+              <a:spcAft>
+                <a:spcPts val="800"/>
+              </a:spcAft>
+              <a:defRPr sz="1500">
+                <a:solidFill>
+                  <a:srgbClr val="222222"/>
                 </a:solidFill>
                 <a:latin typeface="Calibri"/>
               </a:defRPr>
             </a:pPr>
             <a:r>
-              <a:t>• PostgreSQL 12+</a:t>
+              <a:t>❌  Sem rastreamento de status em tempo real</a:t>
             </a:r>
           </a:p>
           <a:p>
             <a:pPr>
-              <a:defRPr sz="1100">
-                <a:solidFill>
-                  <a:srgbClr val="1E3A5F"/>
+              <a:spcAft>
+                <a:spcPts val="800"/>
+              </a:spcAft>
+              <a:defRPr sz="1500">
+                <a:solidFill>
+                  <a:srgbClr val="222222"/>
                 </a:solidFill>
                 <a:latin typeface="Calibri"/>
               </a:defRPr>
             </a:pPr>
             <a:r>
-              <a:t>• Índices GIN trigram</a:t>
+              <a:t>❌  Produção e indústria sem acesso direto às informações</a:t>
             </a:r>
           </a:p>
           <a:p>
             <a:pPr>
-              <a:defRPr sz="1100">
-                <a:solidFill>
-                  <a:srgbClr val="1E3A5F"/>
+              <a:spcAft>
+                <a:spcPts val="800"/>
+              </a:spcAft>
+              <a:defRPr sz="1500">
+                <a:solidFill>
+                  <a:srgbClr val="222222"/>
                 </a:solidFill>
                 <a:latin typeface="Calibri"/>
               </a:defRPr>
             </a:pPr>
             <a:r>
-              <a:t>• Backup automático</a:t>
+              <a:t>❌  Histórico espalhado, difícil de consultar</a:t>
             </a:r>
           </a:p>
           <a:p>
             <a:pPr>
-              <a:defRPr sz="1100">
-                <a:solidFill>
-                  <a:srgbClr val="1E3A5F"/>
+              <a:spcAft>
+                <a:spcPts val="800"/>
+              </a:spcAft>
+              <a:defRPr sz="1500">
+                <a:solidFill>
+                  <a:srgbClr val="222222"/>
                 </a:solidFill>
                 <a:latin typeface="Calibri"/>
               </a:defRPr>
             </a:pPr>
             <a:r>
-              <a:t>• 12 tabelas estruturadas</a:t>
-            </a:r>
-          </a:p>
-        </p:txBody>
-      </p:sp>
-      <p:sp>
-        <p:nvSpPr>
-          <p:cNvPr id="13" name="TextBox 12"/>
-          <p:cNvSpPr txBox="1"/>
-          <p:nvPr/>
-        </p:nvSpPr>
-        <p:spPr>
-          <a:xfrm>
-            <a:off x="457200" y="6126480"/>
-            <a:ext cx="11247120" cy="457200"/>
-          </a:xfrm>
-          <a:prstGeom prst="rect">
-            <a:avLst/>
-          </a:prstGeom>
-          <a:noFill/>
-        </p:spPr>
-        <p:txBody>
-          <a:bodyPr wrap="square">
-            <a:spAutoFit/>
-          </a:bodyPr>
-          <a:lstStyle/>
-          <a:p>
-            <a:pPr algn="ctr"/>
-            <a:r>
-              <a:rPr sz="1100" b="0">
-                <a:solidFill>
-                  <a:srgbClr val="2E6DA4"/>
-                </a:solidFill>
-                <a:latin typeface="Calibri"/>
-              </a:rPr>
-              <a:t>100% desenvolvido internamente para as necessidades da Ferragens Pinheiro</a:t>
+              <a:t>❌  Atualizações recorrentes eram inviáveis na planilha</a:t>
             </a:r>
           </a:p>
         </p:txBody>
@@ -5895,7 +5106,7 @@
     <p:bg>
       <p:bgPr>
         <a:solidFill>
-          <a:srgbClr val="FFFFFF"/>
+          <a:srgbClr val="1E3A5F"/>
         </a:solidFill>
         <a:effectLst/>
       </p:bgPr>
@@ -5915,8 +5126,8 @@
         </p:nvSpPr>
         <p:spPr>
           <a:xfrm>
-            <a:off x="457200" y="228600"/>
-            <a:ext cx="11247120" cy="640080"/>
+            <a:off x="914400" y="1371600"/>
+            <a:ext cx="10332720" cy="731520"/>
           </a:xfrm>
           <a:prstGeom prst="rect">
             <a:avLst/>
@@ -5929,35 +5140,105 @@
           </a:bodyPr>
           <a:lstStyle/>
           <a:p>
-            <a:pPr algn="l"/>
-            <a:r>
-              <a:rPr sz="2800" b="1">
-                <a:solidFill>
-                  <a:srgbClr val="1E3A5F"/>
+            <a:pPr algn="ctr"/>
+            <a:r>
+              <a:rPr sz="2200" b="0">
+                <a:solidFill>
+                  <a:srgbClr val="D6E4F0"/>
                 </a:solidFill>
                 <a:latin typeface="Calibri"/>
               </a:rPr>
-              <a:t>6 Perfis de Acesso</a:t>
-            </a:r>
-          </a:p>
-        </p:txBody>
-      </p:sp>
-      <p:sp>
-        <p:nvSpPr>
-          <p:cNvPr id="3" name="Rectangle 2"/>
+              <a:t>A solução:</a:t>
+            </a:r>
+          </a:p>
+        </p:txBody>
+      </p:sp>
+      <p:sp>
+        <p:nvSpPr>
+          <p:cNvPr id="3" name="TextBox 2"/>
+          <p:cNvSpPr txBox="1"/>
+          <p:nvPr/>
+        </p:nvSpPr>
+        <p:spPr>
+          <a:xfrm>
+            <a:off x="914400" y="2103120"/>
+            <a:ext cx="10332720" cy="1280160"/>
+          </a:xfrm>
+          <a:prstGeom prst="rect">
+            <a:avLst/>
+          </a:prstGeom>
+          <a:noFill/>
+        </p:spPr>
+        <p:txBody>
+          <a:bodyPr wrap="square">
+            <a:spAutoFit/>
+          </a:bodyPr>
+          <a:lstStyle/>
+          <a:p>
+            <a:pPr algn="ctr"/>
+            <a:r>
+              <a:rPr sz="5200" b="1">
+                <a:solidFill>
+                  <a:srgbClr val="FFFFFF"/>
+                </a:solidFill>
+                <a:latin typeface="Calibri"/>
+              </a:rPr>
+              <a:t>Requisições App</a:t>
+            </a:r>
+          </a:p>
+        </p:txBody>
+      </p:sp>
+      <p:sp>
+        <p:nvSpPr>
+          <p:cNvPr id="4" name="TextBox 3"/>
+          <p:cNvSpPr txBox="1"/>
+          <p:nvPr/>
+        </p:nvSpPr>
+        <p:spPr>
+          <a:xfrm>
+            <a:off x="914400" y="3429000"/>
+            <a:ext cx="10332720" cy="594360"/>
+          </a:xfrm>
+          <a:prstGeom prst="rect">
+            <a:avLst/>
+          </a:prstGeom>
+          <a:noFill/>
+        </p:spPr>
+        <p:txBody>
+          <a:bodyPr wrap="square">
+            <a:spAutoFit/>
+          </a:bodyPr>
+          <a:lstStyle/>
+          <a:p>
+            <a:pPr algn="ctr"/>
+            <a:r>
+              <a:rPr sz="1800" b="0">
+                <a:solidFill>
+                  <a:srgbClr val="D6E4F0"/>
+                </a:solidFill>
+                <a:latin typeface="Calibri"/>
+              </a:rPr>
+              <a:t>Desenvolvido especialmente para a Ferragens Pinheiro</a:t>
+            </a:r>
+          </a:p>
+        </p:txBody>
+      </p:sp>
+      <p:sp>
+        <p:nvSpPr>
+          <p:cNvPr id="5" name="Rectangle 4"/>
           <p:cNvSpPr/>
           <p:nvPr/>
         </p:nvSpPr>
         <p:spPr>
           <a:xfrm>
-            <a:off x="457200" y="914400"/>
-            <a:ext cx="11247120" cy="36576"/>
+            <a:off x="1005840" y="4297680"/>
+            <a:ext cx="2286000" cy="2148840"/>
           </a:xfrm>
           <a:prstGeom prst="rect">
             <a:avLst/>
           </a:prstGeom>
           <a:solidFill>
-            <a:srgbClr val="2E6DA4"/>
+            <a:srgbClr val="162D4F"/>
           </a:solidFill>
           <a:ln>
             <a:noFill/>
@@ -5987,20 +5268,91 @@
       </p:sp>
       <p:sp>
         <p:nvSpPr>
-          <p:cNvPr id="4" name="Rectangle 3"/>
+          <p:cNvPr id="6" name="TextBox 5"/>
+          <p:cNvSpPr txBox="1"/>
+          <p:nvPr/>
+        </p:nvSpPr>
+        <p:spPr>
+          <a:xfrm>
+            <a:off x="1005840" y="4343400"/>
+            <a:ext cx="2286000" cy="731520"/>
+          </a:xfrm>
+          <a:prstGeom prst="rect">
+            <a:avLst/>
+          </a:prstGeom>
+          <a:noFill/>
+        </p:spPr>
+        <p:txBody>
+          <a:bodyPr wrap="square">
+            <a:spAutoFit/>
+          </a:bodyPr>
+          <a:lstStyle/>
+          <a:p>
+            <a:pPr algn="ctr"/>
+            <a:r>
+              <a:rPr sz="3000" b="0">
+                <a:solidFill>
+                  <a:srgbClr val="FFFFFF"/>
+                </a:solidFill>
+                <a:latin typeface="Calibri"/>
+              </a:rPr>
+              <a:t>🖥️</a:t>
+            </a:r>
+          </a:p>
+        </p:txBody>
+      </p:sp>
+      <p:sp>
+        <p:nvSpPr>
+          <p:cNvPr id="7" name="TextBox 6"/>
+          <p:cNvSpPr txBox="1"/>
+          <p:nvPr/>
+        </p:nvSpPr>
+        <p:spPr>
+          <a:xfrm>
+            <a:off x="1005840" y="5074920"/>
+            <a:ext cx="2286000" cy="1188720"/>
+          </a:xfrm>
+          <a:prstGeom prst="rect">
+            <a:avLst/>
+          </a:prstGeom>
+          <a:noFill/>
+        </p:spPr>
+        <p:txBody>
+          <a:bodyPr wrap="square">
+            <a:spAutoFit/>
+          </a:bodyPr>
+          <a:lstStyle/>
+          <a:p>
+            <a:pPr algn="ctr"/>
+            <a:r>
+              <a:rPr sz="1400" b="0">
+                <a:solidFill>
+                  <a:srgbClr val="D6E4F0"/>
+                </a:solidFill>
+                <a:latin typeface="Calibri"/>
+              </a:rPr>
+              <a:t>Desktop
+nativo</a:t>
+            </a:r>
+          </a:p>
+        </p:txBody>
+      </p:sp>
+      <p:sp>
+        <p:nvSpPr>
+          <p:cNvPr id="8" name="Rectangle 7"/>
           <p:cNvSpPr/>
           <p:nvPr/>
         </p:nvSpPr>
         <p:spPr>
           <a:xfrm>
-            <a:off x="457200" y="1188720"/>
-            <a:ext cx="11247120" cy="804672"/>
+            <a:off x="3611880" y="4297680"/>
+            <a:ext cx="2286000" cy="2148840"/>
           </a:xfrm>
           <a:prstGeom prst="rect">
             <a:avLst/>
           </a:prstGeom>
           <a:solidFill>
-            <a:srgbClr val="D6E4F0"/>
+            <a:srgbClr val="162D4F"/>
           </a:solidFill>
           <a:ln>
             <a:noFill/>
@@ -6030,14 +5382,14 @@
       </p:sp>
       <p:sp>
         <p:nvSpPr>
-          <p:cNvPr id="5" name="TextBox 4"/>
+          <p:cNvPr id="9" name="TextBox 8"/>
           <p:cNvSpPr txBox="1"/>
           <p:nvPr/>
         </p:nvSpPr>
         <p:spPr>
           <a:xfrm>
-            <a:off x="548640" y="1280160"/>
-            <a:ext cx="2011680" cy="621792"/>
+            <a:off x="3611880" y="4343400"/>
+            <a:ext cx="2286000" cy="731520"/>
           </a:xfrm>
           <a:prstGeom prst="rect">
             <a:avLst/>
@@ -6050,29 +5402,29 @@
           </a:bodyPr>
           <a:lstStyle/>
           <a:p>
-            <a:pPr algn="l"/>
-            <a:r>
-              <a:rPr sz="1300" b="1">
-                <a:solidFill>
-                  <a:srgbClr val="1E3A5F"/>
+            <a:pPr algn="ctr"/>
+            <a:r>
+              <a:rPr sz="3000" b="0">
+                <a:solidFill>
+                  <a:srgbClr val="FFFFFF"/>
                 </a:solidFill>
                 <a:latin typeface="Calibri"/>
               </a:rPr>
-              <a:t>👑  Admin</a:t>
-            </a:r>
-          </a:p>
-        </p:txBody>
-      </p:sp>
-      <p:sp>
-        <p:nvSpPr>
-          <p:cNvPr id="6" name="TextBox 5"/>
+              <a:t>⚡</a:t>
+            </a:r>
+          </a:p>
+        </p:txBody>
+      </p:sp>
+      <p:sp>
+        <p:nvSpPr>
+          <p:cNvPr id="10" name="TextBox 9"/>
           <p:cNvSpPr txBox="1"/>
           <p:nvPr/>
         </p:nvSpPr>
         <p:spPr>
           <a:xfrm>
-            <a:off x="2651760" y="1280160"/>
-            <a:ext cx="8869680" cy="621792"/>
+            <a:off x="3611880" y="5074920"/>
+            <a:ext cx="2286000" cy="1188720"/>
           </a:xfrm>
           <a:prstGeom prst="rect">
             <a:avLst/>
@@ -6085,35 +5437,36 @@
           </a:bodyPr>
           <a:lstStyle/>
           <a:p>
-            <a:pPr algn="l"/>
-            <a:r>
-              <a:rPr sz="1200" b="0">
-                <a:solidFill>
-                  <a:srgbClr val="333333"/>
+            <a:pPr algn="ctr"/>
+            <a:r>
+              <a:rPr sz="1400" b="0">
+                <a:solidFill>
+                  <a:srgbClr val="D6E4F0"/>
                 </a:solidFill>
                 <a:latin typeface="Calibri"/>
               </a:rPr>
-              <a:t>Acesso total — usuários, painel técnico, configurações</a:t>
-            </a:r>
-          </a:p>
-        </p:txBody>
-      </p:sp>
-      <p:sp>
-        <p:nvSpPr>
-          <p:cNvPr id="7" name="Rectangle 6"/>
+              <a:t>Tempo
+real</a:t>
+            </a:r>
+          </a:p>
+        </p:txBody>
+      </p:sp>
+      <p:sp>
+        <p:nvSpPr>
+          <p:cNvPr id="11" name="Rectangle 10"/>
           <p:cNvSpPr/>
           <p:nvPr/>
         </p:nvSpPr>
         <p:spPr>
           <a:xfrm>
-            <a:off x="457200" y="2057400"/>
-            <a:ext cx="11247120" cy="804672"/>
+            <a:off x="6217920" y="4297680"/>
+            <a:ext cx="2286000" cy="2148840"/>
           </a:xfrm>
           <a:prstGeom prst="rect">
             <a:avLst/>
           </a:prstGeom>
           <a:solidFill>
-            <a:srgbClr val="FFFFFF"/>
+            <a:srgbClr val="162D4F"/>
           </a:solidFill>
           <a:ln>
             <a:noFill/>
@@ -6143,14 +5496,14 @@
       </p:sp>
       <p:sp>
         <p:nvSpPr>
-          <p:cNvPr id="8" name="TextBox 7"/>
+          <p:cNvPr id="12" name="TextBox 11"/>
           <p:cNvSpPr txBox="1"/>
           <p:nvPr/>
         </p:nvSpPr>
         <p:spPr>
           <a:xfrm>
-            <a:off x="548640" y="2148840"/>
-            <a:ext cx="2011680" cy="621792"/>
+            <a:off x="6217920" y="4343400"/>
+            <a:ext cx="2286000" cy="731520"/>
           </a:xfrm>
           <a:prstGeom prst="rect">
             <a:avLst/>
@@ -6163,29 +5516,29 @@
           </a:bodyPr>
           <a:lstStyle/>
           <a:p>
-            <a:pPr algn="l"/>
-            <a:r>
-              <a:rPr sz="1300" b="1">
-                <a:solidFill>
-                  <a:srgbClr val="1E3A5F"/>
+            <a:pPr algn="ctr"/>
+            <a:r>
+              <a:rPr sz="3000" b="0">
+                <a:solidFill>
+                  <a:srgbClr val="FFFFFF"/>
                 </a:solidFill>
                 <a:latin typeface="Calibri"/>
               </a:rPr>
-              <a:t>📊  Gerente</a:t>
-            </a:r>
-          </a:p>
-        </p:txBody>
-      </p:sp>
-      <p:sp>
-        <p:nvSpPr>
-          <p:cNvPr id="9" name="TextBox 8"/>
+              <a:t>🔐</a:t>
+            </a:r>
+          </a:p>
+        </p:txBody>
+      </p:sp>
+      <p:sp>
+        <p:nvSpPr>
+          <p:cNvPr id="13" name="TextBox 12"/>
           <p:cNvSpPr txBox="1"/>
           <p:nvPr/>
         </p:nvSpPr>
         <p:spPr>
           <a:xfrm>
-            <a:off x="2651760" y="2148840"/>
-            <a:ext cx="8869680" cy="621792"/>
+            <a:off x="6217920" y="5074920"/>
+            <a:ext cx="2286000" cy="1188720"/>
           </a:xfrm>
           <a:prstGeom prst="rect">
             <a:avLst/>
@@ -6198,35 +5551,36 @@
           </a:bodyPr>
           <a:lstStyle/>
           <a:p>
-            <a:pPr algn="l"/>
-            <a:r>
-              <a:rPr sz="1200" b="0">
-                <a:solidFill>
-                  <a:srgbClr val="333333"/>
+            <a:pPr algn="ctr"/>
+            <a:r>
+              <a:rPr sz="1400" b="0">
+                <a:solidFill>
+                  <a:srgbClr val="D6E4F0"/>
                 </a:solidFill>
                 <a:latin typeface="Calibri"/>
               </a:rPr>
-              <a:t>Dashboard, pedidos, histórico, gestão de usuários</a:t>
-            </a:r>
-          </a:p>
-        </p:txBody>
-      </p:sp>
-      <p:sp>
-        <p:nvSpPr>
-          <p:cNvPr id="10" name="Rectangle 9"/>
+              <a:t>Perfis e
+permissões</a:t>
+            </a:r>
+          </a:p>
+        </p:txBody>
+      </p:sp>
+      <p:sp>
+        <p:nvSpPr>
+          <p:cNvPr id="14" name="Rectangle 13"/>
           <p:cNvSpPr/>
           <p:nvPr/>
         </p:nvSpPr>
         <p:spPr>
           <a:xfrm>
-            <a:off x="457200" y="2926080"/>
-            <a:ext cx="11247120" cy="804672"/>
+            <a:off x="8823960" y="4297680"/>
+            <a:ext cx="2286000" cy="2148840"/>
           </a:xfrm>
           <a:prstGeom prst="rect">
             <a:avLst/>
           </a:prstGeom>
           <a:solidFill>
-            <a:srgbClr val="D6E4F0"/>
+            <a:srgbClr val="162D4F"/>
           </a:solidFill>
           <a:ln>
             <a:noFill/>
@@ -6256,14 +5610,14 @@
       </p:sp>
       <p:sp>
         <p:nvSpPr>
-          <p:cNvPr id="11" name="TextBox 10"/>
+          <p:cNvPr id="15" name="TextBox 14"/>
           <p:cNvSpPr txBox="1"/>
           <p:nvPr/>
         </p:nvSpPr>
         <p:spPr>
           <a:xfrm>
-            <a:off x="548640" y="3017520"/>
-            <a:ext cx="2011680" cy="621792"/>
+            <a:off x="8823960" y="4343400"/>
+            <a:ext cx="2286000" cy="731520"/>
           </a:xfrm>
           <a:prstGeom prst="rect">
             <a:avLst/>
@@ -6276,29 +5630,29 @@
           </a:bodyPr>
           <a:lstStyle/>
           <a:p>
-            <a:pPr algn="l"/>
-            <a:r>
-              <a:rPr sz="1300" b="1">
-                <a:solidFill>
-                  <a:srgbClr val="1E3A5F"/>
+            <a:pPr algn="ctr"/>
+            <a:r>
+              <a:rPr sz="3000" b="0">
+                <a:solidFill>
+                  <a:srgbClr val="FFFFFF"/>
                 </a:solidFill>
                 <a:latin typeface="Calibri"/>
               </a:rPr>
-              <a:t>🛒  Vendedor</a:t>
-            </a:r>
-          </a:p>
-        </p:txBody>
-      </p:sp>
-      <p:sp>
-        <p:nvSpPr>
-          <p:cNvPr id="12" name="TextBox 11"/>
+              <a:t>🔄</a:t>
+            </a:r>
+          </a:p>
+        </p:txBody>
+      </p:sp>
+      <p:sp>
+        <p:nvSpPr>
+          <p:cNvPr id="16" name="TextBox 15"/>
           <p:cNvSpPr txBox="1"/>
           <p:nvPr/>
         </p:nvSpPr>
         <p:spPr>
           <a:xfrm>
-            <a:off x="2651760" y="3017520"/>
-            <a:ext cx="8869680" cy="621792"/>
+            <a:off x="8823960" y="5074920"/>
+            <a:ext cx="2286000" cy="1188720"/>
           </a:xfrm>
           <a:prstGeom prst="rect">
             <a:avLst/>
@@ -6311,354 +5665,16 @@
           </a:bodyPr>
           <a:lstStyle/>
           <a:p>
-            <a:pPr algn="l"/>
-            <a:r>
-              <a:rPr sz="1200" b="0">
-                <a:solidFill>
-                  <a:srgbClr val="333333"/>
+            <a:pPr algn="ctr"/>
+            <a:r>
+              <a:rPr sz="1400" b="0">
+                <a:solidFill>
+                  <a:srgbClr val="D6E4F0"/>
                 </a:solidFill>
                 <a:latin typeface="Calibri"/>
               </a:rPr>
-              <a:t>Criar e acompanhar suas requisições, histórico</a:t>
-            </a:r>
-          </a:p>
-        </p:txBody>
-      </p:sp>
-      <p:sp>
-        <p:nvSpPr>
-          <p:cNvPr id="13" name="Rectangle 12"/>
-          <p:cNvSpPr/>
-          <p:nvPr/>
-        </p:nvSpPr>
-        <p:spPr>
-          <a:xfrm>
-            <a:off x="457200" y="3794759"/>
-            <a:ext cx="11247120" cy="804672"/>
-          </a:xfrm>
-          <a:prstGeom prst="rect">
-            <a:avLst/>
-          </a:prstGeom>
-          <a:solidFill>
-            <a:srgbClr val="FFFFFF"/>
-          </a:solidFill>
-          <a:ln>
-            <a:noFill/>
-          </a:ln>
-        </p:spPr>
-        <p:style>
-          <a:lnRef idx="1">
-            <a:schemeClr val="accent1"/>
-          </a:lnRef>
-          <a:fillRef idx="3">
-            <a:schemeClr val="accent1"/>
-          </a:fillRef>
-          <a:effectRef idx="2">
-            <a:schemeClr val="accent1"/>
-          </a:effectRef>
-          <a:fontRef idx="minor">
-            <a:schemeClr val="lt1"/>
-          </a:fontRef>
-        </p:style>
-        <p:txBody>
-          <a:bodyPr rtlCol="0" anchor="ctr"/>
-          <a:lstStyle/>
-          <a:p>
-            <a:pPr algn="ctr"/>
-          </a:p>
-        </p:txBody>
-      </p:sp>
-      <p:sp>
-        <p:nvSpPr>
-          <p:cNvPr id="14" name="TextBox 13"/>
-          <p:cNvSpPr txBox="1"/>
-          <p:nvPr/>
-        </p:nvSpPr>
-        <p:spPr>
-          <a:xfrm>
-            <a:off x="548640" y="3886199"/>
-            <a:ext cx="2011680" cy="621792"/>
-          </a:xfrm>
-          <a:prstGeom prst="rect">
-            <a:avLst/>
-          </a:prstGeom>
-          <a:noFill/>
-        </p:spPr>
-        <p:txBody>
-          <a:bodyPr wrap="square">
-            <a:spAutoFit/>
-          </a:bodyPr>
-          <a:lstStyle/>
-          <a:p>
-            <a:pPr algn="l"/>
-            <a:r>
-              <a:rPr sz="1300" b="1">
-                <a:solidFill>
-                  <a:srgbClr val="1E3A5F"/>
-                </a:solidFill>
-                <a:latin typeface="Calibri"/>
-              </a:rPr>
-              <a:t>🔧  Produção (A&amp;R)</a:t>
-            </a:r>
-          </a:p>
-        </p:txBody>
-      </p:sp>
-      <p:sp>
-        <p:nvSpPr>
-          <p:cNvPr id="15" name="TextBox 14"/>
-          <p:cNvSpPr txBox="1"/>
-          <p:nvPr/>
-        </p:nvSpPr>
-        <p:spPr>
-          <a:xfrm>
-            <a:off x="2651760" y="3886199"/>
-            <a:ext cx="8869680" cy="621792"/>
-          </a:xfrm>
-          <a:prstGeom prst="rect">
-            <a:avLst/>
-          </a:prstGeom>
-          <a:noFill/>
-        </p:spPr>
-        <p:txBody>
-          <a:bodyPr wrap="square">
-            <a:spAutoFit/>
-          </a:bodyPr>
-          <a:lstStyle/>
-          <a:p>
-            <a:pPr algn="l"/>
-            <a:r>
-              <a:rPr sz="1200" b="0">
-                <a:solidFill>
-                  <a:srgbClr val="333333"/>
-                </a:solidFill>
-                <a:latin typeface="Calibri"/>
-              </a:rPr>
-              <a:t>Visualizar requisições e tela de A&amp;R em leitura</a:t>
-            </a:r>
-          </a:p>
-        </p:txBody>
-      </p:sp>
-      <p:sp>
-        <p:nvSpPr>
-          <p:cNvPr id="16" name="Rectangle 15"/>
-          <p:cNvSpPr/>
-          <p:nvPr/>
-        </p:nvSpPr>
-        <p:spPr>
-          <a:xfrm>
-            <a:off x="457200" y="4663440"/>
-            <a:ext cx="11247120" cy="804672"/>
-          </a:xfrm>
-          <a:prstGeom prst="rect">
-            <a:avLst/>
-          </a:prstGeom>
-          <a:solidFill>
-            <a:srgbClr val="D6E4F0"/>
-          </a:solidFill>
-          <a:ln>
-            <a:noFill/>
-          </a:ln>
-        </p:spPr>
-        <p:style>
-          <a:lnRef idx="1">
-            <a:schemeClr val="accent1"/>
-          </a:lnRef>
-          <a:fillRef idx="3">
-            <a:schemeClr val="accent1"/>
-          </a:fillRef>
-          <a:effectRef idx="2">
-            <a:schemeClr val="accent1"/>
-          </a:effectRef>
-          <a:fontRef idx="minor">
-            <a:schemeClr val="lt1"/>
-          </a:fontRef>
-        </p:style>
-        <p:txBody>
-          <a:bodyPr rtlCol="0" anchor="ctr"/>
-          <a:lstStyle/>
-          <a:p>
-            <a:pPr algn="ctr"/>
-          </a:p>
-        </p:txBody>
-      </p:sp>
-      <p:sp>
-        <p:nvSpPr>
-          <p:cNvPr id="17" name="TextBox 16"/>
-          <p:cNvSpPr txBox="1"/>
-          <p:nvPr/>
-        </p:nvSpPr>
-        <p:spPr>
-          <a:xfrm>
-            <a:off x="548640" y="4754880"/>
-            <a:ext cx="2011680" cy="621792"/>
-          </a:xfrm>
-          <a:prstGeom prst="rect">
-            <a:avLst/>
-          </a:prstGeom>
-          <a:noFill/>
-        </p:spPr>
-        <p:txBody>
-          <a:bodyPr wrap="square">
-            <a:spAutoFit/>
-          </a:bodyPr>
-          <a:lstStyle/>
-          <a:p>
-            <a:pPr algn="l"/>
-            <a:r>
-              <a:rPr sz="1300" b="1">
-                <a:solidFill>
-                  <a:srgbClr val="1E3A5F"/>
-                </a:solidFill>
-                <a:latin typeface="Calibri"/>
-              </a:rPr>
-              <a:t>🏭  Indústria</a:t>
-            </a:r>
-          </a:p>
-        </p:txBody>
-      </p:sp>
-      <p:sp>
-        <p:nvSpPr>
-          <p:cNvPr id="18" name="TextBox 17"/>
-          <p:cNvSpPr txBox="1"/>
-          <p:nvPr/>
-        </p:nvSpPr>
-        <p:spPr>
-          <a:xfrm>
-            <a:off x="2651760" y="4754880"/>
-            <a:ext cx="8869680" cy="621792"/>
-          </a:xfrm>
-          <a:prstGeom prst="rect">
-            <a:avLst/>
-          </a:prstGeom>
-          <a:noFill/>
-        </p:spPr>
-        <p:txBody>
-          <a:bodyPr wrap="square">
-            <a:spAutoFit/>
-          </a:bodyPr>
-          <a:lstStyle/>
-          <a:p>
-            <a:pPr algn="l"/>
-            <a:r>
-              <a:rPr sz="1200" b="0">
-                <a:solidFill>
-                  <a:srgbClr val="333333"/>
-                </a:solidFill>
-                <a:latin typeface="Calibri"/>
-              </a:rPr>
-              <a:t>Visualizar requisições e tela de Indústria em leitura</a:t>
-            </a:r>
-          </a:p>
-        </p:txBody>
-      </p:sp>
-      <p:sp>
-        <p:nvSpPr>
-          <p:cNvPr id="19" name="Rectangle 18"/>
-          <p:cNvSpPr/>
-          <p:nvPr/>
-        </p:nvSpPr>
-        <p:spPr>
-          <a:xfrm>
-            <a:off x="457200" y="5532120"/>
-            <a:ext cx="11247120" cy="804672"/>
-          </a:xfrm>
-          <a:prstGeom prst="rect">
-            <a:avLst/>
-          </a:prstGeom>
-          <a:solidFill>
-            <a:srgbClr val="FFFFFF"/>
-          </a:solidFill>
-          <a:ln>
-            <a:noFill/>
-          </a:ln>
-        </p:spPr>
-        <p:style>
-          <a:lnRef idx="1">
-            <a:schemeClr val="accent1"/>
-          </a:lnRef>
-          <a:fillRef idx="3">
-            <a:schemeClr val="accent1"/>
-          </a:fillRef>
-          <a:effectRef idx="2">
-            <a:schemeClr val="accent1"/>
-          </a:effectRef>
-          <a:fontRef idx="minor">
-            <a:schemeClr val="lt1"/>
-          </a:fontRef>
-        </p:style>
-        <p:txBody>
-          <a:bodyPr rtlCol="0" anchor="ctr"/>
-          <a:lstStyle/>
-          <a:p>
-            <a:pPr algn="ctr"/>
-          </a:p>
-        </p:txBody>
-      </p:sp>
-      <p:sp>
-        <p:nvSpPr>
-          <p:cNvPr id="20" name="TextBox 19"/>
-          <p:cNvSpPr txBox="1"/>
-          <p:nvPr/>
-        </p:nvSpPr>
-        <p:spPr>
-          <a:xfrm>
-            <a:off x="548640" y="5623560"/>
-            <a:ext cx="2011680" cy="621792"/>
-          </a:xfrm>
-          <a:prstGeom prst="rect">
-            <a:avLst/>
-          </a:prstGeom>
-          <a:noFill/>
-        </p:spPr>
-        <p:txBody>
-          <a:bodyPr wrap="square">
-            <a:spAutoFit/>
-          </a:bodyPr>
-          <a:lstStyle/>
-          <a:p>
-            <a:pPr algn="l"/>
-            <a:r>
-              <a:rPr sz="1300" b="1">
-                <a:solidFill>
-                  <a:srgbClr val="1E3A5F"/>
-                </a:solidFill>
-                <a:latin typeface="Calibri"/>
-              </a:rPr>
-              <a:t>🚚  Entrega</a:t>
-            </a:r>
-          </a:p>
-        </p:txBody>
-      </p:sp>
-      <p:sp>
-        <p:nvSpPr>
-          <p:cNvPr id="21" name="TextBox 20"/>
-          <p:cNvSpPr txBox="1"/>
-          <p:nvPr/>
-        </p:nvSpPr>
-        <p:spPr>
-          <a:xfrm>
-            <a:off x="2651760" y="5623560"/>
-            <a:ext cx="8869680" cy="621792"/>
-          </a:xfrm>
-          <a:prstGeom prst="rect">
-            <a:avLst/>
-          </a:prstGeom>
-          <a:noFill/>
-        </p:spPr>
-        <p:txBody>
-          <a:bodyPr wrap="square">
-            <a:spAutoFit/>
-          </a:bodyPr>
-          <a:lstStyle/>
-          <a:p>
-            <a:pPr algn="l"/>
-            <a:r>
-              <a:rPr sz="1200" b="0">
-                <a:solidFill>
-                  <a:srgbClr val="333333"/>
-                </a:solidFill>
-                <a:latin typeface="Calibri"/>
-              </a:rPr>
-              <a:t>Visualizar Central de Pedidos em modo leitura</a:t>
+              <a:t>Atualização
+automática</a:t>
             </a:r>
           </a:p>
         </p:txBody>
@@ -6719,7 +5735,7 @@
                 </a:solidFill>
                 <a:latin typeface="Calibri"/>
               </a:rPr>
-              <a:t>O Que o Sistema Faz</a:t>
+              <a:t>Interface e Navegação</a:t>
             </a:r>
           </a:p>
         </p:txBody>
@@ -6769,59 +5785,14 @@
       </p:sp>
       <p:sp>
         <p:nvSpPr>
-          <p:cNvPr id="4" name="Rectangle 3"/>
-          <p:cNvSpPr/>
-          <p:nvPr/>
-        </p:nvSpPr>
-        <p:spPr>
-          <a:xfrm>
-            <a:off x="365760" y="1280160"/>
-            <a:ext cx="3749039" cy="2194560"/>
-          </a:xfrm>
-          <a:prstGeom prst="rect">
-            <a:avLst/>
-          </a:prstGeom>
-          <a:solidFill>
-            <a:srgbClr val="D6E4F0"/>
-          </a:solidFill>
-          <a:ln w="12700">
-            <a:solidFill>
-              <a:srgbClr val="2E6DA4"/>
-            </a:solidFill>
-          </a:ln>
-        </p:spPr>
-        <p:style>
-          <a:lnRef idx="1">
-            <a:schemeClr val="accent1"/>
-          </a:lnRef>
-          <a:fillRef idx="3">
-            <a:schemeClr val="accent1"/>
-          </a:fillRef>
-          <a:effectRef idx="2">
-            <a:schemeClr val="accent1"/>
-          </a:effectRef>
-          <a:fontRef idx="minor">
-            <a:schemeClr val="lt1"/>
-          </a:fontRef>
-        </p:style>
-        <p:txBody>
-          <a:bodyPr rtlCol="0" anchor="ctr"/>
-          <a:lstStyle/>
-          <a:p>
-            <a:pPr algn="ctr"/>
-          </a:p>
-        </p:txBody>
-      </p:sp>
-      <p:sp>
-        <p:nvSpPr>
-          <p:cNvPr id="5" name="TextBox 4"/>
+          <p:cNvPr id="4" name="TextBox 3"/>
           <p:cNvSpPr txBox="1"/>
           <p:nvPr/>
         </p:nvSpPr>
         <p:spPr>
           <a:xfrm>
-            <a:off x="502920" y="1389888"/>
-            <a:ext cx="3474720" cy="502920"/>
+            <a:off x="548640" y="1280160"/>
+            <a:ext cx="11064240" cy="5029200"/>
           </a:xfrm>
           <a:prstGeom prst="rect">
             <a:avLst/>
@@ -6834,625 +5805,99 @@
           </a:bodyPr>
           <a:lstStyle/>
           <a:p>
-            <a:pPr algn="l"/>
-            <a:r>
-              <a:rPr sz="1400" b="1">
-                <a:solidFill>
-                  <a:srgbClr val="1E3A5F"/>
-                </a:solidFill>
-                <a:latin typeface="Calibri"/>
-              </a:rPr>
-              <a:t>📋  Central de Pedidos</a:t>
-            </a:r>
-          </a:p>
-        </p:txBody>
-      </p:sp>
-      <p:sp>
-        <p:nvSpPr>
-          <p:cNvPr id="6" name="TextBox 5"/>
-          <p:cNvSpPr txBox="1"/>
-          <p:nvPr/>
-        </p:nvSpPr>
-        <p:spPr>
-          <a:xfrm>
-            <a:off x="502920" y="1938528"/>
-            <a:ext cx="3474720" cy="1417320"/>
-          </a:xfrm>
-          <a:prstGeom prst="rect">
-            <a:avLst/>
-          </a:prstGeom>
-          <a:noFill/>
-        </p:spPr>
-        <p:txBody>
-          <a:bodyPr wrap="square">
-            <a:spAutoFit/>
-          </a:bodyPr>
-          <a:lstStyle/>
-          <a:p>
-            <a:pPr algn="l"/>
-            <a:r>
-              <a:rPr sz="1100" b="0">
-                <a:solidFill>
-                  <a:srgbClr val="1E3A5F"/>
-                </a:solidFill>
-                <a:latin typeface="Calibri"/>
-              </a:rPr>
-              <a:t>Criação, acompanhamento e busca de requisições em tempo real</a:t>
-            </a:r>
-          </a:p>
-        </p:txBody>
-      </p:sp>
-      <p:sp>
-        <p:nvSpPr>
-          <p:cNvPr id="7" name="Rectangle 6"/>
-          <p:cNvSpPr/>
-          <p:nvPr/>
-        </p:nvSpPr>
-        <p:spPr>
-          <a:xfrm>
-            <a:off x="4297680" y="1280160"/>
-            <a:ext cx="3749039" cy="2194560"/>
-          </a:xfrm>
-          <a:prstGeom prst="rect">
-            <a:avLst/>
-          </a:prstGeom>
-          <a:solidFill>
-            <a:srgbClr val="D6E4F0"/>
-          </a:solidFill>
-          <a:ln w="12700">
-            <a:solidFill>
-              <a:srgbClr val="2E6DA4"/>
-            </a:solidFill>
-          </a:ln>
-        </p:spPr>
-        <p:style>
-          <a:lnRef idx="1">
-            <a:schemeClr val="accent1"/>
-          </a:lnRef>
-          <a:fillRef idx="3">
-            <a:schemeClr val="accent1"/>
-          </a:fillRef>
-          <a:effectRef idx="2">
-            <a:schemeClr val="accent1"/>
-          </a:effectRef>
-          <a:fontRef idx="minor">
-            <a:schemeClr val="lt1"/>
-          </a:fontRef>
-        </p:style>
-        <p:txBody>
-          <a:bodyPr rtlCol="0" anchor="ctr"/>
-          <a:lstStyle/>
-          <a:p>
-            <a:pPr algn="ctr"/>
-          </a:p>
-        </p:txBody>
-      </p:sp>
-      <p:sp>
-        <p:nvSpPr>
-          <p:cNvPr id="8" name="TextBox 7"/>
-          <p:cNvSpPr txBox="1"/>
-          <p:nvPr/>
-        </p:nvSpPr>
-        <p:spPr>
-          <a:xfrm>
-            <a:off x="4434840" y="1389888"/>
-            <a:ext cx="3474720" cy="502920"/>
-          </a:xfrm>
-          <a:prstGeom prst="rect">
-            <a:avLst/>
-          </a:prstGeom>
-          <a:noFill/>
-        </p:spPr>
-        <p:txBody>
-          <a:bodyPr wrap="square">
-            <a:spAutoFit/>
-          </a:bodyPr>
-          <a:lstStyle/>
-          <a:p>
-            <a:pPr algn="l"/>
-            <a:r>
-              <a:rPr sz="1400" b="1">
-                <a:solidFill>
-                  <a:srgbClr val="1E3A5F"/>
-                </a:solidFill>
-                <a:latin typeface="Calibri"/>
-              </a:rPr>
-              <a:t>📄  PDF Automático</a:t>
-            </a:r>
-          </a:p>
-        </p:txBody>
-      </p:sp>
-      <p:sp>
-        <p:nvSpPr>
-          <p:cNvPr id="9" name="TextBox 8"/>
-          <p:cNvSpPr txBox="1"/>
-          <p:nvPr/>
-        </p:nvSpPr>
-        <p:spPr>
-          <a:xfrm>
-            <a:off x="4434840" y="1938528"/>
-            <a:ext cx="3474720" cy="1417320"/>
-          </a:xfrm>
-          <a:prstGeom prst="rect">
-            <a:avLst/>
-          </a:prstGeom>
-          <a:noFill/>
-        </p:spPr>
-        <p:txBody>
-          <a:bodyPr wrap="square">
-            <a:spAutoFit/>
-          </a:bodyPr>
-          <a:lstStyle/>
-          <a:p>
-            <a:pPr algn="l"/>
-            <a:r>
-              <a:rPr sz="1100" b="0">
-                <a:solidFill>
-                  <a:srgbClr val="1E3A5F"/>
-                </a:solidFill>
-                <a:latin typeface="Calibri"/>
-              </a:rPr>
-              <a:t>Geração e envio do PDF para a pasta de rede ao salvar</a:t>
-            </a:r>
-          </a:p>
-        </p:txBody>
-      </p:sp>
-      <p:sp>
-        <p:nvSpPr>
-          <p:cNvPr id="10" name="Rectangle 9"/>
-          <p:cNvSpPr/>
-          <p:nvPr/>
-        </p:nvSpPr>
-        <p:spPr>
-          <a:xfrm>
-            <a:off x="8229600" y="1280160"/>
-            <a:ext cx="3749039" cy="2194560"/>
-          </a:xfrm>
-          <a:prstGeom prst="rect">
-            <a:avLst/>
-          </a:prstGeom>
-          <a:solidFill>
-            <a:srgbClr val="D6E4F0"/>
-          </a:solidFill>
-          <a:ln w="12700">
-            <a:solidFill>
-              <a:srgbClr val="2E6DA4"/>
-            </a:solidFill>
-          </a:ln>
-        </p:spPr>
-        <p:style>
-          <a:lnRef idx="1">
-            <a:schemeClr val="accent1"/>
-          </a:lnRef>
-          <a:fillRef idx="3">
-            <a:schemeClr val="accent1"/>
-          </a:fillRef>
-          <a:effectRef idx="2">
-            <a:schemeClr val="accent1"/>
-          </a:effectRef>
-          <a:fontRef idx="minor">
-            <a:schemeClr val="lt1"/>
-          </a:fontRef>
-        </p:style>
-        <p:txBody>
-          <a:bodyPr rtlCol="0" anchor="ctr"/>
-          <a:lstStyle/>
-          <a:p>
-            <a:pPr algn="ctr"/>
-          </a:p>
-        </p:txBody>
-      </p:sp>
-      <p:sp>
-        <p:nvSpPr>
-          <p:cNvPr id="11" name="TextBox 10"/>
-          <p:cNvSpPr txBox="1"/>
-          <p:nvPr/>
-        </p:nvSpPr>
-        <p:spPr>
-          <a:xfrm>
-            <a:off x="8366760" y="1389888"/>
-            <a:ext cx="3474720" cy="502920"/>
-          </a:xfrm>
-          <a:prstGeom prst="rect">
-            <a:avLst/>
-          </a:prstGeom>
-          <a:noFill/>
-        </p:spPr>
-        <p:txBody>
-          <a:bodyPr wrap="square">
-            <a:spAutoFit/>
-          </a:bodyPr>
-          <a:lstStyle/>
-          <a:p>
-            <a:pPr algn="l"/>
-            <a:r>
-              <a:rPr sz="1400" b="1">
-                <a:solidFill>
-                  <a:srgbClr val="1E3A5F"/>
-                </a:solidFill>
-                <a:latin typeface="Calibri"/>
-              </a:rPr>
-              <a:t>🔔  Notificações</a:t>
-            </a:r>
-          </a:p>
-        </p:txBody>
-      </p:sp>
-      <p:sp>
-        <p:nvSpPr>
-          <p:cNvPr id="12" name="TextBox 11"/>
-          <p:cNvSpPr txBox="1"/>
-          <p:nvPr/>
-        </p:nvSpPr>
-        <p:spPr>
-          <a:xfrm>
-            <a:off x="8366760" y="1938528"/>
-            <a:ext cx="3474720" cy="1417320"/>
-          </a:xfrm>
-          <a:prstGeom prst="rect">
-            <a:avLst/>
-          </a:prstGeom>
-          <a:noFill/>
-        </p:spPr>
-        <p:txBody>
-          <a:bodyPr wrap="square">
-            <a:spAutoFit/>
-          </a:bodyPr>
-          <a:lstStyle/>
-          <a:p>
-            <a:pPr algn="l"/>
-            <a:r>
-              <a:rPr sz="1100" b="0">
-                <a:solidFill>
-                  <a:srgbClr val="1E3A5F"/>
-                </a:solidFill>
-                <a:latin typeface="Calibri"/>
-              </a:rPr>
-              <a:t>Alertas em tempo real via SSE com toasts e painel lateral</a:t>
-            </a:r>
-          </a:p>
-        </p:txBody>
-      </p:sp>
-      <p:sp>
-        <p:nvSpPr>
-          <p:cNvPr id="13" name="Rectangle 12"/>
-          <p:cNvSpPr/>
-          <p:nvPr/>
-        </p:nvSpPr>
-        <p:spPr>
-          <a:xfrm>
-            <a:off x="365760" y="3749039"/>
-            <a:ext cx="3749039" cy="2194560"/>
-          </a:xfrm>
-          <a:prstGeom prst="rect">
-            <a:avLst/>
-          </a:prstGeom>
-          <a:solidFill>
-            <a:srgbClr val="D6E4F0"/>
-          </a:solidFill>
-          <a:ln w="12700">
-            <a:solidFill>
-              <a:srgbClr val="2E6DA4"/>
-            </a:solidFill>
-          </a:ln>
-        </p:spPr>
-        <p:style>
-          <a:lnRef idx="1">
-            <a:schemeClr val="accent1"/>
-          </a:lnRef>
-          <a:fillRef idx="3">
-            <a:schemeClr val="accent1"/>
-          </a:fillRef>
-          <a:effectRef idx="2">
-            <a:schemeClr val="accent1"/>
-          </a:effectRef>
-          <a:fontRef idx="minor">
-            <a:schemeClr val="lt1"/>
-          </a:fontRef>
-        </p:style>
-        <p:txBody>
-          <a:bodyPr rtlCol="0" anchor="ctr"/>
-          <a:lstStyle/>
-          <a:p>
-            <a:pPr algn="ctr"/>
-          </a:p>
-        </p:txBody>
-      </p:sp>
-      <p:sp>
-        <p:nvSpPr>
-          <p:cNvPr id="14" name="TextBox 13"/>
-          <p:cNvSpPr txBox="1"/>
-          <p:nvPr/>
-        </p:nvSpPr>
-        <p:spPr>
-          <a:xfrm>
-            <a:off x="502920" y="3858767"/>
-            <a:ext cx="3474720" cy="502920"/>
-          </a:xfrm>
-          <a:prstGeom prst="rect">
-            <a:avLst/>
-          </a:prstGeom>
-          <a:noFill/>
-        </p:spPr>
-        <p:txBody>
-          <a:bodyPr wrap="square">
-            <a:spAutoFit/>
-          </a:bodyPr>
-          <a:lstStyle/>
-          <a:p>
-            <a:pPr algn="l"/>
-            <a:r>
-              <a:rPr sz="1400" b="1">
-                <a:solidFill>
-                  <a:srgbClr val="1E3A5F"/>
-                </a:solidFill>
-                <a:latin typeface="Calibri"/>
-              </a:rPr>
-              <a:t>🖊️  Editor de Desenho</a:t>
-            </a:r>
-          </a:p>
-        </p:txBody>
-      </p:sp>
-      <p:sp>
-        <p:nvSpPr>
-          <p:cNvPr id="15" name="TextBox 14"/>
-          <p:cNvSpPr txBox="1"/>
-          <p:nvPr/>
-        </p:nvSpPr>
-        <p:spPr>
-          <a:xfrm>
-            <a:off x="502920" y="4407407"/>
-            <a:ext cx="3474720" cy="1417320"/>
-          </a:xfrm>
-          <a:prstGeom prst="rect">
-            <a:avLst/>
-          </a:prstGeom>
-          <a:noFill/>
-        </p:spPr>
-        <p:txBody>
-          <a:bodyPr wrap="square">
-            <a:spAutoFit/>
-          </a:bodyPr>
-          <a:lstStyle/>
-          <a:p>
-            <a:pPr algn="l"/>
-            <a:r>
-              <a:rPr sz="1100" b="0">
-                <a:solidFill>
-                  <a:srgbClr val="1E3A5F"/>
-                </a:solidFill>
-                <a:latin typeface="Calibri"/>
-              </a:rPr>
-              <a:t>Croquis e cotas MM integrados à requisição</a:t>
-            </a:r>
-          </a:p>
-        </p:txBody>
-      </p:sp>
-      <p:sp>
-        <p:nvSpPr>
-          <p:cNvPr id="16" name="Rectangle 15"/>
-          <p:cNvSpPr/>
-          <p:nvPr/>
-        </p:nvSpPr>
-        <p:spPr>
-          <a:xfrm>
-            <a:off x="4297680" y="3749039"/>
-            <a:ext cx="3749039" cy="2194560"/>
-          </a:xfrm>
-          <a:prstGeom prst="rect">
-            <a:avLst/>
-          </a:prstGeom>
-          <a:solidFill>
-            <a:srgbClr val="D6E4F0"/>
-          </a:solidFill>
-          <a:ln w="12700">
-            <a:solidFill>
-              <a:srgbClr val="2E6DA4"/>
-            </a:solidFill>
-          </a:ln>
-        </p:spPr>
-        <p:style>
-          <a:lnRef idx="1">
-            <a:schemeClr val="accent1"/>
-          </a:lnRef>
-          <a:fillRef idx="3">
-            <a:schemeClr val="accent1"/>
-          </a:fillRef>
-          <a:effectRef idx="2">
-            <a:schemeClr val="accent1"/>
-          </a:effectRef>
-          <a:fontRef idx="minor">
-            <a:schemeClr val="lt1"/>
-          </a:fontRef>
-        </p:style>
-        <p:txBody>
-          <a:bodyPr rtlCol="0" anchor="ctr"/>
-          <a:lstStyle/>
-          <a:p>
-            <a:pPr algn="ctr"/>
-          </a:p>
-        </p:txBody>
-      </p:sp>
-      <p:sp>
-        <p:nvSpPr>
-          <p:cNvPr id="17" name="TextBox 16"/>
-          <p:cNvSpPr txBox="1"/>
-          <p:nvPr/>
-        </p:nvSpPr>
-        <p:spPr>
-          <a:xfrm>
-            <a:off x="4434840" y="3858767"/>
-            <a:ext cx="3474720" cy="502920"/>
-          </a:xfrm>
-          <a:prstGeom prst="rect">
-            <a:avLst/>
-          </a:prstGeom>
-          <a:noFill/>
-        </p:spPr>
-        <p:txBody>
-          <a:bodyPr wrap="square">
-            <a:spAutoFit/>
-          </a:bodyPr>
-          <a:lstStyle/>
-          <a:p>
-            <a:pPr algn="l"/>
-            <a:r>
-              <a:rPr sz="1400" b="1">
-                <a:solidFill>
-                  <a:srgbClr val="1E3A5F"/>
-                </a:solidFill>
-                <a:latin typeface="Calibri"/>
-              </a:rPr>
-              <a:t>📊  Dashboard</a:t>
-            </a:r>
-          </a:p>
-        </p:txBody>
-      </p:sp>
-      <p:sp>
-        <p:nvSpPr>
-          <p:cNvPr id="18" name="TextBox 17"/>
-          <p:cNvSpPr txBox="1"/>
-          <p:nvPr/>
-        </p:nvSpPr>
-        <p:spPr>
-          <a:xfrm>
-            <a:off x="4434840" y="4407407"/>
-            <a:ext cx="3474720" cy="1417320"/>
-          </a:xfrm>
-          <a:prstGeom prst="rect">
-            <a:avLst/>
-          </a:prstGeom>
-          <a:noFill/>
-        </p:spPr>
-        <p:txBody>
-          <a:bodyPr wrap="square">
-            <a:spAutoFit/>
-          </a:bodyPr>
-          <a:lstStyle/>
-          <a:p>
-            <a:pPr algn="l"/>
-            <a:r>
-              <a:rPr sz="1100" b="0">
-                <a:solidFill>
-                  <a:srgbClr val="1E3A5F"/>
-                </a:solidFill>
-                <a:latin typeface="Calibri"/>
-              </a:rPr>
-              <a:t>KPIs, gráficos e relatórios para gerentes e admins</a:t>
-            </a:r>
-          </a:p>
-        </p:txBody>
-      </p:sp>
-      <p:sp>
-        <p:nvSpPr>
-          <p:cNvPr id="19" name="Rectangle 18"/>
-          <p:cNvSpPr/>
-          <p:nvPr/>
-        </p:nvSpPr>
-        <p:spPr>
-          <a:xfrm>
-            <a:off x="8229600" y="3749039"/>
-            <a:ext cx="3749039" cy="2194560"/>
-          </a:xfrm>
-          <a:prstGeom prst="rect">
-            <a:avLst/>
-          </a:prstGeom>
-          <a:solidFill>
-            <a:srgbClr val="D6E4F0"/>
-          </a:solidFill>
-          <a:ln w="12700">
-            <a:solidFill>
-              <a:srgbClr val="2E6DA4"/>
-            </a:solidFill>
-          </a:ln>
-        </p:spPr>
-        <p:style>
-          <a:lnRef idx="1">
-            <a:schemeClr val="accent1"/>
-          </a:lnRef>
-          <a:fillRef idx="3">
-            <a:schemeClr val="accent1"/>
-          </a:fillRef>
-          <a:effectRef idx="2">
-            <a:schemeClr val="accent1"/>
-          </a:effectRef>
-          <a:fontRef idx="minor">
-            <a:schemeClr val="lt1"/>
-          </a:fontRef>
-        </p:style>
-        <p:txBody>
-          <a:bodyPr rtlCol="0" anchor="ctr"/>
-          <a:lstStyle/>
-          <a:p>
-            <a:pPr algn="ctr"/>
-          </a:p>
-        </p:txBody>
-      </p:sp>
-      <p:sp>
-        <p:nvSpPr>
-          <p:cNvPr id="20" name="TextBox 19"/>
-          <p:cNvSpPr txBox="1"/>
-          <p:nvPr/>
-        </p:nvSpPr>
-        <p:spPr>
-          <a:xfrm>
-            <a:off x="8366760" y="3858767"/>
-            <a:ext cx="3474720" cy="502920"/>
-          </a:xfrm>
-          <a:prstGeom prst="rect">
-            <a:avLst/>
-          </a:prstGeom>
-          <a:noFill/>
-        </p:spPr>
-        <p:txBody>
-          <a:bodyPr wrap="square">
-            <a:spAutoFit/>
-          </a:bodyPr>
-          <a:lstStyle/>
-          <a:p>
-            <a:pPr algn="l"/>
-            <a:r>
-              <a:rPr sz="1400" b="1">
-                <a:solidFill>
-                  <a:srgbClr val="1E3A5F"/>
-                </a:solidFill>
-                <a:latin typeface="Calibri"/>
-              </a:rPr>
-              <a:t>🔄  Auto-Update</a:t>
-            </a:r>
-          </a:p>
-        </p:txBody>
-      </p:sp>
-      <p:sp>
-        <p:nvSpPr>
-          <p:cNvPr id="21" name="TextBox 20"/>
-          <p:cNvSpPr txBox="1"/>
-          <p:nvPr/>
-        </p:nvSpPr>
-        <p:spPr>
-          <a:xfrm>
-            <a:off x="8366760" y="4407407"/>
-            <a:ext cx="3474720" cy="1417320"/>
-          </a:xfrm>
-          <a:prstGeom prst="rect">
-            <a:avLst/>
-          </a:prstGeom>
-          <a:noFill/>
-        </p:spPr>
-        <p:txBody>
-          <a:bodyPr wrap="square">
-            <a:spAutoFit/>
-          </a:bodyPr>
-          <a:lstStyle/>
-          <a:p>
-            <a:pPr algn="l"/>
-            <a:r>
-              <a:rPr sz="1100" b="0">
-                <a:solidFill>
-                  <a:srgbClr val="1E3A5F"/>
-                </a:solidFill>
-                <a:latin typeface="Calibri"/>
-              </a:rPr>
-              <a:t>Atualização automática sem intervenção de TI</a:t>
+            <a:pPr>
+              <a:spcAft>
+                <a:spcPts val="1400"/>
+              </a:spcAft>
+              <a:defRPr sz="1600">
+                <a:solidFill>
+                  <a:srgbClr val="222222"/>
+                </a:solidFill>
+                <a:latin typeface="Calibri"/>
+              </a:defRPr>
+            </a:pPr>
+            <a:r>
+              <a:t>🏠  Tela de login com imagem de fundo personalizável</a:t>
+            </a:r>
+          </a:p>
+          <a:p>
+            <a:pPr>
+              <a:spcAft>
+                <a:spcPts val="1400"/>
+              </a:spcAft>
+              <a:defRPr sz="1600">
+                <a:solidFill>
+                  <a:srgbClr val="222222"/>
+                </a:solidFill>
+                <a:latin typeface="Calibri"/>
+              </a:defRPr>
+            </a:pPr>
+            <a:r>
+              <a:t>🗂️  Barra lateral com acesso rápido a todas as telas do seu perfil</a:t>
+            </a:r>
+          </a:p>
+          <a:p>
+            <a:pPr>
+              <a:spcAft>
+                <a:spcPts val="1400"/>
+              </a:spcAft>
+              <a:defRPr sz="1600">
+                <a:solidFill>
+                  <a:srgbClr val="222222"/>
+                </a:solidFill>
+                <a:latin typeface="Calibri"/>
+              </a:defRPr>
+            </a:pPr>
+            <a:r>
+              <a:t>🌙  Tema claro e escuro, alternável a qualquer momento</a:t>
+            </a:r>
+          </a:p>
+          <a:p>
+            <a:pPr>
+              <a:spcAft>
+                <a:spcPts val="1400"/>
+              </a:spcAft>
+              <a:defRPr sz="1600">
+                <a:solidFill>
+                  <a:srgbClr val="222222"/>
+                </a:solidFill>
+                <a:latin typeface="Calibri"/>
+              </a:defRPr>
+            </a:pPr>
+            <a:r>
+              <a:t>🔤  Tamanho de fonte configurável individualmente</a:t>
+            </a:r>
+          </a:p>
+          <a:p>
+            <a:pPr>
+              <a:spcAft>
+                <a:spcPts val="1400"/>
+              </a:spcAft>
+              <a:defRPr sz="1600">
+                <a:solidFill>
+                  <a:srgbClr val="222222"/>
+                </a:solidFill>
+                <a:latin typeface="Calibri"/>
+              </a:defRPr>
+            </a:pPr>
+            <a:r>
+              <a:t>🎓  Guia Rápido interativo para novos usuários (e revisão quando quiser)</a:t>
+            </a:r>
+          </a:p>
+          <a:p>
+            <a:pPr>
+              <a:spcAft>
+                <a:spcPts val="1400"/>
+              </a:spcAft>
+              <a:defRPr sz="1600">
+                <a:solidFill>
+                  <a:srgbClr val="222222"/>
+                </a:solidFill>
+                <a:latin typeface="Calibri"/>
+              </a:defRPr>
+            </a:pPr>
+            <a:r>
+              <a:t>📐  Interface adaptável a qualquer resolução — de projetores a telas 4K</a:t>
             </a:r>
           </a:p>
         </p:txBody>
@@ -7569,8 +6014,8 @@
         </p:nvSpPr>
         <p:spPr>
           <a:xfrm>
-            <a:off x="457200" y="1188720"/>
-            <a:ext cx="6217920" cy="5029200"/>
+            <a:off x="548640" y="1280160"/>
+            <a:ext cx="7132320" cy="5029200"/>
           </a:xfrm>
           <a:prstGeom prst="rect">
             <a:avLst/>
@@ -7585,81 +6030,81 @@
           <a:p>
             <a:pPr>
               <a:spcAft>
-                <a:spcPts val="800"/>
+                <a:spcPts val="1400"/>
               </a:spcAft>
-              <a:defRPr sz="1300">
-                <a:solidFill>
-                  <a:srgbClr val="1E3A5F"/>
+              <a:defRPr sz="1600">
+                <a:solidFill>
+                  <a:srgbClr val="222222"/>
                 </a:solidFill>
                 <a:latin typeface="Calibri"/>
               </a:defRPr>
             </a:pPr>
             <a:r>
-              <a:t>• Busca inteligente de clientes (112 mil+ registros)</a:t>
+              <a:t>📋  Visualização de todas as requisições em tempo real</a:t>
             </a:r>
           </a:p>
           <a:p>
             <a:pPr>
               <a:spcAft>
-                <a:spcPts val="800"/>
+                <a:spcPts val="1400"/>
               </a:spcAft>
-              <a:defRPr sz="1300">
-                <a:solidFill>
-                  <a:srgbClr val="1E3A5F"/>
+              <a:defRPr sz="1600">
+                <a:solidFill>
+                  <a:srgbClr val="222222"/>
                 </a:solidFill>
                 <a:latin typeface="Calibri"/>
               </a:defRPr>
             </a:pPr>
             <a:r>
-              <a:t>• Status em tempo real: Em andamento → Em produção → Faturado</a:t>
+              <a:t>🔍  Busca por cliente, CNPJ, número do pedido ou vendedor</a:t>
             </a:r>
           </a:p>
           <a:p>
             <a:pPr>
               <a:spcAft>
-                <a:spcPts val="800"/>
+                <a:spcPts val="1400"/>
               </a:spcAft>
-              <a:defRPr sz="1300">
-                <a:solidFill>
-                  <a:srgbClr val="1E3A5F"/>
+              <a:defRPr sz="1600">
+                <a:solidFill>
+                  <a:srgbClr val="222222"/>
                 </a:solidFill>
                 <a:latin typeface="Calibri"/>
               </a:defRPr>
             </a:pPr>
             <a:r>
-              <a:t>• Busca por nome, CNPJ, código ou número do pedido</a:t>
+              <a:t>➕  Criação rápida com busca inteligente de clientes</a:t>
             </a:r>
           </a:p>
           <a:p>
             <a:pPr>
               <a:spcAft>
-                <a:spcPts val="800"/>
+                <a:spcPts val="1400"/>
               </a:spcAft>
-              <a:defRPr sz="1300">
-                <a:solidFill>
-                  <a:srgbClr val="1E3A5F"/>
+              <a:defRPr sz="1600">
+                <a:solidFill>
+                  <a:srgbClr val="222222"/>
                 </a:solidFill>
                 <a:latin typeface="Calibri"/>
               </a:defRPr>
             </a:pPr>
             <a:r>
-              <a:t>• Ordenação por qualquer coluna com um clique</a:t>
+              <a:t>📄  PDF gerado e enviado automaticamente para a pasta de rede</a:t>
             </a:r>
           </a:p>
           <a:p>
             <a:pPr>
               <a:spcAft>
-                <a:spcPts val="800"/>
+                <a:spcPts val="1400"/>
               </a:spcAft>
-              <a:defRPr sz="1300">
-                <a:solidFill>
-                  <a:srgbClr val="1E3A5F"/>
+              <a:defRPr sz="1600">
+                <a:solidFill>
+                  <a:srgbClr val="222222"/>
                 </a:solidFill>
                 <a:latin typeface="Calibri"/>
               </a:defRPr>
             </a:pPr>
             <a:r>
-              <a:t>• PDF gerado e enviado automaticamente para a pasta de rede</a:t>
+              <a:t>↕️  Ordenação por qualquer coluna com um clique</a:t>
             </a:r>
           </a:p>
         </p:txBody>
@@ -7672,8 +6117,8 @@
         </p:nvSpPr>
         <p:spPr>
           <a:xfrm>
-            <a:off x="7040880" y="1188720"/>
-            <a:ext cx="4663440" cy="502920"/>
+            <a:off x="8046720" y="1280160"/>
+            <a:ext cx="3657600" cy="502920"/>
           </a:xfrm>
           <a:prstGeom prst="rect">
             <a:avLst/>
@@ -7715,8 +6160,8 @@
         </p:nvSpPr>
         <p:spPr>
           <a:xfrm>
-            <a:off x="7040880" y="1188720"/>
-            <a:ext cx="4663440" cy="502920"/>
+            <a:off x="8046720" y="1280160"/>
+            <a:ext cx="3657600" cy="502920"/>
           </a:xfrm>
           <a:prstGeom prst="rect">
             <a:avLst/>
@@ -7737,7 +6182,7 @@
                 </a:solidFill>
                 <a:latin typeface="Calibri"/>
               </a:rPr>
-              <a:t>Status das Requisições</a:t>
+              <a:t>Status dos pedidos</a:t>
             </a:r>
           </a:p>
         </p:txBody>
@@ -7750,14 +6195,14 @@
         </p:nvSpPr>
         <p:spPr>
           <a:xfrm>
-            <a:off x="7040880" y="1691640"/>
-            <a:ext cx="4663440" cy="685800"/>
+            <a:off x="8046720" y="1783080"/>
+            <a:ext cx="3657600" cy="658368"/>
           </a:xfrm>
           <a:prstGeom prst="rect">
             <a:avLst/>
           </a:prstGeom>
           <a:solidFill>
-            <a:srgbClr val="F0F4F8"/>
+            <a:srgbClr val="D6E4F0"/>
           </a:solidFill>
           <a:ln>
             <a:noFill/>
@@ -7793,7 +6238,7 @@
         </p:nvSpPr>
         <p:spPr>
           <a:xfrm>
-            <a:off x="7178040" y="1874520"/>
+            <a:off x="8229600" y="1947672"/>
             <a:ext cx="320040" cy="320040"/>
           </a:xfrm>
           <a:prstGeom prst="rect">
@@ -7836,8 +6281,8 @@
         </p:nvSpPr>
         <p:spPr>
           <a:xfrm>
-            <a:off x="7589520" y="1783080"/>
-            <a:ext cx="3931920" cy="502920"/>
+            <a:off x="8641080" y="1874520"/>
+            <a:ext cx="2926080" cy="475488"/>
           </a:xfrm>
           <a:prstGeom prst="rect">
             <a:avLst/>
@@ -7854,11 +6299,11 @@
             <a:r>
               <a:rPr sz="1200" b="0">
                 <a:solidFill>
-                  <a:srgbClr val="1E3A5F"/>
+                  <a:srgbClr val="222222"/>
                 </a:solidFill>
                 <a:latin typeface="Calibri"/>
               </a:rPr>
-              <a:t>🔵 Em andamento</a:t>
+              <a:t>Em andamento</a:t>
             </a:r>
           </a:p>
         </p:txBody>
@@ -7871,8 +6316,8 @@
         </p:nvSpPr>
         <p:spPr>
           <a:xfrm>
-            <a:off x="7040880" y="2441448"/>
-            <a:ext cx="4663440" cy="685800"/>
+            <a:off x="8046720" y="2496312"/>
+            <a:ext cx="3657600" cy="658368"/>
           </a:xfrm>
           <a:prstGeom prst="rect">
             <a:avLst/>
@@ -7914,7 +6359,7 @@
         </p:nvSpPr>
         <p:spPr>
           <a:xfrm>
-            <a:off x="7178040" y="2624328"/>
+            <a:off x="8229600" y="2660904"/>
             <a:ext cx="320040" cy="320040"/>
           </a:xfrm>
           <a:prstGeom prst="rect">
@@ -7957,8 +6402,8 @@
         </p:nvSpPr>
         <p:spPr>
           <a:xfrm>
-            <a:off x="7589520" y="2532888"/>
-            <a:ext cx="3931920" cy="502920"/>
+            <a:off x="8641080" y="2587752"/>
+            <a:ext cx="2926080" cy="475488"/>
           </a:xfrm>
           <a:prstGeom prst="rect">
             <a:avLst/>
@@ -7975,11 +6420,11 @@
             <a:r>
               <a:rPr sz="1200" b="0">
                 <a:solidFill>
-                  <a:srgbClr val="1E3A5F"/>
+                  <a:srgbClr val="222222"/>
                 </a:solidFill>
                 <a:latin typeface="Calibri"/>
               </a:rPr>
-              <a:t>🟡 Aguardando recebimento</a:t>
+              <a:t>Aguardando recebimento</a:t>
             </a:r>
           </a:p>
         </p:txBody>
@@ -7992,14 +6437,14 @@
         </p:nvSpPr>
         <p:spPr>
           <a:xfrm>
-            <a:off x="7040880" y="3191256"/>
-            <a:ext cx="4663440" cy="685800"/>
+            <a:off x="8046720" y="3209544"/>
+            <a:ext cx="3657600" cy="658368"/>
           </a:xfrm>
           <a:prstGeom prst="rect">
             <a:avLst/>
           </a:prstGeom>
           <a:solidFill>
-            <a:srgbClr val="F0F4F8"/>
+            <a:srgbClr val="D6E4F0"/>
           </a:solidFill>
           <a:ln>
             <a:noFill/>
@@ -8035,7 +6480,7 @@
         </p:nvSpPr>
         <p:spPr>
           <a:xfrm>
-            <a:off x="7178040" y="3374136"/>
+            <a:off x="8229600" y="3374136"/>
             <a:ext cx="320040" cy="320040"/>
           </a:xfrm>
           <a:prstGeom prst="rect">
@@ -8078,8 +6523,8 @@
         </p:nvSpPr>
         <p:spPr>
           <a:xfrm>
-            <a:off x="7589520" y="3282696"/>
-            <a:ext cx="3931920" cy="502920"/>
+            <a:off x="8641080" y="3300984"/>
+            <a:ext cx="2926080" cy="475488"/>
           </a:xfrm>
           <a:prstGeom prst="rect">
             <a:avLst/>
@@ -8096,11 +6541,11 @@
             <a:r>
               <a:rPr sz="1200" b="0">
                 <a:solidFill>
-                  <a:srgbClr val="1E3A5F"/>
+                  <a:srgbClr val="222222"/>
                 </a:solidFill>
                 <a:latin typeface="Calibri"/>
               </a:rPr>
-              <a:t>🟠 Em produção</a:t>
+              <a:t>Em produção</a:t>
             </a:r>
           </a:p>
         </p:txBody>
@@ -8113,8 +6558,8 @@
         </p:nvSpPr>
         <p:spPr>
           <a:xfrm>
-            <a:off x="7040880" y="3941064"/>
-            <a:ext cx="4663440" cy="685800"/>
+            <a:off x="8046720" y="3922776"/>
+            <a:ext cx="3657600" cy="658368"/>
           </a:xfrm>
           <a:prstGeom prst="rect">
             <a:avLst/>
@@ -8156,7 +6601,7 @@
         </p:nvSpPr>
         <p:spPr>
           <a:xfrm>
-            <a:off x="7178040" y="4123944"/>
+            <a:off x="8229600" y="4087368"/>
             <a:ext cx="320040" cy="320040"/>
           </a:xfrm>
           <a:prstGeom prst="rect">
@@ -8199,8 +6644,8 @@
         </p:nvSpPr>
         <p:spPr>
           <a:xfrm>
-            <a:off x="7589520" y="4032504"/>
-            <a:ext cx="3931920" cy="502920"/>
+            <a:off x="8641080" y="4014216"/>
+            <a:ext cx="2926080" cy="475488"/>
           </a:xfrm>
           <a:prstGeom prst="rect">
             <a:avLst/>
@@ -8217,11 +6662,11 @@
             <a:r>
               <a:rPr sz="1200" b="0">
                 <a:solidFill>
-                  <a:srgbClr val="1E3A5F"/>
+                  <a:srgbClr val="222222"/>
                 </a:solidFill>
                 <a:latin typeface="Calibri"/>
               </a:rPr>
-              <a:t>🟢 Faturado</a:t>
+              <a:t>Faturado</a:t>
             </a:r>
           </a:p>
         </p:txBody>
@@ -8234,14 +6679,14 @@
         </p:nvSpPr>
         <p:spPr>
           <a:xfrm>
-            <a:off x="7040880" y="4690872"/>
-            <a:ext cx="4663440" cy="685800"/>
+            <a:off x="8046720" y="4636008"/>
+            <a:ext cx="3657600" cy="658368"/>
           </a:xfrm>
           <a:prstGeom prst="rect">
             <a:avLst/>
           </a:prstGeom>
           <a:solidFill>
-            <a:srgbClr val="F0F4F8"/>
+            <a:srgbClr val="D6E4F0"/>
           </a:solidFill>
           <a:ln>
             <a:noFill/>
@@ -8277,7 +6722,7 @@
         </p:nvSpPr>
         <p:spPr>
           <a:xfrm>
-            <a:off x="7178040" y="4873752"/>
+            <a:off x="8229600" y="4800600"/>
             <a:ext cx="320040" cy="320040"/>
           </a:xfrm>
           <a:prstGeom prst="rect">
@@ -8320,8 +6765,8 @@
         </p:nvSpPr>
         <p:spPr>
           <a:xfrm>
-            <a:off x="7589520" y="4782312"/>
-            <a:ext cx="3931920" cy="502920"/>
+            <a:off x="8641080" y="4727448"/>
+            <a:ext cx="2926080" cy="475488"/>
           </a:xfrm>
           <a:prstGeom prst="rect">
             <a:avLst/>
@@ -8338,11 +6783,11 @@
             <a:r>
               <a:rPr sz="1200" b="0">
                 <a:solidFill>
-                  <a:srgbClr val="1E3A5F"/>
+                  <a:srgbClr val="222222"/>
                 </a:solidFill>
                 <a:latin typeface="Calibri"/>
               </a:rPr>
-              <a:t>🔴 Cancelada</a:t>
+              <a:t>Cancelada</a:t>
             </a:r>
           </a:p>
         </p:txBody>
@@ -8403,7 +6848,7 @@
                 </a:solidFill>
                 <a:latin typeface="Calibri"/>
               </a:rPr>
-              <a:t>Editor de Desenho Integrado</a:t>
+              <a:t>Criando uma Requisição</a:t>
             </a:r>
           </a:p>
         </p:txBody>
@@ -8453,25 +6898,23 @@
       </p:sp>
       <p:sp>
         <p:nvSpPr>
-          <p:cNvPr id="4" name="Rectangle 3"/>
+          <p:cNvPr id="4" name="Oval 3"/>
           <p:cNvSpPr/>
           <p:nvPr/>
         </p:nvSpPr>
         <p:spPr>
           <a:xfrm>
-            <a:off x="365760" y="1280160"/>
-            <a:ext cx="5577840" cy="1600200"/>
-          </a:xfrm>
-          <a:prstGeom prst="rect">
+            <a:off x="457200" y="1371600"/>
+            <a:ext cx="594360" cy="594360"/>
+          </a:xfrm>
+          <a:prstGeom prst="ellipse">
             <a:avLst/>
           </a:prstGeom>
           <a:solidFill>
-            <a:srgbClr val="D6E4F0"/>
+            <a:srgbClr val="1E3A5F"/>
           </a:solidFill>
-          <a:ln w="12700">
-            <a:solidFill>
-              <a:srgbClr val="2E6DA4"/>
-            </a:solidFill>
+          <a:ln>
+            <a:noFill/>
           </a:ln>
         </p:spPr>
         <p:style>
@@ -8504,8 +6947,8 @@
         </p:nvSpPr>
         <p:spPr>
           <a:xfrm>
-            <a:off x="502920" y="1371600"/>
-            <a:ext cx="5303520" cy="457200"/>
+            <a:off x="457200" y="1371600"/>
+            <a:ext cx="594360" cy="594360"/>
           </a:xfrm>
           <a:prstGeom prst="rect">
             <a:avLst/>
@@ -8518,15 +6961,15 @@
           </a:bodyPr>
           <a:lstStyle/>
           <a:p>
-            <a:pPr algn="l"/>
-            <a:r>
-              <a:rPr sz="1300" b="1">
-                <a:solidFill>
-                  <a:srgbClr val="1E3A5F"/>
+            <a:pPr algn="ctr"/>
+            <a:r>
+              <a:rPr sz="1500" b="1">
+                <a:solidFill>
+                  <a:srgbClr val="FFFFFF"/>
                 </a:solidFill>
                 <a:latin typeface="Calibri"/>
               </a:rPr>
-              <a:t>🖊️  Croquis integrados</a:t>
+              <a:t>1</a:t>
             </a:r>
           </a:p>
         </p:txBody>
@@ -8539,8 +6982,8 @@
         </p:nvSpPr>
         <p:spPr>
           <a:xfrm>
-            <a:off x="502920" y="1874520"/>
-            <a:ext cx="5303520" cy="868680"/>
+            <a:off x="1234440" y="1325880"/>
+            <a:ext cx="10515600" cy="777240"/>
           </a:xfrm>
           <a:prstGeom prst="rect">
             <a:avLst/>
@@ -8555,38 +6998,36 @@
           <a:p>
             <a:pPr algn="l"/>
             <a:r>
-              <a:rPr sz="1100" b="0">
-                <a:solidFill>
-                  <a:srgbClr val="1E3A5F"/>
+              <a:rPr sz="1500" b="0">
+                <a:solidFill>
+                  <a:srgbClr val="222222"/>
                 </a:solidFill>
                 <a:latin typeface="Calibri"/>
               </a:rPr>
-              <a:t>Desenhos e medidas diretamente na requisição</a:t>
-            </a:r>
-          </a:p>
-        </p:txBody>
-      </p:sp>
-      <p:sp>
-        <p:nvSpPr>
-          <p:cNvPr id="7" name="Rectangle 6"/>
+              <a:t>Clique em  + Nova Requisição  na Central de Pedidos</a:t>
+            </a:r>
+          </a:p>
+        </p:txBody>
+      </p:sp>
+      <p:sp>
+        <p:nvSpPr>
+          <p:cNvPr id="7" name="Oval 6"/>
           <p:cNvSpPr/>
           <p:nvPr/>
         </p:nvSpPr>
         <p:spPr>
           <a:xfrm>
-            <a:off x="6263640" y="1280160"/>
-            <a:ext cx="5577840" cy="1600200"/>
-          </a:xfrm>
-          <a:prstGeom prst="rect">
+            <a:off x="457200" y="2258568"/>
+            <a:ext cx="594360" cy="594360"/>
+          </a:xfrm>
+          <a:prstGeom prst="ellipse">
             <a:avLst/>
           </a:prstGeom>
           <a:solidFill>
-            <a:srgbClr val="D6E4F0"/>
+            <a:srgbClr val="1E3A5F"/>
           </a:solidFill>
-          <a:ln w="12700">
-            <a:solidFill>
-              <a:srgbClr val="2E6DA4"/>
-            </a:solidFill>
+          <a:ln>
+            <a:noFill/>
           </a:ln>
         </p:spPr>
         <p:style>
@@ -8619,8 +7060,8 @@
         </p:nvSpPr>
         <p:spPr>
           <a:xfrm>
-            <a:off x="6400800" y="1371600"/>
-            <a:ext cx="5303520" cy="457200"/>
+            <a:off x="457200" y="2258568"/>
+            <a:ext cx="594360" cy="594360"/>
           </a:xfrm>
           <a:prstGeom prst="rect">
             <a:avLst/>
@@ -8633,15 +7074,15 @@
           </a:bodyPr>
           <a:lstStyle/>
           <a:p>
-            <a:pPr algn="l"/>
-            <a:r>
-              <a:rPr sz="1300" b="1">
-                <a:solidFill>
-                  <a:srgbClr val="1E3A5F"/>
+            <a:pPr algn="ctr"/>
+            <a:r>
+              <a:rPr sz="1500" b="1">
+                <a:solidFill>
+                  <a:srgbClr val="FFFFFF"/>
                 </a:solidFill>
                 <a:latin typeface="Calibri"/>
               </a:rPr>
-              <a:t>📐  9 Ferramentas</a:t>
+              <a:t>2</a:t>
             </a:r>
           </a:p>
         </p:txBody>
@@ -8654,8 +7095,8 @@
         </p:nvSpPr>
         <p:spPr>
           <a:xfrm>
-            <a:off x="6400800" y="1874520"/>
-            <a:ext cx="5303520" cy="868680"/>
+            <a:off x="1234440" y="2212848"/>
+            <a:ext cx="10515600" cy="777240"/>
           </a:xfrm>
           <a:prstGeom prst="rect">
             <a:avLst/>
@@ -8670,38 +7111,36 @@
           <a:p>
             <a:pPr algn="l"/>
             <a:r>
-              <a:rPr sz="1100" b="0">
-                <a:solidFill>
-                  <a:srgbClr val="1E3A5F"/>
+              <a:rPr sz="1500" b="0">
+                <a:solidFill>
+                  <a:srgbClr val="222222"/>
                 </a:solidFill>
                 <a:latin typeface="Calibri"/>
               </a:rPr>
-              <a:t>Caneta, linha, seta, retângulo, triângulo, texto, cota MM, borracha e seleção</a:t>
-            </a:r>
-          </a:p>
-        </p:txBody>
-      </p:sp>
-      <p:sp>
-        <p:nvSpPr>
-          <p:cNvPr id="10" name="Rectangle 9"/>
+              <a:t>Busque o cliente por nome, código ou CNPJ</a:t>
+            </a:r>
+          </a:p>
+        </p:txBody>
+      </p:sp>
+      <p:sp>
+        <p:nvSpPr>
+          <p:cNvPr id="10" name="Oval 9"/>
           <p:cNvSpPr/>
           <p:nvPr/>
         </p:nvSpPr>
         <p:spPr>
           <a:xfrm>
-            <a:off x="365760" y="3063239"/>
-            <a:ext cx="5577840" cy="1600200"/>
-          </a:xfrm>
-          <a:prstGeom prst="rect">
+            <a:off x="457200" y="3145536"/>
+            <a:ext cx="594360" cy="594360"/>
+          </a:xfrm>
+          <a:prstGeom prst="ellipse">
             <a:avLst/>
           </a:prstGeom>
           <a:solidFill>
-            <a:srgbClr val="D6E4F0"/>
+            <a:srgbClr val="1E3A5F"/>
           </a:solidFill>
-          <a:ln w="12700">
-            <a:solidFill>
-              <a:srgbClr val="2E6DA4"/>
-            </a:solidFill>
+          <a:ln>
+            <a:noFill/>
           </a:ln>
         </p:spPr>
         <p:style>
@@ -8734,8 +7173,8 @@
         </p:nvSpPr>
         <p:spPr>
           <a:xfrm>
-            <a:off x="502920" y="3154679"/>
-            <a:ext cx="5303520" cy="457200"/>
+            <a:off x="457200" y="3145536"/>
+            <a:ext cx="594360" cy="594360"/>
           </a:xfrm>
           <a:prstGeom prst="rect">
             <a:avLst/>
@@ -8748,15 +7187,15 @@
           </a:bodyPr>
           <a:lstStyle/>
           <a:p>
-            <a:pPr algn="l"/>
-            <a:r>
-              <a:rPr sz="1300" b="1">
-                <a:solidFill>
-                  <a:srgbClr val="1E3A5F"/>
+            <a:pPr algn="ctr"/>
+            <a:r>
+              <a:rPr sz="1500" b="1">
+                <a:solidFill>
+                  <a:srgbClr val="FFFFFF"/>
                 </a:solidFill>
                 <a:latin typeface="Calibri"/>
               </a:rPr>
-              <a:t>🎯  Posicionamento inteligente</a:t>
+              <a:t>3</a:t>
             </a:r>
           </a:p>
         </p:txBody>
@@ -8769,8 +7208,8 @@
         </p:nvSpPr>
         <p:spPr>
           <a:xfrm>
-            <a:off x="502920" y="3657599"/>
-            <a:ext cx="5303520" cy="868680"/>
+            <a:off x="1234440" y="3099816"/>
+            <a:ext cx="10515600" cy="777240"/>
           </a:xfrm>
           <a:prstGeom prst="rect">
             <a:avLst/>
@@ -8785,38 +7224,36 @@
           <a:p>
             <a:pPr algn="l"/>
             <a:r>
-              <a:rPr sz="1100" b="0">
-                <a:solidFill>
-                  <a:srgbClr val="1E3A5F"/>
+              <a:rPr sz="1500" b="0">
+                <a:solidFill>
+                  <a:srgbClr val="222222"/>
                 </a:solidFill>
                 <a:latin typeface="Calibri"/>
               </a:rPr>
-              <a:t>Rótulos MM movem automaticamente para evitar sobreposição</a:t>
-            </a:r>
-          </a:p>
-        </p:txBody>
-      </p:sp>
-      <p:sp>
-        <p:nvSpPr>
-          <p:cNvPr id="13" name="Rectangle 12"/>
+              <a:t>Preencha o número do pedido e defina se é retirada ou entrega</a:t>
+            </a:r>
+          </a:p>
+        </p:txBody>
+      </p:sp>
+      <p:sp>
+        <p:nvSpPr>
+          <p:cNvPr id="13" name="Oval 12"/>
           <p:cNvSpPr/>
           <p:nvPr/>
         </p:nvSpPr>
         <p:spPr>
           <a:xfrm>
-            <a:off x="6263640" y="3063239"/>
-            <a:ext cx="5577840" cy="1600200"/>
-          </a:xfrm>
-          <a:prstGeom prst="rect">
+            <a:off x="457200" y="4032504"/>
+            <a:ext cx="594360" cy="594360"/>
+          </a:xfrm>
+          <a:prstGeom prst="ellipse">
             <a:avLst/>
           </a:prstGeom>
           <a:solidFill>
-            <a:srgbClr val="D6E4F0"/>
+            <a:srgbClr val="1E3A5F"/>
           </a:solidFill>
-          <a:ln w="12700">
-            <a:solidFill>
-              <a:srgbClr val="2E6DA4"/>
-            </a:solidFill>
+          <a:ln>
+            <a:noFill/>
           </a:ln>
         </p:spPr>
         <p:style>
@@ -8849,8 +7286,8 @@
         </p:nvSpPr>
         <p:spPr>
           <a:xfrm>
-            <a:off x="6400800" y="3154679"/>
-            <a:ext cx="5303520" cy="457200"/>
+            <a:off x="457200" y="4032504"/>
+            <a:ext cx="594360" cy="594360"/>
           </a:xfrm>
           <a:prstGeom prst="rect">
             <a:avLst/>
@@ -8863,15 +7300,15 @@
           </a:bodyPr>
           <a:lstStyle/>
           <a:p>
-            <a:pPr algn="l"/>
-            <a:r>
-              <a:rPr sz="1300" b="1">
-                <a:solidFill>
-                  <a:srgbClr val="1E3A5F"/>
+            <a:pPr algn="ctr"/>
+            <a:r>
+              <a:rPr sz="1500" b="1">
+                <a:solidFill>
+                  <a:srgbClr val="FFFFFF"/>
                 </a:solidFill>
                 <a:latin typeface="Calibri"/>
               </a:rPr>
-              <a:t>🔗  Snap de extremidades</a:t>
+              <a:t>4</a:t>
             </a:r>
           </a:p>
         </p:txBody>
@@ -8884,8 +7321,8 @@
         </p:nvSpPr>
         <p:spPr>
           <a:xfrm>
-            <a:off x="6400800" y="3657599"/>
-            <a:ext cx="5303520" cy="868680"/>
+            <a:off x="1234440" y="3986784"/>
+            <a:ext cx="10515600" cy="777240"/>
           </a:xfrm>
           <a:prstGeom prst="rect">
             <a:avLst/>
@@ -8900,38 +7337,36 @@
           <a:p>
             <a:pPr algn="l"/>
             <a:r>
-              <a:rPr sz="1100" b="0">
-                <a:solidFill>
-                  <a:srgbClr val="1E3A5F"/>
+              <a:rPr sz="1500" b="0">
+                <a:solidFill>
+                  <a:srgbClr val="222222"/>
                 </a:solidFill>
                 <a:latin typeface="Calibri"/>
               </a:rPr>
-              <a:t>Linhas se conectam precisamente a outros pontos</a:t>
-            </a:r>
-          </a:p>
-        </p:txBody>
-      </p:sp>
-      <p:sp>
-        <p:nvSpPr>
-          <p:cNvPr id="16" name="Rectangle 15"/>
+              <a:t>Adicione os itens: produto, quantidade e preço unitário</a:t>
+            </a:r>
+          </a:p>
+        </p:txBody>
+      </p:sp>
+      <p:sp>
+        <p:nvSpPr>
+          <p:cNvPr id="16" name="Oval 15"/>
           <p:cNvSpPr/>
           <p:nvPr/>
         </p:nvSpPr>
         <p:spPr>
           <a:xfrm>
-            <a:off x="365760" y="4846320"/>
-            <a:ext cx="5577840" cy="1600200"/>
-          </a:xfrm>
-          <a:prstGeom prst="rect">
+            <a:off x="457200" y="4919471"/>
+            <a:ext cx="594360" cy="594360"/>
+          </a:xfrm>
+          <a:prstGeom prst="ellipse">
             <a:avLst/>
           </a:prstGeom>
           <a:solidFill>
-            <a:srgbClr val="D6E4F0"/>
+            <a:srgbClr val="1E3A5F"/>
           </a:solidFill>
-          <a:ln w="12700">
-            <a:solidFill>
-              <a:srgbClr val="2E6DA4"/>
-            </a:solidFill>
+          <a:ln>
+            <a:noFill/>
           </a:ln>
         </p:spPr>
         <p:style>
@@ -8964,8 +7399,8 @@
         </p:nvSpPr>
         <p:spPr>
           <a:xfrm>
-            <a:off x="502920" y="4937760"/>
-            <a:ext cx="5303520" cy="457200"/>
+            <a:off x="457200" y="4919471"/>
+            <a:ext cx="594360" cy="594360"/>
           </a:xfrm>
           <a:prstGeom prst="rect">
             <a:avLst/>
@@ -8978,15 +7413,15 @@
           </a:bodyPr>
           <a:lstStyle/>
           <a:p>
-            <a:pPr algn="l"/>
-            <a:r>
-              <a:rPr sz="1300" b="1">
-                <a:solidFill>
-                  <a:srgbClr val="1E3A5F"/>
+            <a:pPr algn="ctr"/>
+            <a:r>
+              <a:rPr sz="1500" b="1">
+                <a:solidFill>
+                  <a:srgbClr val="FFFFFF"/>
                 </a:solidFill>
                 <a:latin typeface="Calibri"/>
               </a:rPr>
-              <a:t>📄  Exporta para PDF</a:t>
+              <a:t>5</a:t>
             </a:r>
           </a:p>
         </p:txBody>
@@ -8999,8 +7434,8 @@
         </p:nvSpPr>
         <p:spPr>
           <a:xfrm>
-            <a:off x="502920" y="5440680"/>
-            <a:ext cx="5303520" cy="868680"/>
+            <a:off x="1234440" y="4873751"/>
+            <a:ext cx="10515600" cy="777240"/>
           </a:xfrm>
           <a:prstGeom prst="rect">
             <a:avLst/>
@@ -9015,38 +7450,36 @@
           <a:p>
             <a:pPr algn="l"/>
             <a:r>
-              <a:rPr sz="1100" b="0">
-                <a:solidFill>
-                  <a:srgbClr val="1E3A5F"/>
+              <a:rPr sz="1500" b="0">
+                <a:solidFill>
+                  <a:srgbClr val="222222"/>
                 </a:solidFill>
                 <a:latin typeface="Calibri"/>
               </a:rPr>
-              <a:t>Todo o desenho aparece no PDF da requisição</a:t>
-            </a:r>
-          </a:p>
-        </p:txBody>
-      </p:sp>
-      <p:sp>
-        <p:nvSpPr>
-          <p:cNvPr id="19" name="Rectangle 18"/>
+              <a:t>Inclua observações ou um croqui no editor de desenho (opcional)</a:t>
+            </a:r>
+          </a:p>
+        </p:txBody>
+      </p:sp>
+      <p:sp>
+        <p:nvSpPr>
+          <p:cNvPr id="19" name="Oval 18"/>
           <p:cNvSpPr/>
           <p:nvPr/>
         </p:nvSpPr>
         <p:spPr>
           <a:xfrm>
-            <a:off x="6263640" y="4846320"/>
-            <a:ext cx="5577840" cy="1600200"/>
-          </a:xfrm>
-          <a:prstGeom prst="rect">
+            <a:off x="457200" y="5806440"/>
+            <a:ext cx="594360" cy="594360"/>
+          </a:xfrm>
+          <a:prstGeom prst="ellipse">
             <a:avLst/>
           </a:prstGeom>
           <a:solidFill>
-            <a:srgbClr val="D6E4F0"/>
+            <a:srgbClr val="1E3A5F"/>
           </a:solidFill>
-          <a:ln w="12700">
-            <a:solidFill>
-              <a:srgbClr val="2E6DA4"/>
-            </a:solidFill>
+          <a:ln>
+            <a:noFill/>
           </a:ln>
         </p:spPr>
         <p:style>
@@ -9079,8 +7512,8 @@
         </p:nvSpPr>
         <p:spPr>
           <a:xfrm>
-            <a:off x="6400800" y="4937760"/>
-            <a:ext cx="5303520" cy="457200"/>
+            <a:off x="457200" y="5806440"/>
+            <a:ext cx="594360" cy="594360"/>
           </a:xfrm>
           <a:prstGeom prst="rect">
             <a:avLst/>
@@ -9093,15 +7526,15 @@
           </a:bodyPr>
           <a:lstStyle/>
           <a:p>
-            <a:pPr algn="l"/>
-            <a:r>
-              <a:rPr sz="1300" b="1">
-                <a:solidFill>
-                  <a:srgbClr val="1E3A5F"/>
+            <a:pPr algn="ctr"/>
+            <a:r>
+              <a:rPr sz="1500" b="1">
+                <a:solidFill>
+                  <a:srgbClr val="FFFFFF"/>
                 </a:solidFill>
                 <a:latin typeface="Calibri"/>
               </a:rPr>
-              <a:t>⌨️  Atalhos de teclado</a:t>
+              <a:t>6</a:t>
             </a:r>
           </a:p>
         </p:txBody>
@@ -9114,8 +7547,8 @@
         </p:nvSpPr>
         <p:spPr>
           <a:xfrm>
-            <a:off x="6400800" y="5440680"/>
-            <a:ext cx="5303520" cy="868680"/>
+            <a:off x="1234440" y="5760720"/>
+            <a:ext cx="10515600" cy="777240"/>
           </a:xfrm>
           <a:prstGeom prst="rect">
             <a:avLst/>
@@ -9130,13 +7563,13 @@
           <a:p>
             <a:pPr algn="l"/>
             <a:r>
-              <a:rPr sz="1100" b="0">
-                <a:solidFill>
-                  <a:srgbClr val="1E3A5F"/>
+              <a:rPr sz="1500" b="0">
+                <a:solidFill>
+                  <a:srgbClr val="222222"/>
                 </a:solidFill>
                 <a:latin typeface="Calibri"/>
               </a:rPr>
-              <a:t>P, L, A, R, T, X, M, E, S — uma tecla por ferramenta</a:t>
+              <a:t>Salve — o PDF é gerado e enviado automaticamente para a rede</a:t>
             </a:r>
           </a:p>
         </p:txBody>
@@ -9197,7 +7630,7 @@
                 </a:solidFill>
                 <a:latin typeface="Calibri"/>
               </a:rPr>
-              <a:t>Infraestrutura e Confiabilidade</a:t>
+              <a:t>Editor de Desenho Integrado</a:t>
             </a:r>
           </a:p>
         </p:txBody>
@@ -9247,59 +7680,14 @@
       </p:sp>
       <p:sp>
         <p:nvSpPr>
-          <p:cNvPr id="4" name="Rectangle 3"/>
-          <p:cNvSpPr/>
-          <p:nvPr/>
-        </p:nvSpPr>
-        <p:spPr>
-          <a:xfrm>
-            <a:off x="365760" y="1188720"/>
-            <a:ext cx="5577840" cy="5212080"/>
-          </a:xfrm>
-          <a:prstGeom prst="rect">
-            <a:avLst/>
-          </a:prstGeom>
-          <a:solidFill>
-            <a:srgbClr val="D6E4F0"/>
-          </a:solidFill>
-          <a:ln w="12700">
-            <a:solidFill>
-              <a:srgbClr val="2E6DA4"/>
-            </a:solidFill>
-          </a:ln>
-        </p:spPr>
-        <p:style>
-          <a:lnRef idx="1">
-            <a:schemeClr val="accent1"/>
-          </a:lnRef>
-          <a:fillRef idx="3">
-            <a:schemeClr val="accent1"/>
-          </a:fillRef>
-          <a:effectRef idx="2">
-            <a:schemeClr val="accent1"/>
-          </a:effectRef>
-          <a:fontRef idx="minor">
-            <a:schemeClr val="lt1"/>
-          </a:fontRef>
-        </p:style>
-        <p:txBody>
-          <a:bodyPr rtlCol="0" anchor="ctr"/>
-          <a:lstStyle/>
-          <a:p>
-            <a:pPr algn="ctr"/>
-          </a:p>
-        </p:txBody>
-      </p:sp>
-      <p:sp>
-        <p:nvSpPr>
-          <p:cNvPr id="5" name="TextBox 4"/>
+          <p:cNvPr id="4" name="TextBox 3"/>
           <p:cNvSpPr txBox="1"/>
           <p:nvPr/>
         </p:nvSpPr>
         <p:spPr>
           <a:xfrm>
-            <a:off x="502920" y="1280160"/>
-            <a:ext cx="5303520" cy="502920"/>
+            <a:off x="548640" y="1280160"/>
+            <a:ext cx="11064240" cy="5029200"/>
           </a:xfrm>
           <a:prstGeom prst="rect">
             <a:avLst/>
@@ -9312,301 +7700,99 @@
           </a:bodyPr>
           <a:lstStyle/>
           <a:p>
-            <a:pPr algn="l"/>
-            <a:r>
-              <a:rPr sz="1400" b="1">
-                <a:solidFill>
-                  <a:srgbClr val="1E3A5F"/>
-                </a:solidFill>
-                <a:latin typeface="Calibri"/>
-              </a:rPr>
-              <a:t>🔔  Notificações em Tempo Real</a:t>
-            </a:r>
-          </a:p>
-        </p:txBody>
-      </p:sp>
-      <p:sp>
-        <p:nvSpPr>
-          <p:cNvPr id="6" name="TextBox 5"/>
-          <p:cNvSpPr txBox="1"/>
-          <p:nvPr/>
-        </p:nvSpPr>
-        <p:spPr>
-          <a:xfrm>
-            <a:off x="502920" y="1874519"/>
-            <a:ext cx="5303520" cy="4297680"/>
-          </a:xfrm>
-          <a:prstGeom prst="rect">
-            <a:avLst/>
-          </a:prstGeom>
-          <a:noFill/>
-        </p:spPr>
-        <p:txBody>
-          <a:bodyPr wrap="square">
-            <a:spAutoFit/>
-          </a:bodyPr>
-          <a:lstStyle/>
-          <a:p>
             <a:pPr>
               <a:spcAft>
-                <a:spcPts val="800"/>
+                <a:spcPts val="1400"/>
               </a:spcAft>
-              <a:defRPr sz="1200">
-                <a:solidFill>
-                  <a:srgbClr val="1E3A5F"/>
+              <a:defRPr sz="1600">
+                <a:solidFill>
+                  <a:srgbClr val="222222"/>
                 </a:solidFill>
                 <a:latin typeface="Calibri"/>
               </a:defRPr>
             </a:pPr>
             <a:r>
-              <a:t>• Tecnologia Server-Sent Events (SSE)</a:t>
+              <a:t>✏️  Croquis e medidas criados diretamente dentro da requisição</a:t>
             </a:r>
           </a:p>
           <a:p>
             <a:pPr>
               <a:spcAft>
-                <a:spcPts val="800"/>
+                <a:spcPts val="1400"/>
               </a:spcAft>
-              <a:defRPr sz="1200">
-                <a:solidFill>
-                  <a:srgbClr val="1E3A5F"/>
+              <a:defRPr sz="1600">
+                <a:solidFill>
+                  <a:srgbClr val="222222"/>
                 </a:solidFill>
                 <a:latin typeface="Calibri"/>
               </a:defRPr>
             </a:pPr>
             <a:r>
-              <a:t>• Toasts animados + painel lateral dedicado</a:t>
+              <a:t>🛠️  9 ferramentas: caneta, linha, seta, retângulo, texto, cota MM e mais</a:t>
             </a:r>
           </a:p>
           <a:p>
             <a:pPr>
               <a:spcAft>
-                <a:spcPts val="800"/>
+                <a:spcPts val="1400"/>
               </a:spcAft>
-              <a:defRPr sz="1200">
-                <a:solidFill>
-                  <a:srgbClr val="1E3A5F"/>
+              <a:defRPr sz="1600">
+                <a:solidFill>
+                  <a:srgbClr val="222222"/>
                 </a:solidFill>
                 <a:latin typeface="Calibri"/>
               </a:defRPr>
             </a:pPr>
             <a:r>
-              <a:t>• Admins e gerentes recebem todas as notificações</a:t>
+              <a:t>📏  Cota MM calcula e posiciona o rótulo automaticamente, sem sobreposição</a:t>
             </a:r>
           </a:p>
           <a:p>
             <a:pPr>
               <a:spcAft>
-                <a:spcPts val="800"/>
+                <a:spcPts val="1400"/>
               </a:spcAft>
-              <a:defRPr sz="1200">
-                <a:solidFill>
-                  <a:srgbClr val="1E3A5F"/>
+              <a:defRPr sz="1600">
+                <a:solidFill>
+                  <a:srgbClr val="222222"/>
                 </a:solidFill>
                 <a:latin typeface="Calibri"/>
               </a:defRPr>
             </a:pPr>
             <a:r>
-              <a:t>• Reconexão automática em caso de queda de rede</a:t>
+              <a:t>🔗  Snap de extremidades para linhas precisas e bem conectadas</a:t>
             </a:r>
           </a:p>
           <a:p>
             <a:pPr>
               <a:spcAft>
-                <a:spcPts val="800"/>
+                <a:spcPts val="1400"/>
               </a:spcAft>
-              <a:defRPr sz="1200">
-                <a:solidFill>
-                  <a:srgbClr val="1E3A5F"/>
+              <a:defRPr sz="1600">
+                <a:solidFill>
+                  <a:srgbClr val="222222"/>
                 </a:solidFill>
                 <a:latin typeface="Calibri"/>
               </a:defRPr>
             </a:pPr>
             <a:r>
-              <a:t>• Badge com contador de não lidas na sidebar</a:t>
-            </a:r>
-          </a:p>
-        </p:txBody>
-      </p:sp>
-      <p:sp>
-        <p:nvSpPr>
-          <p:cNvPr id="7" name="Rectangle 6"/>
-          <p:cNvSpPr/>
-          <p:nvPr/>
-        </p:nvSpPr>
-        <p:spPr>
-          <a:xfrm>
-            <a:off x="6217920" y="1188720"/>
-            <a:ext cx="5577840" cy="5212080"/>
-          </a:xfrm>
-          <a:prstGeom prst="rect">
-            <a:avLst/>
-          </a:prstGeom>
-          <a:solidFill>
-            <a:srgbClr val="E8F5E9"/>
-          </a:solidFill>
-          <a:ln w="12700">
-            <a:solidFill>
-              <a:srgbClr val="27AE60"/>
-            </a:solidFill>
-          </a:ln>
-        </p:spPr>
-        <p:style>
-          <a:lnRef idx="1">
-            <a:schemeClr val="accent1"/>
-          </a:lnRef>
-          <a:fillRef idx="3">
-            <a:schemeClr val="accent1"/>
-          </a:fillRef>
-          <a:effectRef idx="2">
-            <a:schemeClr val="accent1"/>
-          </a:effectRef>
-          <a:fontRef idx="minor">
-            <a:schemeClr val="lt1"/>
-          </a:fontRef>
-        </p:style>
-        <p:txBody>
-          <a:bodyPr rtlCol="0" anchor="ctr"/>
-          <a:lstStyle/>
-          <a:p>
-            <a:pPr algn="ctr"/>
-          </a:p>
-        </p:txBody>
-      </p:sp>
-      <p:sp>
-        <p:nvSpPr>
-          <p:cNvPr id="8" name="TextBox 7"/>
-          <p:cNvSpPr txBox="1"/>
-          <p:nvPr/>
-        </p:nvSpPr>
-        <p:spPr>
-          <a:xfrm>
-            <a:off x="6355080" y="1280160"/>
-            <a:ext cx="5303520" cy="502920"/>
-          </a:xfrm>
-          <a:prstGeom prst="rect">
-            <a:avLst/>
-          </a:prstGeom>
-          <a:noFill/>
-        </p:spPr>
-        <p:txBody>
-          <a:bodyPr wrap="square">
-            <a:spAutoFit/>
-          </a:bodyPr>
-          <a:lstStyle/>
-          <a:p>
-            <a:pPr algn="l"/>
-            <a:r>
-              <a:rPr sz="1400" b="1">
-                <a:solidFill>
-                  <a:srgbClr val="1B5E20"/>
-                </a:solidFill>
-                <a:latin typeface="Calibri"/>
-              </a:rPr>
-              <a:t>🗄️  Backup Automático</a:t>
-            </a:r>
-          </a:p>
-        </p:txBody>
-      </p:sp>
-      <p:sp>
-        <p:nvSpPr>
-          <p:cNvPr id="9" name="TextBox 8"/>
-          <p:cNvSpPr txBox="1"/>
-          <p:nvPr/>
-        </p:nvSpPr>
-        <p:spPr>
-          <a:xfrm>
-            <a:off x="6355080" y="1874519"/>
-            <a:ext cx="5303520" cy="4297680"/>
-          </a:xfrm>
-          <a:prstGeom prst="rect">
-            <a:avLst/>
-          </a:prstGeom>
-          <a:noFill/>
-        </p:spPr>
-        <p:txBody>
-          <a:bodyPr wrap="square">
-            <a:spAutoFit/>
-          </a:bodyPr>
-          <a:lstStyle/>
+              <a:t>⌨️  Atalho de teclado para cada ferramenta — P, L, A, R, M...</a:t>
+            </a:r>
+          </a:p>
           <a:p>
             <a:pPr>
               <a:spcAft>
-                <a:spcPts val="800"/>
+                <a:spcPts val="1400"/>
               </a:spcAft>
-              <a:defRPr sz="1200">
-                <a:solidFill>
-                  <a:srgbClr val="1B5E20"/>
+              <a:defRPr sz="1600">
+                <a:solidFill>
+                  <a:srgbClr val="222222"/>
                 </a:solidFill>
                 <a:latin typeface="Calibri"/>
               </a:defRPr>
             </a:pPr>
             <a:r>
-              <a:t>• pg_dump agendado (horário configurável)</a:t>
-            </a:r>
-          </a:p>
-          <a:p>
-            <a:pPr>
-              <a:spcAft>
-                <a:spcPts val="800"/>
-              </a:spcAft>
-              <a:defRPr sz="1200">
-                <a:solidFill>
-                  <a:srgbClr val="1B5E20"/>
-                </a:solidFill>
-                <a:latin typeface="Calibri"/>
-              </a:defRPr>
-            </a:pPr>
-            <a:r>
-              <a:t>• Retenção: diário, semanal e mensal</a:t>
-            </a:r>
-          </a:p>
-          <a:p>
-            <a:pPr>
-              <a:spcAft>
-                <a:spcPts val="800"/>
-              </a:spcAft>
-              <a:defRPr sz="1200">
-                <a:solidFill>
-                  <a:srgbClr val="1B5E20"/>
-                </a:solidFill>
-                <a:latin typeface="Calibri"/>
-              </a:defRPr>
-            </a:pPr>
-            <a:r>
-              <a:t>• Salvo em pasta de rede protegida (TI)</a:t>
-            </a:r>
-          </a:p>
-          <a:p>
-            <a:pPr>
-              <a:spcAft>
-                <a:spcPts val="800"/>
-              </a:spcAft>
-              <a:defRPr sz="1200">
-                <a:solidFill>
-                  <a:srgbClr val="1B5E20"/>
-                </a:solidFill>
-                <a:latin typeface="Calibri"/>
-              </a:defRPr>
-            </a:pPr>
-            <a:r>
-              <a:t>• Configurável pelo administrador no próprio app</a:t>
-            </a:r>
-          </a:p>
-          <a:p>
-            <a:pPr>
-              <a:spcAft>
-                <a:spcPts val="800"/>
-              </a:spcAft>
-              <a:defRPr sz="1200">
-                <a:solidFill>
-                  <a:srgbClr val="1B5E20"/>
-                </a:solidFill>
-                <a:latin typeface="Calibri"/>
-              </a:defRPr>
-            </a:pPr>
-            <a:r>
-              <a:t>• Restauração rápida em caso de incidente</a:t>
+              <a:t>📄  O desenho é exportado junto com o PDF da requisição</a:t>
             </a:r>
           </a:p>
         </p:txBody>
@@ -9667,7 +7853,7 @@
                 </a:solidFill>
                 <a:latin typeface="Calibri"/>
               </a:rPr>
-              <a:t>Atualização Sem Intervenção Técnica</a:t>
+              <a:t>Notificações em Tempo Real</a:t>
             </a:r>
           </a:p>
         </p:txBody>
@@ -9717,57 +7903,14 @@
       </p:sp>
       <p:sp>
         <p:nvSpPr>
-          <p:cNvPr id="4" name="Oval 3"/>
-          <p:cNvSpPr/>
-          <p:nvPr/>
-        </p:nvSpPr>
-        <p:spPr>
-          <a:xfrm>
-            <a:off x="1508760" y="1463040"/>
-            <a:ext cx="822960" cy="822960"/>
-          </a:xfrm>
-          <a:prstGeom prst="ellipse">
-            <a:avLst/>
-          </a:prstGeom>
-          <a:solidFill>
-            <a:srgbClr val="1E3A5F"/>
-          </a:solidFill>
-          <a:ln>
-            <a:noFill/>
-          </a:ln>
-        </p:spPr>
-        <p:style>
-          <a:lnRef idx="1">
-            <a:schemeClr val="accent1"/>
-          </a:lnRef>
-          <a:fillRef idx="3">
-            <a:schemeClr val="accent1"/>
-          </a:fillRef>
-          <a:effectRef idx="2">
-            <a:schemeClr val="accent1"/>
-          </a:effectRef>
-          <a:fontRef idx="minor">
-            <a:schemeClr val="lt1"/>
-          </a:fontRef>
-        </p:style>
-        <p:txBody>
-          <a:bodyPr rtlCol="0" anchor="ctr"/>
-          <a:lstStyle/>
-          <a:p>
-            <a:pPr algn="ctr"/>
-          </a:p>
-        </p:txBody>
-      </p:sp>
-      <p:sp>
-        <p:nvSpPr>
-          <p:cNvPr id="5" name="TextBox 4"/>
+          <p:cNvPr id="4" name="TextBox 3"/>
           <p:cNvSpPr txBox="1"/>
           <p:nvPr/>
         </p:nvSpPr>
         <p:spPr>
           <a:xfrm>
-            <a:off x="1508760" y="1463040"/>
-            <a:ext cx="822960" cy="822960"/>
+            <a:off x="548640" y="1280160"/>
+            <a:ext cx="11064240" cy="5029200"/>
           </a:xfrm>
           <a:prstGeom prst="rect">
             <a:avLst/>
@@ -9780,752 +7923,99 @@
           </a:bodyPr>
           <a:lstStyle/>
           <a:p>
-            <a:pPr algn="ctr"/>
-            <a:r>
-              <a:rPr sz="1800" b="1">
-                <a:solidFill>
-                  <a:srgbClr val="FFFFFF"/>
-                </a:solidFill>
-                <a:latin typeface="Calibri"/>
-              </a:rPr>
-              <a:t>1</a:t>
-            </a:r>
-          </a:p>
-        </p:txBody>
-      </p:sp>
-      <p:sp>
-        <p:nvSpPr>
-          <p:cNvPr id="6" name="Rectangle 5"/>
-          <p:cNvSpPr/>
-          <p:nvPr/>
-        </p:nvSpPr>
-        <p:spPr>
-          <a:xfrm>
-            <a:off x="640080" y="2423160"/>
-            <a:ext cx="2560320" cy="2286000"/>
-          </a:xfrm>
-          <a:prstGeom prst="rect">
-            <a:avLst/>
-          </a:prstGeom>
-          <a:solidFill>
-            <a:srgbClr val="D6E4F0"/>
-          </a:solidFill>
-          <a:ln w="25400">
-            <a:solidFill>
-              <a:srgbClr val="1E3A5F"/>
-            </a:solidFill>
-          </a:ln>
-        </p:spPr>
-        <p:style>
-          <a:lnRef idx="1">
-            <a:schemeClr val="accent1"/>
-          </a:lnRef>
-          <a:fillRef idx="3">
-            <a:schemeClr val="accent1"/>
-          </a:fillRef>
-          <a:effectRef idx="2">
-            <a:schemeClr val="accent1"/>
-          </a:effectRef>
-          <a:fontRef idx="minor">
-            <a:schemeClr val="lt1"/>
-          </a:fontRef>
-        </p:style>
-        <p:txBody>
-          <a:bodyPr rtlCol="0" anchor="ctr"/>
-          <a:lstStyle/>
-          <a:p>
-            <a:pPr algn="ctr"/>
-          </a:p>
-        </p:txBody>
-      </p:sp>
-      <p:sp>
-        <p:nvSpPr>
-          <p:cNvPr id="7" name="TextBox 6"/>
-          <p:cNvSpPr txBox="1"/>
-          <p:nvPr/>
-        </p:nvSpPr>
-        <p:spPr>
-          <a:xfrm>
-            <a:off x="731520" y="2514600"/>
-            <a:ext cx="2377440" cy="2103120"/>
-          </a:xfrm>
-          <a:prstGeom prst="rect">
-            <a:avLst/>
-          </a:prstGeom>
-          <a:noFill/>
-        </p:spPr>
-        <p:txBody>
-          <a:bodyPr wrap="square">
-            <a:spAutoFit/>
-          </a:bodyPr>
-          <a:lstStyle/>
-          <a:p>
-            <a:pPr algn="ctr"/>
-            <a:r>
-              <a:rPr sz="1300" b="1">
-                <a:solidFill>
-                  <a:srgbClr val="1E3A5F"/>
-                </a:solidFill>
-                <a:latin typeface="Calibri"/>
-              </a:rPr>
-              <a:t>Nova versão
-publicada
-no GitHub</a:t>
-            </a:r>
-          </a:p>
-        </p:txBody>
-      </p:sp>
-      <p:sp>
-        <p:nvSpPr>
-          <p:cNvPr id="8" name="TextBox 7"/>
-          <p:cNvSpPr txBox="1"/>
-          <p:nvPr/>
-        </p:nvSpPr>
-        <p:spPr>
-          <a:xfrm>
-            <a:off x="3246120" y="3246120"/>
-            <a:ext cx="365760" cy="502920"/>
-          </a:xfrm>
-          <a:prstGeom prst="rect">
-            <a:avLst/>
-          </a:prstGeom>
-          <a:noFill/>
-        </p:spPr>
-        <p:txBody>
-          <a:bodyPr wrap="square">
-            <a:spAutoFit/>
-          </a:bodyPr>
-          <a:lstStyle/>
-          <a:p>
-            <a:pPr algn="ctr"/>
-            <a:r>
-              <a:rPr sz="2400" b="0">
-                <a:solidFill>
-                  <a:srgbClr val="2E6DA4"/>
-                </a:solidFill>
-                <a:latin typeface="Calibri"/>
-              </a:rPr>
-              <a:t>→</a:t>
-            </a:r>
-          </a:p>
-        </p:txBody>
-      </p:sp>
-      <p:sp>
-        <p:nvSpPr>
-          <p:cNvPr id="9" name="Oval 8"/>
-          <p:cNvSpPr/>
-          <p:nvPr/>
-        </p:nvSpPr>
-        <p:spPr>
-          <a:xfrm>
-            <a:off x="4343400" y="1463040"/>
-            <a:ext cx="822960" cy="822960"/>
-          </a:xfrm>
-          <a:prstGeom prst="ellipse">
-            <a:avLst/>
-          </a:prstGeom>
-          <a:solidFill>
-            <a:srgbClr val="2E6DA4"/>
-          </a:solidFill>
-          <a:ln>
-            <a:noFill/>
-          </a:ln>
-        </p:spPr>
-        <p:style>
-          <a:lnRef idx="1">
-            <a:schemeClr val="accent1"/>
-          </a:lnRef>
-          <a:fillRef idx="3">
-            <a:schemeClr val="accent1"/>
-          </a:fillRef>
-          <a:effectRef idx="2">
-            <a:schemeClr val="accent1"/>
-          </a:effectRef>
-          <a:fontRef idx="minor">
-            <a:schemeClr val="lt1"/>
-          </a:fontRef>
-        </p:style>
-        <p:txBody>
-          <a:bodyPr rtlCol="0" anchor="ctr"/>
-          <a:lstStyle/>
-          <a:p>
-            <a:pPr algn="ctr"/>
-          </a:p>
-        </p:txBody>
-      </p:sp>
-      <p:sp>
-        <p:nvSpPr>
-          <p:cNvPr id="10" name="TextBox 9"/>
-          <p:cNvSpPr txBox="1"/>
-          <p:nvPr/>
-        </p:nvSpPr>
-        <p:spPr>
-          <a:xfrm>
-            <a:off x="4343400" y="1463040"/>
-            <a:ext cx="822960" cy="822960"/>
-          </a:xfrm>
-          <a:prstGeom prst="rect">
-            <a:avLst/>
-          </a:prstGeom>
-          <a:noFill/>
-        </p:spPr>
-        <p:txBody>
-          <a:bodyPr wrap="square">
-            <a:spAutoFit/>
-          </a:bodyPr>
-          <a:lstStyle/>
-          <a:p>
-            <a:pPr algn="ctr"/>
-            <a:r>
-              <a:rPr sz="1800" b="1">
-                <a:solidFill>
-                  <a:srgbClr val="FFFFFF"/>
-                </a:solidFill>
-                <a:latin typeface="Calibri"/>
-              </a:rPr>
-              <a:t>2</a:t>
-            </a:r>
-          </a:p>
-        </p:txBody>
-      </p:sp>
-      <p:sp>
-        <p:nvSpPr>
-          <p:cNvPr id="11" name="Rectangle 10"/>
-          <p:cNvSpPr/>
-          <p:nvPr/>
-        </p:nvSpPr>
-        <p:spPr>
-          <a:xfrm>
-            <a:off x="3474720" y="2423160"/>
-            <a:ext cx="2560320" cy="2286000"/>
-          </a:xfrm>
-          <a:prstGeom prst="rect">
-            <a:avLst/>
-          </a:prstGeom>
-          <a:solidFill>
-            <a:srgbClr val="D6E4F0"/>
-          </a:solidFill>
-          <a:ln w="25400">
-            <a:solidFill>
-              <a:srgbClr val="2E6DA4"/>
-            </a:solidFill>
-          </a:ln>
-        </p:spPr>
-        <p:style>
-          <a:lnRef idx="1">
-            <a:schemeClr val="accent1"/>
-          </a:lnRef>
-          <a:fillRef idx="3">
-            <a:schemeClr val="accent1"/>
-          </a:fillRef>
-          <a:effectRef idx="2">
-            <a:schemeClr val="accent1"/>
-          </a:effectRef>
-          <a:fontRef idx="minor">
-            <a:schemeClr val="lt1"/>
-          </a:fontRef>
-        </p:style>
-        <p:txBody>
-          <a:bodyPr rtlCol="0" anchor="ctr"/>
-          <a:lstStyle/>
-          <a:p>
-            <a:pPr algn="ctr"/>
-          </a:p>
-        </p:txBody>
-      </p:sp>
-      <p:sp>
-        <p:nvSpPr>
-          <p:cNvPr id="12" name="TextBox 11"/>
-          <p:cNvSpPr txBox="1"/>
-          <p:nvPr/>
-        </p:nvSpPr>
-        <p:spPr>
-          <a:xfrm>
-            <a:off x="3566160" y="2514600"/>
-            <a:ext cx="2377440" cy="2103120"/>
-          </a:xfrm>
-          <a:prstGeom prst="rect">
-            <a:avLst/>
-          </a:prstGeom>
-          <a:noFill/>
-        </p:spPr>
-        <p:txBody>
-          <a:bodyPr wrap="square">
-            <a:spAutoFit/>
-          </a:bodyPr>
-          <a:lstStyle/>
-          <a:p>
-            <a:pPr algn="ctr"/>
-            <a:r>
-              <a:rPr sz="1300" b="1">
-                <a:solidFill>
-                  <a:srgbClr val="1E3A5F"/>
-                </a:solidFill>
-                <a:latin typeface="Calibri"/>
-              </a:rPr>
-              <a:t>App detecta
-automaticamente
-no startup</a:t>
-            </a:r>
-          </a:p>
-        </p:txBody>
-      </p:sp>
-      <p:sp>
-        <p:nvSpPr>
-          <p:cNvPr id="13" name="TextBox 12"/>
-          <p:cNvSpPr txBox="1"/>
-          <p:nvPr/>
-        </p:nvSpPr>
-        <p:spPr>
-          <a:xfrm>
-            <a:off x="6080760" y="3246120"/>
-            <a:ext cx="365760" cy="502920"/>
-          </a:xfrm>
-          <a:prstGeom prst="rect">
-            <a:avLst/>
-          </a:prstGeom>
-          <a:noFill/>
-        </p:spPr>
-        <p:txBody>
-          <a:bodyPr wrap="square">
-            <a:spAutoFit/>
-          </a:bodyPr>
-          <a:lstStyle/>
-          <a:p>
-            <a:pPr algn="ctr"/>
-            <a:r>
-              <a:rPr sz="2400" b="0">
-                <a:solidFill>
-                  <a:srgbClr val="2E6DA4"/>
-                </a:solidFill>
-                <a:latin typeface="Calibri"/>
-              </a:rPr>
-              <a:t>→</a:t>
-            </a:r>
-          </a:p>
-        </p:txBody>
-      </p:sp>
-      <p:sp>
-        <p:nvSpPr>
-          <p:cNvPr id="14" name="Oval 13"/>
-          <p:cNvSpPr/>
-          <p:nvPr/>
-        </p:nvSpPr>
-        <p:spPr>
-          <a:xfrm>
-            <a:off x="7178040" y="1463040"/>
-            <a:ext cx="822960" cy="822960"/>
-          </a:xfrm>
-          <a:prstGeom prst="ellipse">
-            <a:avLst/>
-          </a:prstGeom>
-          <a:solidFill>
-            <a:srgbClr val="16789A"/>
-          </a:solidFill>
-          <a:ln>
-            <a:noFill/>
-          </a:ln>
-        </p:spPr>
-        <p:style>
-          <a:lnRef idx="1">
-            <a:schemeClr val="accent1"/>
-          </a:lnRef>
-          <a:fillRef idx="3">
-            <a:schemeClr val="accent1"/>
-          </a:fillRef>
-          <a:effectRef idx="2">
-            <a:schemeClr val="accent1"/>
-          </a:effectRef>
-          <a:fontRef idx="minor">
-            <a:schemeClr val="lt1"/>
-          </a:fontRef>
-        </p:style>
-        <p:txBody>
-          <a:bodyPr rtlCol="0" anchor="ctr"/>
-          <a:lstStyle/>
-          <a:p>
-            <a:pPr algn="ctr"/>
-          </a:p>
-        </p:txBody>
-      </p:sp>
-      <p:sp>
-        <p:nvSpPr>
-          <p:cNvPr id="15" name="TextBox 14"/>
-          <p:cNvSpPr txBox="1"/>
-          <p:nvPr/>
-        </p:nvSpPr>
-        <p:spPr>
-          <a:xfrm>
-            <a:off x="7178040" y="1463040"/>
-            <a:ext cx="822960" cy="822960"/>
-          </a:xfrm>
-          <a:prstGeom prst="rect">
-            <a:avLst/>
-          </a:prstGeom>
-          <a:noFill/>
-        </p:spPr>
-        <p:txBody>
-          <a:bodyPr wrap="square">
-            <a:spAutoFit/>
-          </a:bodyPr>
-          <a:lstStyle/>
-          <a:p>
-            <a:pPr algn="ctr"/>
-            <a:r>
-              <a:rPr sz="1800" b="1">
-                <a:solidFill>
-                  <a:srgbClr val="FFFFFF"/>
-                </a:solidFill>
-                <a:latin typeface="Calibri"/>
-              </a:rPr>
-              <a:t>3</a:t>
-            </a:r>
-          </a:p>
-        </p:txBody>
-      </p:sp>
-      <p:sp>
-        <p:nvSpPr>
-          <p:cNvPr id="16" name="Rectangle 15"/>
-          <p:cNvSpPr/>
-          <p:nvPr/>
-        </p:nvSpPr>
-        <p:spPr>
-          <a:xfrm>
-            <a:off x="6309360" y="2423160"/>
-            <a:ext cx="2560320" cy="2286000"/>
-          </a:xfrm>
-          <a:prstGeom prst="rect">
-            <a:avLst/>
-          </a:prstGeom>
-          <a:solidFill>
-            <a:srgbClr val="D6E4F0"/>
-          </a:solidFill>
-          <a:ln w="25400">
-            <a:solidFill>
-              <a:srgbClr val="16789A"/>
-            </a:solidFill>
-          </a:ln>
-        </p:spPr>
-        <p:style>
-          <a:lnRef idx="1">
-            <a:schemeClr val="accent1"/>
-          </a:lnRef>
-          <a:fillRef idx="3">
-            <a:schemeClr val="accent1"/>
-          </a:fillRef>
-          <a:effectRef idx="2">
-            <a:schemeClr val="accent1"/>
-          </a:effectRef>
-          <a:fontRef idx="minor">
-            <a:schemeClr val="lt1"/>
-          </a:fontRef>
-        </p:style>
-        <p:txBody>
-          <a:bodyPr rtlCol="0" anchor="ctr"/>
-          <a:lstStyle/>
-          <a:p>
-            <a:pPr algn="ctr"/>
-          </a:p>
-        </p:txBody>
-      </p:sp>
-      <p:sp>
-        <p:nvSpPr>
-          <p:cNvPr id="17" name="TextBox 16"/>
-          <p:cNvSpPr txBox="1"/>
-          <p:nvPr/>
-        </p:nvSpPr>
-        <p:spPr>
-          <a:xfrm>
-            <a:off x="6400800" y="2514600"/>
-            <a:ext cx="2377440" cy="2103120"/>
-          </a:xfrm>
-          <a:prstGeom prst="rect">
-            <a:avLst/>
-          </a:prstGeom>
-          <a:noFill/>
-        </p:spPr>
-        <p:txBody>
-          <a:bodyPr wrap="square">
-            <a:spAutoFit/>
-          </a:bodyPr>
-          <a:lstStyle/>
-          <a:p>
-            <a:pPr algn="ctr"/>
-            <a:r>
-              <a:rPr sz="1300" b="1">
-                <a:solidFill>
-                  <a:srgbClr val="1E3A5F"/>
-                </a:solidFill>
-                <a:latin typeface="Calibri"/>
-              </a:rPr>
-              <a:t>Usuário clica
-"Atualizar
-agora"</a:t>
-            </a:r>
-          </a:p>
-        </p:txBody>
-      </p:sp>
-      <p:sp>
-        <p:nvSpPr>
-          <p:cNvPr id="18" name="TextBox 17"/>
-          <p:cNvSpPr txBox="1"/>
-          <p:nvPr/>
-        </p:nvSpPr>
-        <p:spPr>
-          <a:xfrm>
-            <a:off x="8915400" y="3246120"/>
-            <a:ext cx="365760" cy="502920"/>
-          </a:xfrm>
-          <a:prstGeom prst="rect">
-            <a:avLst/>
-          </a:prstGeom>
-          <a:noFill/>
-        </p:spPr>
-        <p:txBody>
-          <a:bodyPr wrap="square">
-            <a:spAutoFit/>
-          </a:bodyPr>
-          <a:lstStyle/>
-          <a:p>
-            <a:pPr algn="ctr"/>
-            <a:r>
-              <a:rPr sz="2400" b="0">
-                <a:solidFill>
-                  <a:srgbClr val="2E6DA4"/>
-                </a:solidFill>
-                <a:latin typeface="Calibri"/>
-              </a:rPr>
-              <a:t>→</a:t>
-            </a:r>
-          </a:p>
-        </p:txBody>
-      </p:sp>
-      <p:sp>
-        <p:nvSpPr>
-          <p:cNvPr id="19" name="Oval 18"/>
-          <p:cNvSpPr/>
-          <p:nvPr/>
-        </p:nvSpPr>
-        <p:spPr>
-          <a:xfrm>
-            <a:off x="10012680" y="1463040"/>
-            <a:ext cx="822960" cy="822960"/>
-          </a:xfrm>
-          <a:prstGeom prst="ellipse">
-            <a:avLst/>
-          </a:prstGeom>
-          <a:solidFill>
-            <a:srgbClr val="27AE60"/>
-          </a:solidFill>
-          <a:ln>
-            <a:noFill/>
-          </a:ln>
-        </p:spPr>
-        <p:style>
-          <a:lnRef idx="1">
-            <a:schemeClr val="accent1"/>
-          </a:lnRef>
-          <a:fillRef idx="3">
-            <a:schemeClr val="accent1"/>
-          </a:fillRef>
-          <a:effectRef idx="2">
-            <a:schemeClr val="accent1"/>
-          </a:effectRef>
-          <a:fontRef idx="minor">
-            <a:schemeClr val="lt1"/>
-          </a:fontRef>
-        </p:style>
-        <p:txBody>
-          <a:bodyPr rtlCol="0" anchor="ctr"/>
-          <a:lstStyle/>
-          <a:p>
-            <a:pPr algn="ctr"/>
-          </a:p>
-        </p:txBody>
-      </p:sp>
-      <p:sp>
-        <p:nvSpPr>
-          <p:cNvPr id="20" name="TextBox 19"/>
-          <p:cNvSpPr txBox="1"/>
-          <p:nvPr/>
-        </p:nvSpPr>
-        <p:spPr>
-          <a:xfrm>
-            <a:off x="10012680" y="1463040"/>
-            <a:ext cx="822960" cy="822960"/>
-          </a:xfrm>
-          <a:prstGeom prst="rect">
-            <a:avLst/>
-          </a:prstGeom>
-          <a:noFill/>
-        </p:spPr>
-        <p:txBody>
-          <a:bodyPr wrap="square">
-            <a:spAutoFit/>
-          </a:bodyPr>
-          <a:lstStyle/>
-          <a:p>
-            <a:pPr algn="ctr"/>
-            <a:r>
-              <a:rPr sz="1800" b="1">
-                <a:solidFill>
-                  <a:srgbClr val="FFFFFF"/>
-                </a:solidFill>
-                <a:latin typeface="Calibri"/>
-              </a:rPr>
-              <a:t>4</a:t>
-            </a:r>
-          </a:p>
-        </p:txBody>
-      </p:sp>
-      <p:sp>
-        <p:nvSpPr>
-          <p:cNvPr id="21" name="Rectangle 20"/>
-          <p:cNvSpPr/>
-          <p:nvPr/>
-        </p:nvSpPr>
-        <p:spPr>
-          <a:xfrm>
-            <a:off x="9144000" y="2423160"/>
-            <a:ext cx="2560320" cy="2286000"/>
-          </a:xfrm>
-          <a:prstGeom prst="rect">
-            <a:avLst/>
-          </a:prstGeom>
-          <a:solidFill>
-            <a:srgbClr val="D6E4F0"/>
-          </a:solidFill>
-          <a:ln w="25400">
-            <a:solidFill>
-              <a:srgbClr val="27AE60"/>
-            </a:solidFill>
-          </a:ln>
-        </p:spPr>
-        <p:style>
-          <a:lnRef idx="1">
-            <a:schemeClr val="accent1"/>
-          </a:lnRef>
-          <a:fillRef idx="3">
-            <a:schemeClr val="accent1"/>
-          </a:fillRef>
-          <a:effectRef idx="2">
-            <a:schemeClr val="accent1"/>
-          </a:effectRef>
-          <a:fontRef idx="minor">
-            <a:schemeClr val="lt1"/>
-          </a:fontRef>
-        </p:style>
-        <p:txBody>
-          <a:bodyPr rtlCol="0" anchor="ctr"/>
-          <a:lstStyle/>
-          <a:p>
-            <a:pPr algn="ctr"/>
-          </a:p>
-        </p:txBody>
-      </p:sp>
-      <p:sp>
-        <p:nvSpPr>
-          <p:cNvPr id="22" name="TextBox 21"/>
-          <p:cNvSpPr txBox="1"/>
-          <p:nvPr/>
-        </p:nvSpPr>
-        <p:spPr>
-          <a:xfrm>
-            <a:off x="9235440" y="2514600"/>
-            <a:ext cx="2377440" cy="2103120"/>
-          </a:xfrm>
-          <a:prstGeom prst="rect">
-            <a:avLst/>
-          </a:prstGeom>
-          <a:noFill/>
-        </p:spPr>
-        <p:txBody>
-          <a:bodyPr wrap="square">
-            <a:spAutoFit/>
-          </a:bodyPr>
-          <a:lstStyle/>
-          <a:p>
-            <a:pPr algn="ctr"/>
-            <a:r>
-              <a:rPr sz="1300" b="1">
-                <a:solidFill>
-                  <a:srgbClr val="1E3A5F"/>
-                </a:solidFill>
-                <a:latin typeface="Calibri"/>
-              </a:rPr>
-              <a:t>App fecha,
-atualiza e
-reabre sozinho</a:t>
-            </a:r>
-          </a:p>
-        </p:txBody>
-      </p:sp>
-      <p:sp>
-        <p:nvSpPr>
-          <p:cNvPr id="23" name="TextBox 22"/>
-          <p:cNvSpPr txBox="1"/>
-          <p:nvPr/>
-        </p:nvSpPr>
-        <p:spPr>
-          <a:xfrm>
-            <a:off x="457200" y="5029200"/>
-            <a:ext cx="11247120" cy="411480"/>
-          </a:xfrm>
-          <a:prstGeom prst="rect">
-            <a:avLst/>
-          </a:prstGeom>
-          <a:noFill/>
-        </p:spPr>
-        <p:txBody>
-          <a:bodyPr wrap="square">
-            <a:spAutoFit/>
-          </a:bodyPr>
-          <a:lstStyle/>
-          <a:p>
-            <a:pPr algn="ctr"/>
-            <a:r>
-              <a:rPr sz="1200" b="1">
-                <a:solidFill>
-                  <a:srgbClr val="27AE60"/>
-                </a:solidFill>
-                <a:latin typeface="Calibri"/>
-              </a:rPr>
-              <a:t>✅  Configurações e dados do usuário são preservados durante a atualização</a:t>
-            </a:r>
-          </a:p>
-        </p:txBody>
-      </p:sp>
-      <p:sp>
-        <p:nvSpPr>
-          <p:cNvPr id="24" name="TextBox 23"/>
-          <p:cNvSpPr txBox="1"/>
-          <p:nvPr/>
-        </p:nvSpPr>
-        <p:spPr>
-          <a:xfrm>
-            <a:off x="457200" y="5486400"/>
-            <a:ext cx="11247120" cy="411480"/>
-          </a:xfrm>
-          <a:prstGeom prst="rect">
-            <a:avLst/>
-          </a:prstGeom>
-          <a:noFill/>
-        </p:spPr>
-        <p:txBody>
-          <a:bodyPr wrap="square">
-            <a:spAutoFit/>
-          </a:bodyPr>
-          <a:lstStyle/>
-          <a:p>
-            <a:pPr algn="ctr"/>
-            <a:r>
-              <a:rPr sz="1100" b="0">
-                <a:solidFill>
-                  <a:srgbClr val="2E6DA4"/>
-                </a:solidFill>
-                <a:latin typeface="Calibri"/>
-              </a:rPr>
-              <a:t>Versão atual: v1.1.0  |  Versões futuras seguem o mesmo processo automático</a:t>
+            <a:pPr>
+              <a:spcAft>
+                <a:spcPts val="1400"/>
+              </a:spcAft>
+              <a:defRPr sz="1600">
+                <a:solidFill>
+                  <a:srgbClr val="222222"/>
+                </a:solidFill>
+                <a:latin typeface="Calibri"/>
+              </a:defRPr>
+            </a:pPr>
+            <a:r>
+              <a:t>🔔  Badge na sidebar indica quantas notificações estão não lidas</a:t>
+            </a:r>
+          </a:p>
+          <a:p>
+            <a:pPr>
+              <a:spcAft>
+                <a:spcPts val="1400"/>
+              </a:spcAft>
+              <a:defRPr sz="1600">
+                <a:solidFill>
+                  <a:srgbClr val="222222"/>
+                </a:solidFill>
+                <a:latin typeface="Calibri"/>
+              </a:defRPr>
+            </a:pPr>
+            <a:r>
+              <a:t>💬  Pop-ups aparecem automaticamente ao surgir um evento</a:t>
+            </a:r>
+          </a:p>
+          <a:p>
+            <a:pPr>
+              <a:spcAft>
+                <a:spcPts val="1400"/>
+              </a:spcAft>
+              <a:defRPr sz="1600">
+                <a:solidFill>
+                  <a:srgbClr val="222222"/>
+                </a:solidFill>
+                <a:latin typeface="Calibri"/>
+              </a:defRPr>
+            </a:pPr>
+            <a:r>
+              <a:t>📋  Painel lateral com histórico completo de notificações</a:t>
+            </a:r>
+          </a:p>
+          <a:p>
+            <a:pPr>
+              <a:spcAft>
+                <a:spcPts val="1400"/>
+              </a:spcAft>
+              <a:defRPr sz="1600">
+                <a:solidFill>
+                  <a:srgbClr val="222222"/>
+                </a:solidFill>
+                <a:latin typeface="Calibri"/>
+              </a:defRPr>
+            </a:pPr>
+            <a:r>
+              <a:t>⚡  Atualizações instantâneas — sem precisar recarregar a tela</a:t>
+            </a:r>
+          </a:p>
+          <a:p>
+            <a:pPr>
+              <a:spcAft>
+                <a:spcPts val="1400"/>
+              </a:spcAft>
+              <a:defRPr sz="1600">
+                <a:solidFill>
+                  <a:srgbClr val="222222"/>
+                </a:solidFill>
+                <a:latin typeface="Calibri"/>
+              </a:defRPr>
+            </a:pPr>
+            <a:r>
+              <a:t>📡  Reconexão automática em caso de queda de rede</a:t>
+            </a:r>
+          </a:p>
+          <a:p>
+            <a:pPr>
+              <a:spcAft>
+                <a:spcPts val="1400"/>
+              </a:spcAft>
+              <a:defRPr sz="1600">
+                <a:solidFill>
+                  <a:srgbClr val="222222"/>
+                </a:solidFill>
+                <a:latin typeface="Calibri"/>
+              </a:defRPr>
+            </a:pPr>
+            <a:r>
+              <a:t>👤  Cada perfil recebe apenas as notificações pertinentes à sua função</a:t>
             </a:r>
           </a:p>
         </p:txBody>
